--- a/content/05-teaching-resources/slides/core/05-essential-mathematics.pptx
+++ b/content/05-teaching-resources/slides/core/05-essential-mathematics.pptx
@@ -8,12 +8,18 @@
     <p:sldId id="256" r:id="rId7"/>
     <p:sldId id="257" r:id="rId8"/>
     <p:sldId id="258" r:id="rId9"/>
-    <p:sldId id="259" r:id="rId11"/>
+    <p:sldId id="259" r:id="rId10"/>
     <p:sldId id="260" r:id="rId12"/>
     <p:sldId id="261" r:id="rId13"/>
     <p:sldId id="262" r:id="rId14"/>
     <p:sldId id="263" r:id="rId15"/>
     <p:sldId id="264" r:id="rId16"/>
+    <p:sldId id="265" r:id="rId17"/>
+    <p:sldId id="266" r:id="rId18"/>
+    <p:sldId id="267" r:id="rId19"/>
+    <p:sldId id="268" r:id="rId20"/>
+    <p:sldId id="269" r:id="rId21"/>
+    <p:sldId id="270" r:id="rId22"/>
   </p:sldIdLst>
   <p:sldSz cx="12191695" cy="6858000" type="screen4x3"/>
   <p:notesSz cx="6858000" cy="9144000"/>
@@ -580,7 +586,22 @@
           <a:lstStyle/>
           <a:p>
             <a:r>
-              <a:t>Give students a few minutes to answer on mini whiteboards or paper, then reveal the answers on the next slide.</a:t>
+              <a:t>Answers:</a:t>
+            </a:r>
+          </a:p>
+          <a:p>
+            <a:r>
+              <a:t>1. The order to carry out operations.</a:t>
+            </a:r>
+          </a:p>
+          <a:p>
+            <a:r>
+              <a:t>2. The equation of a straight line (m is gradient, c is intercept).</a:t>
+            </a:r>
+          </a:p>
+          <a:p>
+            <a:r>
+              <a:t>3. E.g. finding maximum and minimum values.</a:t>
             </a:r>
           </a:p>
         </p:txBody>
@@ -650,7 +671,22 @@
           <a:lstStyle/>
           <a:p>
             <a:r>
-              <a:t>Talk through any answers the class found difficult.</a:t>
+              <a:t>Answers:</a:t>
+            </a:r>
+          </a:p>
+          <a:p>
+            <a:r>
+              <a:t>1. 7.2 x 10 to the power -3.</a:t>
+            </a:r>
+          </a:p>
+          <a:p>
+            <a:r>
+              <a:t>2. pi x r squared x h.</a:t>
+            </a:r>
+          </a:p>
+          <a:p>
+            <a:r>
+              <a:t>3. In right-angled triangles.</a:t>
             </a:r>
           </a:p>
         </p:txBody>
@@ -676,6 +712,231 @@
 </file>
 
 <file path=ppt/notesSlides/notesSlide4.xml><?xml version="1.0" encoding="utf-8"?>
+<p:notes xmlns:a="http://schemas.openxmlformats.org/drawingml/2006/main" xmlns:p="http://schemas.openxmlformats.org/presentationml/2006/main" xmlns:r="http://schemas.openxmlformats.org/officeDocument/2006/relationships">
+  <p:cSld>
+    <p:spTree>
+      <p:nvGrpSpPr>
+        <p:cNvPr id="1" name=""/>
+        <p:cNvGrpSpPr/>
+        <p:nvPr/>
+      </p:nvGrpSpPr>
+      <p:grpSpPr>
+        <a:xfrm>
+          <a:off x="0" y="0"/>
+          <a:ext cx="0" cy="0"/>
+          <a:chOff x="0" y="0"/>
+          <a:chExt cx="0" cy="0"/>
+        </a:xfrm>
+      </p:grpSpPr>
+      <p:sp>
+        <p:nvSpPr>
+          <p:cNvPr id="2" name="Slide Image Placeholder 1"/>
+          <p:cNvSpPr>
+            <a:spLocks noGrp="1"/>
+          </p:cNvSpPr>
+          <p:nvPr>
+            <p:ph type="sldImg" idx="2"/>
+          </p:nvPr>
+        </p:nvSpPr>
+        <p:spPr/>
+      </p:sp>
+      <p:sp>
+        <p:nvSpPr>
+          <p:cNvPr id="3" name="Notes Placeholder 2"/>
+          <p:cNvSpPr>
+            <a:spLocks noGrp="1"/>
+          </p:cNvSpPr>
+          <p:nvPr>
+            <p:ph type="body" idx="3" sz="quarter"/>
+          </p:nvPr>
+        </p:nvSpPr>
+        <p:spPr/>
+        <p:txBody>
+          <a:bodyPr/>
+          <a:lstStyle/>
+          <a:p>
+            <a:r>
+              <a:t>Answers:</a:t>
+            </a:r>
+          </a:p>
+          <a:p>
+            <a:r>
+              <a:t>1. 12.</a:t>
+            </a:r>
+          </a:p>
+          <a:p>
+            <a:r>
+              <a:t>2. It matches on and off electrical states.</a:t>
+            </a:r>
+          </a:p>
+          <a:p>
+            <a:r>
+              <a:t>3. Four.</a:t>
+            </a:r>
+          </a:p>
+        </p:txBody>
+      </p:sp>
+      <p:sp>
+        <p:nvSpPr>
+          <p:cNvPr id="4" name="Slide Number Placeholder 3"/>
+          <p:cNvSpPr>
+            <a:spLocks noGrp="1"/>
+          </p:cNvSpPr>
+          <p:nvPr>
+            <p:ph type="sldNum" idx="5" sz="quarter"/>
+          </p:nvPr>
+        </p:nvSpPr>
+        <p:spPr/>
+      </p:sp>
+    </p:spTree>
+  </p:cSld>
+  <p:clrMapOvr>
+    <a:masterClrMapping/>
+  </p:clrMapOvr>
+</p:notes>
+</file>
+
+<file path=ppt/notesSlides/notesSlide5.xml><?xml version="1.0" encoding="utf-8"?>
+<p:notes xmlns:a="http://schemas.openxmlformats.org/drawingml/2006/main" xmlns:p="http://schemas.openxmlformats.org/presentationml/2006/main" xmlns:r="http://schemas.openxmlformats.org/officeDocument/2006/relationships">
+  <p:cSld>
+    <p:spTree>
+      <p:nvGrpSpPr>
+        <p:cNvPr id="1" name=""/>
+        <p:cNvGrpSpPr/>
+        <p:nvPr/>
+      </p:nvGrpSpPr>
+      <p:grpSpPr>
+        <a:xfrm>
+          <a:off x="0" y="0"/>
+          <a:ext cx="0" cy="0"/>
+          <a:chOff x="0" y="0"/>
+          <a:chExt cx="0" cy="0"/>
+        </a:xfrm>
+      </p:grpSpPr>
+      <p:sp>
+        <p:nvSpPr>
+          <p:cNvPr id="2" name="Slide Image Placeholder 1"/>
+          <p:cNvSpPr>
+            <a:spLocks noGrp="1"/>
+          </p:cNvSpPr>
+          <p:nvPr>
+            <p:ph type="sldImg" idx="2"/>
+          </p:nvPr>
+        </p:nvSpPr>
+        <p:spPr/>
+      </p:sp>
+      <p:sp>
+        <p:nvSpPr>
+          <p:cNvPr id="3" name="Notes Placeholder 2"/>
+          <p:cNvSpPr>
+            <a:spLocks noGrp="1"/>
+          </p:cNvSpPr>
+          <p:nvPr>
+            <p:ph type="body" idx="3" sz="quarter"/>
+          </p:nvPr>
+        </p:nvSpPr>
+        <p:spPr/>
+        <p:txBody>
+          <a:bodyPr/>
+          <a:lstStyle/>
+          <a:p>
+            <a:r>
+              <a:t>Give students a few minutes to answer on mini whiteboards or paper, then reveal the answers on the next slide.</a:t>
+            </a:r>
+          </a:p>
+        </p:txBody>
+      </p:sp>
+      <p:sp>
+        <p:nvSpPr>
+          <p:cNvPr id="4" name="Slide Number Placeholder 3"/>
+          <p:cNvSpPr>
+            <a:spLocks noGrp="1"/>
+          </p:cNvSpPr>
+          <p:nvPr>
+            <p:ph type="sldNum" idx="5" sz="quarter"/>
+          </p:nvPr>
+        </p:nvSpPr>
+        <p:spPr/>
+      </p:sp>
+    </p:spTree>
+  </p:cSld>
+  <p:clrMapOvr>
+    <a:masterClrMapping/>
+  </p:clrMapOvr>
+</p:notes>
+</file>
+
+<file path=ppt/notesSlides/notesSlide6.xml><?xml version="1.0" encoding="utf-8"?>
+<p:notes xmlns:a="http://schemas.openxmlformats.org/drawingml/2006/main" xmlns:p="http://schemas.openxmlformats.org/presentationml/2006/main" xmlns:r="http://schemas.openxmlformats.org/officeDocument/2006/relationships">
+  <p:cSld>
+    <p:spTree>
+      <p:nvGrpSpPr>
+        <p:cNvPr id="1" name=""/>
+        <p:cNvGrpSpPr/>
+        <p:nvPr/>
+      </p:nvGrpSpPr>
+      <p:grpSpPr>
+        <a:xfrm>
+          <a:off x="0" y="0"/>
+          <a:ext cx="0" cy="0"/>
+          <a:chOff x="0" y="0"/>
+          <a:chExt cx="0" cy="0"/>
+        </a:xfrm>
+      </p:grpSpPr>
+      <p:sp>
+        <p:nvSpPr>
+          <p:cNvPr id="2" name="Slide Image Placeholder 1"/>
+          <p:cNvSpPr>
+            <a:spLocks noGrp="1"/>
+          </p:cNvSpPr>
+          <p:nvPr>
+            <p:ph type="sldImg" idx="2"/>
+          </p:nvPr>
+        </p:nvSpPr>
+        <p:spPr/>
+      </p:sp>
+      <p:sp>
+        <p:nvSpPr>
+          <p:cNvPr id="3" name="Notes Placeholder 2"/>
+          <p:cNvSpPr>
+            <a:spLocks noGrp="1"/>
+          </p:cNvSpPr>
+          <p:nvPr>
+            <p:ph type="body" idx="3" sz="quarter"/>
+          </p:nvPr>
+        </p:nvSpPr>
+        <p:spPr/>
+        <p:txBody>
+          <a:bodyPr/>
+          <a:lstStyle/>
+          <a:p>
+            <a:r>
+              <a:t>Talk through any answers the class found difficult.</a:t>
+            </a:r>
+          </a:p>
+        </p:txBody>
+      </p:sp>
+      <p:sp>
+        <p:nvSpPr>
+          <p:cNvPr id="4" name="Slide Number Placeholder 3"/>
+          <p:cNvSpPr>
+            <a:spLocks noGrp="1"/>
+          </p:cNvSpPr>
+          <p:nvPr>
+            <p:ph type="sldNum" idx="5" sz="quarter"/>
+          </p:nvPr>
+        </p:nvSpPr>
+        <p:spPr/>
+      </p:sp>
+    </p:spTree>
+  </p:cSld>
+  <p:clrMapOvr>
+    <a:masterClrMapping/>
+  </p:clrMapOvr>
+</p:notes>
+</file>
+
+<file path=ppt/notesSlides/notesSlide7.xml><?xml version="1.0" encoding="utf-8"?>
 <p:notes xmlns:a="http://schemas.openxmlformats.org/drawingml/2006/main" xmlns:p="http://schemas.openxmlformats.org/presentationml/2006/main" xmlns:r="http://schemas.openxmlformats.org/officeDocument/2006/relationships">
   <p:cSld>
     <p:spTree>
@@ -4045,7 +4306,7 @@
 </p:sld>
 </file>
 
-<file path=ppt/slides/slide2.xml><?xml version="1.0" encoding="utf-8"?>
+<file path=ppt/slides/slide10.xml><?xml version="1.0" encoding="utf-8"?>
 <p:sld xmlns:a="http://schemas.openxmlformats.org/drawingml/2006/main" xmlns:p="http://schemas.openxmlformats.org/presentationml/2006/main" xmlns:r="http://schemas.openxmlformats.org/officeDocument/2006/relationships">
   <p:cSld>
     <p:bg>
@@ -4124,7 +4385,7 @@
                 </a:solidFill>
                 <a:latin typeface="Cambria"/>
               </a:rPr>
-              <a:t>Learning objectives</a:t>
+              <a:t>Number systems</a:t>
             </a:r>
           </a:p>
         </p:txBody>
@@ -4190,1622 +4451,7 @@
                 </a:solidFill>
                 <a:latin typeface="Calibri"/>
               </a:rPr>
-              <a:t>2</a:t>
-            </a:r>
-          </a:p>
-        </p:txBody>
-      </p:sp>
-      <p:sp>
-        <p:nvSpPr>
-          <p:cNvPr id="6" name="TextBox 5"/>
-          <p:cNvSpPr txBox="1"/>
-          <p:nvPr/>
-        </p:nvSpPr>
-        <p:spPr>
-          <a:xfrm>
-            <a:off x="548640" y="1508760"/>
-            <a:ext cx="6766560" cy="365760"/>
-          </a:xfrm>
-          <a:prstGeom prst="rect">
-            <a:avLst/>
-          </a:prstGeom>
-          <a:noFill/>
-        </p:spPr>
-        <p:txBody>
-          <a:bodyPr wrap="square" anchor="t" lIns="0" rIns="0" tIns="0" bIns="0"/>
-          <a:lstStyle/>
-          <a:p>
-            <a:pPr algn="l"/>
-            <a:r>
-              <a:rPr sz="1600" b="0" i="1">
-                <a:solidFill>
-                  <a:srgbClr val="54595D"/>
-                </a:solidFill>
-                <a:latin typeface="Calibri"/>
-              </a:rPr>
-              <a:t>By the end of this lesson you should be able to:</a:t>
-            </a:r>
-          </a:p>
-        </p:txBody>
-      </p:sp>
-      <p:sp>
-        <p:nvSpPr>
-          <p:cNvPr id="7" name="Oval 6"/>
-          <p:cNvSpPr/>
-          <p:nvPr/>
-        </p:nvSpPr>
-        <p:spPr>
-          <a:xfrm>
-            <a:off x="548640" y="2234565"/>
-            <a:ext cx="457200" cy="457200"/>
-          </a:xfrm>
-          <a:prstGeom prst="ellipse">
-            <a:avLst/>
-          </a:prstGeom>
-          <a:solidFill>
-            <a:srgbClr val="F2B705"/>
-          </a:solidFill>
-          <a:ln>
-            <a:noFill/>
-          </a:ln>
-          <a:effectLst/>
-        </p:spPr>
-        <p:style>
-          <a:lnRef idx="1">
-            <a:schemeClr val="accent1"/>
-          </a:lnRef>
-          <a:fillRef idx="3">
-            <a:schemeClr val="accent1"/>
-          </a:fillRef>
-          <a:effectRef idx="2">
-            <a:schemeClr val="accent1"/>
-          </a:effectRef>
-          <a:fontRef idx="minor">
-            <a:schemeClr val="lt1"/>
-          </a:fontRef>
-        </p:style>
-        <p:txBody>
-          <a:bodyPr rtlCol="0" anchor="ctr" lIns="0" rIns="0" tIns="0" bIns="0"/>
-          <a:lstStyle/>
-          <a:p>
-            <a:pPr algn="ctr"/>
-            <a:r>
-              <a:rPr sz="1600" b="1">
-                <a:solidFill>
-                  <a:srgbClr val="202122"/>
-                </a:solidFill>
-                <a:latin typeface="Calibri"/>
-              </a:rPr>
-              <a:t>1</a:t>
-            </a:r>
-          </a:p>
-        </p:txBody>
-      </p:sp>
-      <p:sp>
-        <p:nvSpPr>
-          <p:cNvPr id="8" name="TextBox 7"/>
-          <p:cNvSpPr txBox="1"/>
-          <p:nvPr/>
-        </p:nvSpPr>
-        <p:spPr>
-          <a:xfrm>
-            <a:off x="1234440" y="2011680"/>
-            <a:ext cx="6035040" cy="902969"/>
-          </a:xfrm>
-          <a:prstGeom prst="rect">
-            <a:avLst/>
-          </a:prstGeom>
-          <a:noFill/>
-        </p:spPr>
-        <p:txBody>
-          <a:bodyPr wrap="square" anchor="ctr" lIns="0" rIns="0" tIns="0" bIns="0"/>
-          <a:lstStyle/>
-          <a:p>
-            <a:pPr algn="l"/>
-            <a:r>
-              <a:rPr sz="2000" b="0" i="0">
-                <a:solidFill>
-                  <a:srgbClr val="202122"/>
-                </a:solidFill>
-                <a:latin typeface="Calibri"/>
-              </a:rPr>
-              <a:t>Apply arithmetic, algebra and geometry to engineering problems.</a:t>
-            </a:r>
-          </a:p>
-        </p:txBody>
-      </p:sp>
-      <p:sp>
-        <p:nvSpPr>
-          <p:cNvPr id="9" name="Oval 8"/>
-          <p:cNvSpPr/>
-          <p:nvPr/>
-        </p:nvSpPr>
-        <p:spPr>
-          <a:xfrm>
-            <a:off x="548640" y="3274695"/>
-            <a:ext cx="457200" cy="457200"/>
-          </a:xfrm>
-          <a:prstGeom prst="ellipse">
-            <a:avLst/>
-          </a:prstGeom>
-          <a:solidFill>
-            <a:srgbClr val="F2B705"/>
-          </a:solidFill>
-          <a:ln>
-            <a:noFill/>
-          </a:ln>
-          <a:effectLst/>
-        </p:spPr>
-        <p:style>
-          <a:lnRef idx="1">
-            <a:schemeClr val="accent1"/>
-          </a:lnRef>
-          <a:fillRef idx="3">
-            <a:schemeClr val="accent1"/>
-          </a:fillRef>
-          <a:effectRef idx="2">
-            <a:schemeClr val="accent1"/>
-          </a:effectRef>
-          <a:fontRef idx="minor">
-            <a:schemeClr val="lt1"/>
-          </a:fontRef>
-        </p:style>
-        <p:txBody>
-          <a:bodyPr rtlCol="0" anchor="ctr" lIns="0" rIns="0" tIns="0" bIns="0"/>
-          <a:lstStyle/>
-          <a:p>
-            <a:pPr algn="ctr"/>
-            <a:r>
-              <a:rPr sz="1600" b="1">
-                <a:solidFill>
-                  <a:srgbClr val="202122"/>
-                </a:solidFill>
-                <a:latin typeface="Calibri"/>
-              </a:rPr>
-              <a:t>2</a:t>
-            </a:r>
-          </a:p>
-        </p:txBody>
-      </p:sp>
-      <p:sp>
-        <p:nvSpPr>
-          <p:cNvPr id="10" name="TextBox 9"/>
-          <p:cNvSpPr txBox="1"/>
-          <p:nvPr/>
-        </p:nvSpPr>
-        <p:spPr>
-          <a:xfrm>
-            <a:off x="1234440" y="3051810"/>
-            <a:ext cx="6035040" cy="902969"/>
-          </a:xfrm>
-          <a:prstGeom prst="rect">
-            <a:avLst/>
-          </a:prstGeom>
-          <a:noFill/>
-        </p:spPr>
-        <p:txBody>
-          <a:bodyPr wrap="square" anchor="ctr" lIns="0" rIns="0" tIns="0" bIns="0"/>
-          <a:lstStyle/>
-          <a:p>
-            <a:pPr algn="l"/>
-            <a:r>
-              <a:rPr sz="2000" b="0" i="0">
-                <a:solidFill>
-                  <a:srgbClr val="202122"/>
-                </a:solidFill>
-                <a:latin typeface="Calibri"/>
-              </a:rPr>
-              <a:t>Use trigonometry, graphs and basic calculus.</a:t>
-            </a:r>
-          </a:p>
-        </p:txBody>
-      </p:sp>
-      <p:sp>
-        <p:nvSpPr>
-          <p:cNvPr id="11" name="Oval 10"/>
-          <p:cNvSpPr/>
-          <p:nvPr/>
-        </p:nvSpPr>
-        <p:spPr>
-          <a:xfrm>
-            <a:off x="548640" y="4314825"/>
-            <a:ext cx="457200" cy="457200"/>
-          </a:xfrm>
-          <a:prstGeom prst="ellipse">
-            <a:avLst/>
-          </a:prstGeom>
-          <a:solidFill>
-            <a:srgbClr val="F2B705"/>
-          </a:solidFill>
-          <a:ln>
-            <a:noFill/>
-          </a:ln>
-          <a:effectLst/>
-        </p:spPr>
-        <p:style>
-          <a:lnRef idx="1">
-            <a:schemeClr val="accent1"/>
-          </a:lnRef>
-          <a:fillRef idx="3">
-            <a:schemeClr val="accent1"/>
-          </a:fillRef>
-          <a:effectRef idx="2">
-            <a:schemeClr val="accent1"/>
-          </a:effectRef>
-          <a:fontRef idx="minor">
-            <a:schemeClr val="lt1"/>
-          </a:fontRef>
-        </p:style>
-        <p:txBody>
-          <a:bodyPr rtlCol="0" anchor="ctr" lIns="0" rIns="0" tIns="0" bIns="0"/>
-          <a:lstStyle/>
-          <a:p>
-            <a:pPr algn="ctr"/>
-            <a:r>
-              <a:rPr sz="1600" b="1">
-                <a:solidFill>
-                  <a:srgbClr val="202122"/>
-                </a:solidFill>
-                <a:latin typeface="Calibri"/>
-              </a:rPr>
-              <a:t>3</a:t>
-            </a:r>
-          </a:p>
-        </p:txBody>
-      </p:sp>
-      <p:sp>
-        <p:nvSpPr>
-          <p:cNvPr id="12" name="TextBox 11"/>
-          <p:cNvSpPr txBox="1"/>
-          <p:nvPr/>
-        </p:nvSpPr>
-        <p:spPr>
-          <a:xfrm>
-            <a:off x="1234440" y="4091939"/>
-            <a:ext cx="6035040" cy="902969"/>
-          </a:xfrm>
-          <a:prstGeom prst="rect">
-            <a:avLst/>
-          </a:prstGeom>
-          <a:noFill/>
-        </p:spPr>
-        <p:txBody>
-          <a:bodyPr wrap="square" anchor="ctr" lIns="0" rIns="0" tIns="0" bIns="0"/>
-          <a:lstStyle/>
-          <a:p>
-            <a:pPr algn="l"/>
-            <a:r>
-              <a:rPr sz="2000" b="0" i="0">
-                <a:solidFill>
-                  <a:srgbClr val="202122"/>
-                </a:solidFill>
-                <a:latin typeface="Calibri"/>
-              </a:rPr>
-              <a:t>Calculate statistical measures.</a:t>
-            </a:r>
-          </a:p>
-        </p:txBody>
-      </p:sp>
-      <p:sp>
-        <p:nvSpPr>
-          <p:cNvPr id="13" name="Oval 12"/>
-          <p:cNvSpPr/>
-          <p:nvPr/>
-        </p:nvSpPr>
-        <p:spPr>
-          <a:xfrm>
-            <a:off x="548640" y="5354954"/>
-            <a:ext cx="457200" cy="457200"/>
-          </a:xfrm>
-          <a:prstGeom prst="ellipse">
-            <a:avLst/>
-          </a:prstGeom>
-          <a:solidFill>
-            <a:srgbClr val="F2B705"/>
-          </a:solidFill>
-          <a:ln>
-            <a:noFill/>
-          </a:ln>
-          <a:effectLst/>
-        </p:spPr>
-        <p:style>
-          <a:lnRef idx="1">
-            <a:schemeClr val="accent1"/>
-          </a:lnRef>
-          <a:fillRef idx="3">
-            <a:schemeClr val="accent1"/>
-          </a:fillRef>
-          <a:effectRef idx="2">
-            <a:schemeClr val="accent1"/>
-          </a:effectRef>
-          <a:fontRef idx="minor">
-            <a:schemeClr val="lt1"/>
-          </a:fontRef>
-        </p:style>
-        <p:txBody>
-          <a:bodyPr rtlCol="0" anchor="ctr" lIns="0" rIns="0" tIns="0" bIns="0"/>
-          <a:lstStyle/>
-          <a:p>
-            <a:pPr algn="ctr"/>
-            <a:r>
-              <a:rPr sz="1600" b="1">
-                <a:solidFill>
-                  <a:srgbClr val="202122"/>
-                </a:solidFill>
-                <a:latin typeface="Calibri"/>
-              </a:rPr>
-              <a:t>4</a:t>
-            </a:r>
-          </a:p>
-        </p:txBody>
-      </p:sp>
-      <p:sp>
-        <p:nvSpPr>
-          <p:cNvPr id="14" name="TextBox 13"/>
-          <p:cNvSpPr txBox="1"/>
-          <p:nvPr/>
-        </p:nvSpPr>
-        <p:spPr>
-          <a:xfrm>
-            <a:off x="1234440" y="5132069"/>
-            <a:ext cx="6035040" cy="902969"/>
-          </a:xfrm>
-          <a:prstGeom prst="rect">
-            <a:avLst/>
-          </a:prstGeom>
-          <a:noFill/>
-        </p:spPr>
-        <p:txBody>
-          <a:bodyPr wrap="square" anchor="ctr" lIns="0" rIns="0" tIns="0" bIns="0"/>
-          <a:lstStyle/>
-          <a:p>
-            <a:pPr algn="l"/>
-            <a:r>
-              <a:rPr sz="2000" b="0" i="0">
-                <a:solidFill>
-                  <a:srgbClr val="202122"/>
-                </a:solidFill>
-                <a:latin typeface="Calibri"/>
-              </a:rPr>
-              <a:t>Convert between decimal, binary and hexadecimal.</a:t>
-            </a:r>
-          </a:p>
-        </p:txBody>
-      </p:sp>
-      <p:sp>
-        <p:nvSpPr>
-          <p:cNvPr id="15" name="Rounded Rectangle 14"/>
-          <p:cNvSpPr/>
-          <p:nvPr/>
-        </p:nvSpPr>
-        <p:spPr>
-          <a:xfrm>
-            <a:off x="7772400" y="1508760"/>
-            <a:ext cx="3867912" cy="4526280"/>
-          </a:xfrm>
-          <a:prstGeom prst="roundRect">
-            <a:avLst>
-              <a:gd name="adj" fmla="val 8000"/>
-            </a:avLst>
-          </a:prstGeom>
-          <a:solidFill>
-            <a:srgbClr val="EAF3FF"/>
-          </a:solidFill>
-          <a:ln>
-            <a:noFill/>
-          </a:ln>
-          <a:effectLst/>
-        </p:spPr>
-        <p:style>
-          <a:lnRef idx="1">
-            <a:schemeClr val="accent1"/>
-          </a:lnRef>
-          <a:fillRef idx="3">
-            <a:schemeClr val="accent1"/>
-          </a:fillRef>
-          <a:effectRef idx="2">
-            <a:schemeClr val="accent1"/>
-          </a:effectRef>
-          <a:fontRef idx="minor">
-            <a:schemeClr val="lt1"/>
-          </a:fontRef>
-        </p:style>
-        <p:txBody>
-          <a:bodyPr rtlCol="0" anchor="ctr"/>
-          <a:lstStyle/>
-          <a:p/>
-        </p:txBody>
-      </p:sp>
-      <p:sp>
-        <p:nvSpPr>
-          <p:cNvPr id="16" name="TextBox 15"/>
-          <p:cNvSpPr txBox="1"/>
-          <p:nvPr/>
-        </p:nvSpPr>
-        <p:spPr>
-          <a:xfrm>
-            <a:off x="8046720" y="1737360"/>
-            <a:ext cx="3291840" cy="365760"/>
-          </a:xfrm>
-          <a:prstGeom prst="rect">
-            <a:avLst/>
-          </a:prstGeom>
-          <a:noFill/>
-        </p:spPr>
-        <p:txBody>
-          <a:bodyPr wrap="square" anchor="t" lIns="0" rIns="0" tIns="0" bIns="0"/>
-          <a:lstStyle/>
-          <a:p>
-            <a:pPr algn="l"/>
-            <a:r>
-              <a:rPr sz="1300" b="1" i="0">
-                <a:solidFill>
-                  <a:srgbClr val="0645AD"/>
-                </a:solidFill>
-                <a:latin typeface="Calibri"/>
-              </a:rPr>
-              <a:t>STARTER</a:t>
-            </a:r>
-          </a:p>
-        </p:txBody>
-      </p:sp>
-      <p:sp>
-        <p:nvSpPr>
-          <p:cNvPr id="17" name="TextBox 16"/>
-          <p:cNvSpPr txBox="1"/>
-          <p:nvPr/>
-        </p:nvSpPr>
-        <p:spPr>
-          <a:xfrm>
-            <a:off x="8046720" y="2194560"/>
-            <a:ext cx="3291840" cy="3657600"/>
-          </a:xfrm>
-          <a:prstGeom prst="rect">
-            <a:avLst/>
-          </a:prstGeom>
-          <a:noFill/>
-        </p:spPr>
-        <p:txBody>
-          <a:bodyPr wrap="square" anchor="t" lIns="0" rIns="0" tIns="0" bIns="0"/>
-          <a:lstStyle/>
-          <a:p>
-            <a:pPr algn="l"/>
-            <a:r>
-              <a:rPr sz="2200" b="0" i="0">
-                <a:solidFill>
-                  <a:srgbClr val="03306E"/>
-                </a:solidFill>
-                <a:latin typeface="Cambria"/>
-              </a:rPr>
-              <a:t>A ladder 5 m long leans against a wall with its foot 3 m out. How high up the wall does it reach?</a:t>
-            </a:r>
-          </a:p>
-        </p:txBody>
-      </p:sp>
-    </p:spTree>
-  </p:cSld>
-  <p:clrMapOvr>
-    <a:masterClrMapping/>
-  </p:clrMapOvr>
-</p:sld>
-</file>
-
-<file path=ppt/slides/slide3.xml><?xml version="1.0" encoding="utf-8"?>
-<p:sld xmlns:a="http://schemas.openxmlformats.org/drawingml/2006/main" xmlns:p="http://schemas.openxmlformats.org/presentationml/2006/main" xmlns:r="http://schemas.openxmlformats.org/officeDocument/2006/relationships">
-  <p:cSld>
-    <p:bg>
-      <p:bgPr>
-        <a:solidFill>
-          <a:srgbClr val="FFFFFF"/>
-        </a:solidFill>
-        <a:effectLst/>
-      </p:bgPr>
-    </p:bg>
-    <p:spTree>
-      <p:nvGrpSpPr>
-        <p:cNvPr id="1" name=""/>
-        <p:cNvGrpSpPr/>
-        <p:nvPr/>
-      </p:nvGrpSpPr>
-      <p:grpSpPr/>
-      <p:sp>
-        <p:nvSpPr>
-          <p:cNvPr id="2" name="TextBox 1"/>
-          <p:cNvSpPr txBox="1"/>
-          <p:nvPr/>
-        </p:nvSpPr>
-        <p:spPr>
-          <a:xfrm>
-            <a:off x="548640" y="320040"/>
-            <a:ext cx="11094415" cy="274320"/>
-          </a:xfrm>
-          <a:prstGeom prst="rect">
-            <a:avLst/>
-          </a:prstGeom>
-          <a:noFill/>
-        </p:spPr>
-        <p:txBody>
-          <a:bodyPr wrap="square" anchor="t" lIns="0" rIns="0" tIns="0" bIns="0"/>
-          <a:lstStyle/>
-          <a:p>
-            <a:pPr algn="l"/>
-            <a:r>
-              <a:rPr sz="1100" b="1" i="0">
-                <a:solidFill>
-                  <a:srgbClr val="54595D"/>
-                </a:solidFill>
-                <a:latin typeface="Calibri"/>
-              </a:rPr>
-              <a:t>ENGINEERING CORE  ·  Core topic 4</a:t>
-            </a:r>
-          </a:p>
-        </p:txBody>
-      </p:sp>
-      <p:sp>
-        <p:nvSpPr>
-          <p:cNvPr id="3" name="TextBox 2"/>
-          <p:cNvSpPr txBox="1"/>
-          <p:nvPr/>
-        </p:nvSpPr>
-        <p:spPr>
-          <a:xfrm>
-            <a:off x="548640" y="566928"/>
-            <a:ext cx="11094415" cy="822960"/>
-          </a:xfrm>
-          <a:prstGeom prst="rect">
-            <a:avLst/>
-          </a:prstGeom>
-          <a:noFill/>
-        </p:spPr>
-        <p:txBody>
-          <a:bodyPr wrap="square" anchor="ctr" lIns="0" rIns="0" tIns="0" bIns="0"/>
-          <a:lstStyle/>
-          <a:p>
-            <a:pPr algn="l"/>
-            <a:r>
-              <a:rPr sz="3200" b="1" i="0">
-                <a:solidFill>
-                  <a:srgbClr val="03306E"/>
-                </a:solidFill>
-                <a:latin typeface="Cambria"/>
-              </a:rPr>
-              <a:t>The maths toolkit</a:t>
-            </a:r>
-          </a:p>
-        </p:txBody>
-      </p:sp>
-      <p:sp>
-        <p:nvSpPr>
-          <p:cNvPr id="4" name="TextBox 3"/>
-          <p:cNvSpPr txBox="1"/>
-          <p:nvPr/>
-        </p:nvSpPr>
-        <p:spPr>
-          <a:xfrm>
-            <a:off x="548640" y="6446520"/>
-            <a:ext cx="8229600" cy="274320"/>
-          </a:xfrm>
-          <a:prstGeom prst="rect">
-            <a:avLst/>
-          </a:prstGeom>
-          <a:noFill/>
-        </p:spPr>
-        <p:txBody>
-          <a:bodyPr wrap="square" anchor="t" lIns="0" rIns="0" tIns="0" bIns="0"/>
-          <a:lstStyle/>
-          <a:p>
-            <a:pPr algn="l"/>
-            <a:r>
-              <a:rPr sz="1000" b="0" i="0">
-                <a:solidFill>
-                  <a:srgbClr val="54595D"/>
-                </a:solidFill>
-                <a:latin typeface="Calibri"/>
-              </a:rPr>
-              <a:t>Design and Development for Engineering and Manufacturing T Level  ·  Essential Mathematics for Engineering</a:t>
-            </a:r>
-          </a:p>
-        </p:txBody>
-      </p:sp>
-      <p:sp>
-        <p:nvSpPr>
-          <p:cNvPr id="5" name="TextBox 4"/>
-          <p:cNvSpPr txBox="1"/>
-          <p:nvPr/>
-        </p:nvSpPr>
-        <p:spPr>
-          <a:xfrm>
-            <a:off x="10728655" y="6446520"/>
-            <a:ext cx="914400" cy="274320"/>
-          </a:xfrm>
-          <a:prstGeom prst="rect">
-            <a:avLst/>
-          </a:prstGeom>
-          <a:noFill/>
-        </p:spPr>
-        <p:txBody>
-          <a:bodyPr wrap="square" anchor="t" lIns="0" rIns="0" tIns="0" bIns="0"/>
-          <a:lstStyle/>
-          <a:p>
-            <a:pPr algn="r"/>
-            <a:r>
-              <a:rPr sz="1000" b="0" i="0">
-                <a:solidFill>
-                  <a:srgbClr val="54595D"/>
-                </a:solidFill>
-                <a:latin typeface="Calibri"/>
-              </a:rPr>
-              <a:t>3</a:t>
-            </a:r>
-          </a:p>
-        </p:txBody>
-      </p:sp>
-      <p:graphicFrame>
-        <p:nvGraphicFramePr>
-          <p:cNvPr id="6" name="Table 5"/>
-          <p:cNvGraphicFramePr>
-            <a:graphicFrameLocks noGrp="1"/>
-          </p:cNvGraphicFramePr>
-          <p:nvPr/>
-        </p:nvGraphicFramePr>
-        <p:xfrm>
-          <a:off x="548640" y="1600200"/>
-          <a:ext cx="11094414" cy="4526277"/>
-        </p:xfrm>
-        <a:graphic>
-          <a:graphicData uri="http://schemas.openxmlformats.org/drawingml/2006/table">
-            <a:tbl>
-              <a:tblPr firstRow="1" bandRow="1">
-                <a:tableStyleId>{5C22544A-7EE6-4342-B048-85BDC9FD1C3A}</a:tableStyleId>
-              </a:tblPr>
-              <a:tblGrid>
-                <a:gridCol w="2580096"/>
-                <a:gridCol w="8514318"/>
-              </a:tblGrid>
-              <a:tr h="646611">
-                <a:tc>
-                  <a:txBody>
-                    <a:bodyPr wrap="square"/>
-                    <a:lstStyle/>
-                    <a:p>
-                      <a:r>
-                        <a:rPr sz="1600" b="1">
-                          <a:solidFill>
-                            <a:srgbClr val="FFFFFF"/>
-                          </a:solidFill>
-                          <a:latin typeface="Calibri"/>
-                        </a:rPr>
-                        <a:t>Area</a:t>
-                      </a:r>
-                    </a:p>
-                  </a:txBody>
-                  <a:tcPr marL="91440" marR="91440" anchor="ctr">
-                    <a:solidFill>
-                      <a:srgbClr val="03306E"/>
-                    </a:solidFill>
-                  </a:tcPr>
-                </a:tc>
-                <a:tc>
-                  <a:txBody>
-                    <a:bodyPr wrap="square"/>
-                    <a:lstStyle/>
-                    <a:p>
-                      <a:r>
-                        <a:rPr sz="1600" b="1">
-                          <a:solidFill>
-                            <a:srgbClr val="FFFFFF"/>
-                          </a:solidFill>
-                          <a:latin typeface="Calibri"/>
-                        </a:rPr>
-                        <a:t>What to be able to do</a:t>
-                      </a:r>
-                    </a:p>
-                  </a:txBody>
-                  <a:tcPr marL="91440" marR="91440" anchor="ctr">
-                    <a:solidFill>
-                      <a:srgbClr val="03306E"/>
-                    </a:solidFill>
-                  </a:tcPr>
-                </a:tc>
-              </a:tr>
-              <a:tr h="646611">
-                <a:tc>
-                  <a:txBody>
-                    <a:bodyPr wrap="square"/>
-                    <a:lstStyle/>
-                    <a:p>
-                      <a:r>
-                        <a:rPr sz="1600" b="1">
-                          <a:solidFill>
-                            <a:srgbClr val="03306E"/>
-                          </a:solidFill>
-                          <a:latin typeface="Calibri"/>
-                        </a:rPr>
-                        <a:t>Arithmetic</a:t>
-                      </a:r>
-                    </a:p>
-                  </a:txBody>
-                  <a:tcPr marL="91440" marR="91440" anchor="ctr">
-                    <a:solidFill>
-                      <a:srgbClr val="FFFFFF"/>
-                    </a:solidFill>
-                  </a:tcPr>
-                </a:tc>
-                <a:tc>
-                  <a:txBody>
-                    <a:bodyPr wrap="square"/>
-                    <a:lstStyle/>
-                    <a:p>
-                      <a:r>
-                        <a:rPr sz="1600" b="0">
-                          <a:solidFill>
-                            <a:srgbClr val="202122"/>
-                          </a:solidFill>
-                          <a:latin typeface="Calibri"/>
-                        </a:rPr>
-                        <a:t>Standard form, fractions, percentages, ratios, BIDMAS</a:t>
-                      </a:r>
-                    </a:p>
-                  </a:txBody>
-                  <a:tcPr marL="91440" marR="91440" anchor="ctr">
-                    <a:solidFill>
-                      <a:srgbClr val="FFFFFF"/>
-                    </a:solidFill>
-                  </a:tcPr>
-                </a:tc>
-              </a:tr>
-              <a:tr h="646611">
-                <a:tc>
-                  <a:txBody>
-                    <a:bodyPr wrap="square"/>
-                    <a:lstStyle/>
-                    <a:p>
-                      <a:r>
-                        <a:rPr sz="1600" b="1">
-                          <a:solidFill>
-                            <a:srgbClr val="03306E"/>
-                          </a:solidFill>
-                          <a:latin typeface="Calibri"/>
-                        </a:rPr>
-                        <a:t>Algebra</a:t>
-                      </a:r>
-                    </a:p>
-                  </a:txBody>
-                  <a:tcPr marL="91440" marR="91440" anchor="ctr">
-                    <a:solidFill>
-                      <a:srgbClr val="EAF3FF"/>
-                    </a:solidFill>
-                  </a:tcPr>
-                </a:tc>
-                <a:tc>
-                  <a:txBody>
-                    <a:bodyPr wrap="square"/>
-                    <a:lstStyle/>
-                    <a:p>
-                      <a:r>
-                        <a:rPr sz="1600" b="0">
-                          <a:solidFill>
-                            <a:srgbClr val="202122"/>
-                          </a:solidFill>
-                          <a:latin typeface="Calibri"/>
-                        </a:rPr>
-                        <a:t>Rearrange equations; simultaneous and quadratic equations; indices; logarithms; sequences; matrices</a:t>
-                      </a:r>
-                    </a:p>
-                  </a:txBody>
-                  <a:tcPr marL="91440" marR="91440" anchor="ctr">
-                    <a:solidFill>
-                      <a:srgbClr val="EAF3FF"/>
-                    </a:solidFill>
-                  </a:tcPr>
-                </a:tc>
-              </a:tr>
-              <a:tr h="646611">
-                <a:tc>
-                  <a:txBody>
-                    <a:bodyPr wrap="square"/>
-                    <a:lstStyle/>
-                    <a:p>
-                      <a:r>
-                        <a:rPr sz="1600" b="1">
-                          <a:solidFill>
-                            <a:srgbClr val="03306E"/>
-                          </a:solidFill>
-                          <a:latin typeface="Calibri"/>
-                        </a:rPr>
-                        <a:t>Geometry</a:t>
-                      </a:r>
-                    </a:p>
-                  </a:txBody>
-                  <a:tcPr marL="91440" marR="91440" anchor="ctr">
-                    <a:solidFill>
-                      <a:srgbClr val="FFFFFF"/>
-                    </a:solidFill>
-                  </a:tcPr>
-                </a:tc>
-                <a:tc>
-                  <a:txBody>
-                    <a:bodyPr wrap="square"/>
-                    <a:lstStyle/>
-                    <a:p>
-                      <a:r>
-                        <a:rPr sz="1600" b="0">
-                          <a:solidFill>
-                            <a:srgbClr val="202122"/>
-                          </a:solidFill>
-                          <a:latin typeface="Calibri"/>
-                        </a:rPr>
-                        <a:t>Areas of 2D shapes, volumes of 3D shapes</a:t>
-                      </a:r>
-                    </a:p>
-                  </a:txBody>
-                  <a:tcPr marL="91440" marR="91440" anchor="ctr">
-                    <a:solidFill>
-                      <a:srgbClr val="FFFFFF"/>
-                    </a:solidFill>
-                  </a:tcPr>
-                </a:tc>
-              </a:tr>
-              <a:tr h="646611">
-                <a:tc>
-                  <a:txBody>
-                    <a:bodyPr wrap="square"/>
-                    <a:lstStyle/>
-                    <a:p>
-                      <a:r>
-                        <a:rPr sz="1600" b="1">
-                          <a:solidFill>
-                            <a:srgbClr val="03306E"/>
-                          </a:solidFill>
-                          <a:latin typeface="Calibri"/>
-                        </a:rPr>
-                        <a:t>Calculus</a:t>
-                      </a:r>
-                    </a:p>
-                  </a:txBody>
-                  <a:tcPr marL="91440" marR="91440" anchor="ctr">
-                    <a:solidFill>
-                      <a:srgbClr val="EAF3FF"/>
-                    </a:solidFill>
-                  </a:tcPr>
-                </a:tc>
-                <a:tc>
-                  <a:txBody>
-                    <a:bodyPr wrap="square"/>
-                    <a:lstStyle/>
-                    <a:p>
-                      <a:r>
-                        <a:rPr sz="1600" b="0">
-                          <a:solidFill>
-                            <a:srgbClr val="202122"/>
-                          </a:solidFill>
-                          <a:latin typeface="Calibri"/>
-                        </a:rPr>
-                        <a:t>Straight-line graphs y = mx + c; standard differentials and integrals; maximum and minimum</a:t>
-                      </a:r>
-                    </a:p>
-                  </a:txBody>
-                  <a:tcPr marL="91440" marR="91440" anchor="ctr">
-                    <a:solidFill>
-                      <a:srgbClr val="EAF3FF"/>
-                    </a:solidFill>
-                  </a:tcPr>
-                </a:tc>
-              </a:tr>
-              <a:tr h="646611">
-                <a:tc>
-                  <a:txBody>
-                    <a:bodyPr wrap="square"/>
-                    <a:lstStyle/>
-                    <a:p>
-                      <a:r>
-                        <a:rPr sz="1600" b="1">
-                          <a:solidFill>
-                            <a:srgbClr val="03306E"/>
-                          </a:solidFill>
-                          <a:latin typeface="Calibri"/>
-                        </a:rPr>
-                        <a:t>Trigonometry</a:t>
-                      </a:r>
-                    </a:p>
-                  </a:txBody>
-                  <a:tcPr marL="91440" marR="91440" anchor="ctr">
-                    <a:solidFill>
-                      <a:srgbClr val="FFFFFF"/>
-                    </a:solidFill>
-                  </a:tcPr>
-                </a:tc>
-                <a:tc>
-                  <a:txBody>
-                    <a:bodyPr wrap="square"/>
-                    <a:lstStyle/>
-                    <a:p>
-                      <a:r>
-                        <a:rPr sz="1600" b="0">
-                          <a:solidFill>
-                            <a:srgbClr val="202122"/>
-                          </a:solidFill>
-                          <a:latin typeface="Calibri"/>
-                        </a:rPr>
-                        <a:t>Pythagoras, sine and cosine rules, radians, vectors</a:t>
-                      </a:r>
-                    </a:p>
-                  </a:txBody>
-                  <a:tcPr marL="91440" marR="91440" anchor="ctr">
-                    <a:solidFill>
-                      <a:srgbClr val="FFFFFF"/>
-                    </a:solidFill>
-                  </a:tcPr>
-                </a:tc>
-              </a:tr>
-              <a:tr h="646611">
-                <a:tc>
-                  <a:txBody>
-                    <a:bodyPr wrap="square"/>
-                    <a:lstStyle/>
-                    <a:p>
-                      <a:r>
-                        <a:rPr sz="1600" b="1">
-                          <a:solidFill>
-                            <a:srgbClr val="03306E"/>
-                          </a:solidFill>
-                          <a:latin typeface="Calibri"/>
-                        </a:rPr>
-                        <a:t>Statistics</a:t>
-                      </a:r>
-                    </a:p>
-                  </a:txBody>
-                  <a:tcPr marL="91440" marR="91440" anchor="ctr">
-                    <a:solidFill>
-                      <a:srgbClr val="EAF3FF"/>
-                    </a:solidFill>
-                  </a:tcPr>
-                </a:tc>
-                <a:tc>
-                  <a:txBody>
-                    <a:bodyPr wrap="square"/>
-                    <a:lstStyle/>
-                    <a:p>
-                      <a:r>
-                        <a:rPr sz="1600" b="0">
-                          <a:solidFill>
-                            <a:srgbClr val="202122"/>
-                          </a:solidFill>
-                          <a:latin typeface="Calibri"/>
-                        </a:rPr>
-                        <a:t>Range, mean, median, mode, standard deviation, probability</a:t>
-                      </a:r>
-                    </a:p>
-                  </a:txBody>
-                  <a:tcPr marL="91440" marR="91440" anchor="ctr">
-                    <a:solidFill>
-                      <a:srgbClr val="EAF3FF"/>
-                    </a:solidFill>
-                  </a:tcPr>
-                </a:tc>
-              </a:tr>
-            </a:tbl>
-          </a:graphicData>
-        </a:graphic>
-      </p:graphicFrame>
-    </p:spTree>
-  </p:cSld>
-  <p:clrMapOvr>
-    <a:masterClrMapping/>
-  </p:clrMapOvr>
-</p:sld>
-</file>
-
-<file path=ppt/slides/slide4.xml><?xml version="1.0" encoding="utf-8"?>
-<p:sld xmlns:a="http://schemas.openxmlformats.org/drawingml/2006/main" xmlns:p="http://schemas.openxmlformats.org/presentationml/2006/main" xmlns:r="http://schemas.openxmlformats.org/officeDocument/2006/relationships">
-  <p:cSld>
-    <p:bg>
-      <p:bgPr>
-        <a:solidFill>
-          <a:srgbClr val="FFFFFF"/>
-        </a:solidFill>
-        <a:effectLst/>
-      </p:bgPr>
-    </p:bg>
-    <p:spTree>
-      <p:nvGrpSpPr>
-        <p:cNvPr id="1" name=""/>
-        <p:cNvGrpSpPr/>
-        <p:nvPr/>
-      </p:nvGrpSpPr>
-      <p:grpSpPr/>
-      <p:sp>
-        <p:nvSpPr>
-          <p:cNvPr id="2" name="TextBox 1"/>
-          <p:cNvSpPr txBox="1"/>
-          <p:nvPr/>
-        </p:nvSpPr>
-        <p:spPr>
-          <a:xfrm>
-            <a:off x="548640" y="320040"/>
-            <a:ext cx="11094415" cy="274320"/>
-          </a:xfrm>
-          <a:prstGeom prst="rect">
-            <a:avLst/>
-          </a:prstGeom>
-          <a:noFill/>
-        </p:spPr>
-        <p:txBody>
-          <a:bodyPr wrap="square" anchor="t" lIns="0" rIns="0" tIns="0" bIns="0"/>
-          <a:lstStyle/>
-          <a:p>
-            <a:pPr algn="l"/>
-            <a:r>
-              <a:rPr sz="1100" b="1" i="0">
-                <a:solidFill>
-                  <a:srgbClr val="54595D"/>
-                </a:solidFill>
-                <a:latin typeface="Calibri"/>
-              </a:rPr>
-              <a:t>ENGINEERING CORE  ·  Core topic 4</a:t>
-            </a:r>
-          </a:p>
-        </p:txBody>
-      </p:sp>
-      <p:sp>
-        <p:nvSpPr>
-          <p:cNvPr id="3" name="TextBox 2"/>
-          <p:cNvSpPr txBox="1"/>
-          <p:nvPr/>
-        </p:nvSpPr>
-        <p:spPr>
-          <a:xfrm>
-            <a:off x="548640" y="566928"/>
-            <a:ext cx="11094415" cy="822960"/>
-          </a:xfrm>
-          <a:prstGeom prst="rect">
-            <a:avLst/>
-          </a:prstGeom>
-          <a:noFill/>
-        </p:spPr>
-        <p:txBody>
-          <a:bodyPr wrap="square" anchor="ctr" lIns="0" rIns="0" tIns="0" bIns="0"/>
-          <a:lstStyle/>
-          <a:p>
-            <a:pPr algn="l"/>
-            <a:r>
-              <a:rPr sz="3200" b="1" i="0">
-                <a:solidFill>
-                  <a:srgbClr val="03306E"/>
-                </a:solidFill>
-                <a:latin typeface="Cambria"/>
-              </a:rPr>
-              <a:t>Worked examples</a:t>
-            </a:r>
-          </a:p>
-        </p:txBody>
-      </p:sp>
-      <p:sp>
-        <p:nvSpPr>
-          <p:cNvPr id="4" name="TextBox 3"/>
-          <p:cNvSpPr txBox="1"/>
-          <p:nvPr/>
-        </p:nvSpPr>
-        <p:spPr>
-          <a:xfrm>
-            <a:off x="548640" y="6446520"/>
-            <a:ext cx="8229600" cy="274320"/>
-          </a:xfrm>
-          <a:prstGeom prst="rect">
-            <a:avLst/>
-          </a:prstGeom>
-          <a:noFill/>
-        </p:spPr>
-        <p:txBody>
-          <a:bodyPr wrap="square" anchor="t" lIns="0" rIns="0" tIns="0" bIns="0"/>
-          <a:lstStyle/>
-          <a:p>
-            <a:pPr algn="l"/>
-            <a:r>
-              <a:rPr sz="1000" b="0" i="0">
-                <a:solidFill>
-                  <a:srgbClr val="54595D"/>
-                </a:solidFill>
-                <a:latin typeface="Calibri"/>
-              </a:rPr>
-              <a:t>Design and Development for Engineering and Manufacturing T Level  ·  Essential Mathematics for Engineering</a:t>
-            </a:r>
-          </a:p>
-        </p:txBody>
-      </p:sp>
-      <p:sp>
-        <p:nvSpPr>
-          <p:cNvPr id="5" name="TextBox 4"/>
-          <p:cNvSpPr txBox="1"/>
-          <p:nvPr/>
-        </p:nvSpPr>
-        <p:spPr>
-          <a:xfrm>
-            <a:off x="10728655" y="6446520"/>
-            <a:ext cx="914400" cy="274320"/>
-          </a:xfrm>
-          <a:prstGeom prst="rect">
-            <a:avLst/>
-          </a:prstGeom>
-          <a:noFill/>
-        </p:spPr>
-        <p:txBody>
-          <a:bodyPr wrap="square" anchor="t" lIns="0" rIns="0" tIns="0" bIns="0"/>
-          <a:lstStyle/>
-          <a:p>
-            <a:pPr algn="r"/>
-            <a:r>
-              <a:rPr sz="1000" b="0" i="0">
-                <a:solidFill>
-                  <a:srgbClr val="54595D"/>
-                </a:solidFill>
-                <a:latin typeface="Calibri"/>
-              </a:rPr>
-              <a:t>4</a:t>
-            </a:r>
-          </a:p>
-        </p:txBody>
-      </p:sp>
-      <p:sp>
-        <p:nvSpPr>
-          <p:cNvPr id="6" name="TextBox 5"/>
-          <p:cNvSpPr txBox="1"/>
-          <p:nvPr/>
-        </p:nvSpPr>
-        <p:spPr>
-          <a:xfrm>
-            <a:off x="548640" y="1600200"/>
-            <a:ext cx="6675120" cy="4572000"/>
-          </a:xfrm>
-          <a:prstGeom prst="rect">
-            <a:avLst/>
-          </a:prstGeom>
-          <a:noFill/>
-        </p:spPr>
-        <p:txBody>
-          <a:bodyPr wrap="square" lIns="0" rIns="0" tIns="0" bIns="0">
-            <a:spAutoFit/>
-          </a:bodyPr>
-          <a:lstStyle/>
-          <a:p>
-            <a:pPr marL="274320" indent="-274320">
-              <a:spcAft>
-                <a:spcPts val="1080"/>
-              </a:spcAft>
-              <a:buClr>
-                <a:srgbClr val="0645AD"/>
-              </a:buClr>
-              <a:buFont typeface="Arial"/>
-              <a:buChar char="•"/>
-            </a:pPr>
-            <a:r>
-              <a:rPr sz="2400" b="1">
-                <a:solidFill>
-                  <a:srgbClr val="202122"/>
-                </a:solidFill>
-                <a:latin typeface="Calibri"/>
-              </a:rPr>
-              <a:t>Standard form:</a:t>
-            </a:r>
-            <a:r>
-              <a:rPr sz="2400" b="0">
-                <a:solidFill>
-                  <a:srgbClr val="202122"/>
-                </a:solidFill>
-                <a:latin typeface="Calibri"/>
-              </a:rPr>
-              <a:t> 0.00045 m = 4.5 x 10 to the power -4 m.</a:t>
-            </a:r>
-          </a:p>
-          <a:p>
-            <a:pPr marL="274320" indent="-274320">
-              <a:spcAft>
-                <a:spcPts val="1080"/>
-              </a:spcAft>
-              <a:buClr>
-                <a:srgbClr val="0645AD"/>
-              </a:buClr>
-              <a:buFont typeface="Arial"/>
-              <a:buChar char="•"/>
-            </a:pPr>
-            <a:r>
-              <a:rPr sz="2400" b="1">
-                <a:solidFill>
-                  <a:srgbClr val="202122"/>
-                </a:solidFill>
-                <a:latin typeface="Calibri"/>
-              </a:rPr>
-              <a:t>Straight line:</a:t>
-            </a:r>
-            <a:r>
-              <a:rPr sz="2400" b="0">
-                <a:solidFill>
-                  <a:srgbClr val="202122"/>
-                </a:solidFill>
-                <a:latin typeface="Calibri"/>
-              </a:rPr>
-              <a:t> through (0, 2) with gradient 3 gives y = 3x + 2.</a:t>
-            </a:r>
-          </a:p>
-          <a:p>
-            <a:pPr marL="274320" indent="-274320">
-              <a:spcAft>
-                <a:spcPts val="1080"/>
-              </a:spcAft>
-              <a:buClr>
-                <a:srgbClr val="0645AD"/>
-              </a:buClr>
-              <a:buFont typeface="Arial"/>
-              <a:buChar char="•"/>
-            </a:pPr>
-            <a:r>
-              <a:rPr sz="2400" b="1">
-                <a:solidFill>
-                  <a:srgbClr val="202122"/>
-                </a:solidFill>
-                <a:latin typeface="Calibri"/>
-              </a:rPr>
-              <a:t>Volume of a cylinder:</a:t>
-            </a:r>
-            <a:r>
-              <a:rPr sz="2400" b="0">
-                <a:solidFill>
-                  <a:srgbClr val="202122"/>
-                </a:solidFill>
-                <a:latin typeface="Calibri"/>
-              </a:rPr>
-              <a:t> pi x r squared x h. For r = 0.1 m and h = 2 m, about 0.063 cubic metres.</a:t>
-            </a:r>
-          </a:p>
-          <a:p>
-            <a:pPr marL="274320" indent="-274320">
-              <a:spcAft>
-                <a:spcPts val="1080"/>
-              </a:spcAft>
-              <a:buClr>
-                <a:srgbClr val="0645AD"/>
-              </a:buClr>
-              <a:buFont typeface="Arial"/>
-              <a:buChar char="•"/>
-            </a:pPr>
-            <a:r>
-              <a:rPr sz="2400" b="1">
-                <a:solidFill>
-                  <a:srgbClr val="202122"/>
-                </a:solidFill>
-                <a:latin typeface="Calibri"/>
-              </a:rPr>
-              <a:t>Sine rule:</a:t>
-            </a:r>
-            <a:r>
-              <a:rPr sz="2400" b="0">
-                <a:solidFill>
-                  <a:srgbClr val="202122"/>
-                </a:solidFill>
-                <a:latin typeface="Calibri"/>
-              </a:rPr>
-              <a:t> a / sin A = b / sin B = c / sin C.</a:t>
-            </a:r>
-          </a:p>
-        </p:txBody>
-      </p:sp>
-      <p:sp>
-        <p:nvSpPr>
-          <p:cNvPr id="7" name="Rounded Rectangle 6"/>
-          <p:cNvSpPr/>
-          <p:nvPr/>
-        </p:nvSpPr>
-        <p:spPr>
-          <a:xfrm>
-            <a:off x="7772400" y="1600200"/>
-            <a:ext cx="3867912" cy="4434840"/>
-          </a:xfrm>
-          <a:prstGeom prst="roundRect">
-            <a:avLst>
-              <a:gd name="adj" fmla="val 8000"/>
-            </a:avLst>
-          </a:prstGeom>
-          <a:solidFill>
-            <a:srgbClr val="03306E"/>
-          </a:solidFill>
-          <a:ln>
-            <a:noFill/>
-          </a:ln>
-          <a:effectLst/>
-        </p:spPr>
-        <p:style>
-          <a:lnRef idx="1">
-            <a:schemeClr val="accent1"/>
-          </a:lnRef>
-          <a:fillRef idx="3">
-            <a:schemeClr val="accent1"/>
-          </a:fillRef>
-          <a:effectRef idx="2">
-            <a:schemeClr val="accent1"/>
-          </a:effectRef>
-          <a:fontRef idx="minor">
-            <a:schemeClr val="lt1"/>
-          </a:fontRef>
-        </p:style>
-        <p:txBody>
-          <a:bodyPr rtlCol="0" anchor="ctr"/>
-          <a:lstStyle/>
-          <a:p/>
-        </p:txBody>
-      </p:sp>
-      <p:sp>
-        <p:nvSpPr>
-          <p:cNvPr id="8" name="Oval 7"/>
-          <p:cNvSpPr/>
-          <p:nvPr/>
-        </p:nvSpPr>
-        <p:spPr>
-          <a:xfrm>
-            <a:off x="8046720" y="1874519"/>
-            <a:ext cx="548640" cy="548640"/>
-          </a:xfrm>
-          <a:prstGeom prst="ellipse">
-            <a:avLst/>
-          </a:prstGeom>
-          <a:solidFill>
-            <a:srgbClr val="F2B705"/>
-          </a:solidFill>
-          <a:ln>
-            <a:noFill/>
-          </a:ln>
-          <a:effectLst/>
-        </p:spPr>
-        <p:style>
-          <a:lnRef idx="1">
-            <a:schemeClr val="accent1"/>
-          </a:lnRef>
-          <a:fillRef idx="3">
-            <a:schemeClr val="accent1"/>
-          </a:fillRef>
-          <a:effectRef idx="2">
-            <a:schemeClr val="accent1"/>
-          </a:effectRef>
-          <a:fontRef idx="minor">
-            <a:schemeClr val="lt1"/>
-          </a:fontRef>
-        </p:style>
-        <p:txBody>
-          <a:bodyPr rtlCol="0" anchor="ctr" lIns="0" rIns="0" tIns="0" bIns="0"/>
-          <a:lstStyle/>
-          <a:p>
-            <a:pPr algn="ctr"/>
-            <a:r>
-              <a:rPr sz="2000" b="1">
-                <a:solidFill>
-                  <a:srgbClr val="202122"/>
-                </a:solidFill>
-                <a:latin typeface="Calibri"/>
-              </a:rPr>
-              <a:t>!</a:t>
-            </a:r>
-          </a:p>
-        </p:txBody>
-      </p:sp>
-      <p:sp>
-        <p:nvSpPr>
-          <p:cNvPr id="9" name="TextBox 8"/>
-          <p:cNvSpPr txBox="1"/>
-          <p:nvPr/>
-        </p:nvSpPr>
-        <p:spPr>
-          <a:xfrm>
-            <a:off x="8046720" y="2606040"/>
-            <a:ext cx="3291840" cy="365760"/>
-          </a:xfrm>
-          <a:prstGeom prst="rect">
-            <a:avLst/>
-          </a:prstGeom>
-          <a:noFill/>
-        </p:spPr>
-        <p:txBody>
-          <a:bodyPr wrap="square" anchor="t" lIns="0" rIns="0" tIns="0" bIns="0"/>
-          <a:lstStyle/>
-          <a:p>
-            <a:pPr algn="l"/>
-            <a:r>
-              <a:rPr sz="1300" b="1" i="0">
-                <a:solidFill>
-                  <a:srgbClr val="A9C8F0"/>
-                </a:solidFill>
-                <a:latin typeface="Calibri"/>
-              </a:rPr>
-              <a:t>KEY IDEA</a:t>
-            </a:r>
-          </a:p>
-        </p:txBody>
-      </p:sp>
-      <p:sp>
-        <p:nvSpPr>
-          <p:cNvPr id="10" name="TextBox 9"/>
-          <p:cNvSpPr txBox="1"/>
-          <p:nvPr/>
-        </p:nvSpPr>
-        <p:spPr>
-          <a:xfrm>
-            <a:off x="8046720" y="3017520"/>
-            <a:ext cx="3291840" cy="2926080"/>
-          </a:xfrm>
-          <a:prstGeom prst="rect">
-            <a:avLst/>
-          </a:prstGeom>
-          <a:noFill/>
-        </p:spPr>
-        <p:txBody>
-          <a:bodyPr wrap="square" anchor="t" lIns="0" rIns="0" tIns="0" bIns="0"/>
-          <a:lstStyle/>
-          <a:p>
-            <a:pPr algn="l"/>
-            <a:r>
-              <a:rPr sz="2200" b="0" i="0">
-                <a:solidFill>
-                  <a:srgbClr val="FFFFFF"/>
-                </a:solidFill>
-                <a:latin typeface="Cambria"/>
-              </a:rPr>
-              <a:t>Always write the formula, substitute with units, then round sensibly. Most marks are lost in the working, not the maths.</a:t>
-            </a:r>
-          </a:p>
-        </p:txBody>
-      </p:sp>
-    </p:spTree>
-  </p:cSld>
-  <p:clrMapOvr>
-    <a:masterClrMapping/>
-  </p:clrMapOvr>
-</p:sld>
-</file>
-
-<file path=ppt/slides/slide5.xml><?xml version="1.0" encoding="utf-8"?>
-<p:sld xmlns:a="http://schemas.openxmlformats.org/drawingml/2006/main" xmlns:p="http://schemas.openxmlformats.org/presentationml/2006/main" xmlns:r="http://schemas.openxmlformats.org/officeDocument/2006/relationships">
-  <p:cSld>
-    <p:bg>
-      <p:bgPr>
-        <a:solidFill>
-          <a:srgbClr val="FFFFFF"/>
-        </a:solidFill>
-        <a:effectLst/>
-      </p:bgPr>
-    </p:bg>
-    <p:spTree>
-      <p:nvGrpSpPr>
-        <p:cNvPr id="1" name=""/>
-        <p:cNvGrpSpPr/>
-        <p:nvPr/>
-      </p:nvGrpSpPr>
-      <p:grpSpPr/>
-      <p:sp>
-        <p:nvSpPr>
-          <p:cNvPr id="2" name="TextBox 1"/>
-          <p:cNvSpPr txBox="1"/>
-          <p:nvPr/>
-        </p:nvSpPr>
-        <p:spPr>
-          <a:xfrm>
-            <a:off x="548640" y="320040"/>
-            <a:ext cx="11094415" cy="274320"/>
-          </a:xfrm>
-          <a:prstGeom prst="rect">
-            <a:avLst/>
-          </a:prstGeom>
-          <a:noFill/>
-        </p:spPr>
-        <p:txBody>
-          <a:bodyPr wrap="square" anchor="t" lIns="0" rIns="0" tIns="0" bIns="0"/>
-          <a:lstStyle/>
-          <a:p>
-            <a:pPr algn="l"/>
-            <a:r>
-              <a:rPr sz="1100" b="1" i="0">
-                <a:solidFill>
-                  <a:srgbClr val="54595D"/>
-                </a:solidFill>
-                <a:latin typeface="Calibri"/>
-              </a:rPr>
-              <a:t>ENGINEERING CORE  ·  Core topic 4</a:t>
-            </a:r>
-          </a:p>
-        </p:txBody>
-      </p:sp>
-      <p:sp>
-        <p:nvSpPr>
-          <p:cNvPr id="3" name="TextBox 2"/>
-          <p:cNvSpPr txBox="1"/>
-          <p:nvPr/>
-        </p:nvSpPr>
-        <p:spPr>
-          <a:xfrm>
-            <a:off x="548640" y="566928"/>
-            <a:ext cx="11094415" cy="822960"/>
-          </a:xfrm>
-          <a:prstGeom prst="rect">
-            <a:avLst/>
-          </a:prstGeom>
-          <a:noFill/>
-        </p:spPr>
-        <p:txBody>
-          <a:bodyPr wrap="square" anchor="ctr" lIns="0" rIns="0" tIns="0" bIns="0"/>
-          <a:lstStyle/>
-          <a:p>
-            <a:pPr algn="l"/>
-            <a:r>
-              <a:rPr sz="3200" b="1" i="0">
-                <a:solidFill>
-                  <a:srgbClr val="03306E"/>
-                </a:solidFill>
-                <a:latin typeface="Cambria"/>
-              </a:rPr>
-              <a:t>Number systems</a:t>
-            </a:r>
-          </a:p>
-        </p:txBody>
-      </p:sp>
-      <p:sp>
-        <p:nvSpPr>
-          <p:cNvPr id="4" name="TextBox 3"/>
-          <p:cNvSpPr txBox="1"/>
-          <p:nvPr/>
-        </p:nvSpPr>
-        <p:spPr>
-          <a:xfrm>
-            <a:off x="548640" y="6446520"/>
-            <a:ext cx="8229600" cy="274320"/>
-          </a:xfrm>
-          <a:prstGeom prst="rect">
-            <a:avLst/>
-          </a:prstGeom>
-          <a:noFill/>
-        </p:spPr>
-        <p:txBody>
-          <a:bodyPr wrap="square" anchor="t" lIns="0" rIns="0" tIns="0" bIns="0"/>
-          <a:lstStyle/>
-          <a:p>
-            <a:pPr algn="l"/>
-            <a:r>
-              <a:rPr sz="1000" b="0" i="0">
-                <a:solidFill>
-                  <a:srgbClr val="54595D"/>
-                </a:solidFill>
-                <a:latin typeface="Calibri"/>
-              </a:rPr>
-              <a:t>Design and Development for Engineering and Manufacturing T Level  ·  Essential Mathematics for Engineering</a:t>
-            </a:r>
-          </a:p>
-        </p:txBody>
-      </p:sp>
-      <p:sp>
-        <p:nvSpPr>
-          <p:cNvPr id="5" name="TextBox 4"/>
-          <p:cNvSpPr txBox="1"/>
-          <p:nvPr/>
-        </p:nvSpPr>
-        <p:spPr>
-          <a:xfrm>
-            <a:off x="10728655" y="6446520"/>
-            <a:ext cx="914400" cy="274320"/>
-          </a:xfrm>
-          <a:prstGeom prst="rect">
-            <a:avLst/>
-          </a:prstGeom>
-          <a:noFill/>
-        </p:spPr>
-        <p:txBody>
-          <a:bodyPr wrap="square" anchor="t" lIns="0" rIns="0" tIns="0" bIns="0"/>
-          <a:lstStyle/>
-          <a:p>
-            <a:pPr algn="r"/>
-            <a:r>
-              <a:rPr sz="1000" b="0" i="0">
-                <a:solidFill>
-                  <a:srgbClr val="54595D"/>
-                </a:solidFill>
-                <a:latin typeface="Calibri"/>
-              </a:rPr>
-              <a:t>5</a:t>
+              <a:t>10</a:t>
             </a:r>
           </a:p>
         </p:txBody>
@@ -6206,6 +4852,4972 @@
 </p:sld>
 </file>
 
+<file path=ppt/slides/slide11.xml><?xml version="1.0" encoding="utf-8"?>
+<p:sld xmlns:a="http://schemas.openxmlformats.org/drawingml/2006/main" xmlns:p="http://schemas.openxmlformats.org/presentationml/2006/main" xmlns:r="http://schemas.openxmlformats.org/officeDocument/2006/relationships">
+  <p:cSld>
+    <p:bg>
+      <p:bgPr>
+        <a:solidFill>
+          <a:srgbClr val="FFFFFF"/>
+        </a:solidFill>
+        <a:effectLst/>
+      </p:bgPr>
+    </p:bg>
+    <p:spTree>
+      <p:nvGrpSpPr>
+        <p:cNvPr id="1" name=""/>
+        <p:cNvGrpSpPr/>
+        <p:nvPr/>
+      </p:nvGrpSpPr>
+      <p:grpSpPr/>
+      <p:sp>
+        <p:nvSpPr>
+          <p:cNvPr id="2" name="TextBox 1"/>
+          <p:cNvSpPr txBox="1"/>
+          <p:nvPr/>
+        </p:nvSpPr>
+        <p:spPr>
+          <a:xfrm>
+            <a:off x="548640" y="320040"/>
+            <a:ext cx="11094415" cy="274320"/>
+          </a:xfrm>
+          <a:prstGeom prst="rect">
+            <a:avLst/>
+          </a:prstGeom>
+          <a:noFill/>
+        </p:spPr>
+        <p:txBody>
+          <a:bodyPr wrap="square" anchor="t" lIns="0" rIns="0" tIns="0" bIns="0"/>
+          <a:lstStyle/>
+          <a:p>
+            <a:pPr algn="l"/>
+            <a:r>
+              <a:rPr sz="1100" b="1" i="0">
+                <a:solidFill>
+                  <a:srgbClr val="54595D"/>
+                </a:solidFill>
+                <a:latin typeface="Calibri"/>
+              </a:rPr>
+              <a:t>ENGINEERING CORE  ·  Core topic 4</a:t>
+            </a:r>
+          </a:p>
+        </p:txBody>
+      </p:sp>
+      <p:sp>
+        <p:nvSpPr>
+          <p:cNvPr id="3" name="TextBox 2"/>
+          <p:cNvSpPr txBox="1"/>
+          <p:nvPr/>
+        </p:nvSpPr>
+        <p:spPr>
+          <a:xfrm>
+            <a:off x="548640" y="566928"/>
+            <a:ext cx="11094415" cy="822960"/>
+          </a:xfrm>
+          <a:prstGeom prst="rect">
+            <a:avLst/>
+          </a:prstGeom>
+          <a:noFill/>
+        </p:spPr>
+        <p:txBody>
+          <a:bodyPr wrap="square" anchor="ctr" lIns="0" rIns="0" tIns="0" bIns="0"/>
+          <a:lstStyle/>
+          <a:p>
+            <a:pPr algn="l"/>
+            <a:r>
+              <a:rPr sz="3200" b="1" i="0">
+                <a:solidFill>
+                  <a:srgbClr val="03306E"/>
+                </a:solidFill>
+                <a:latin typeface="Cambria"/>
+              </a:rPr>
+              <a:t>Quick check: Number systems</a:t>
+            </a:r>
+          </a:p>
+        </p:txBody>
+      </p:sp>
+      <p:sp>
+        <p:nvSpPr>
+          <p:cNvPr id="4" name="TextBox 3"/>
+          <p:cNvSpPr txBox="1"/>
+          <p:nvPr/>
+        </p:nvSpPr>
+        <p:spPr>
+          <a:xfrm>
+            <a:off x="548640" y="6446520"/>
+            <a:ext cx="8229600" cy="274320"/>
+          </a:xfrm>
+          <a:prstGeom prst="rect">
+            <a:avLst/>
+          </a:prstGeom>
+          <a:noFill/>
+        </p:spPr>
+        <p:txBody>
+          <a:bodyPr wrap="square" anchor="t" lIns="0" rIns="0" tIns="0" bIns="0"/>
+          <a:lstStyle/>
+          <a:p>
+            <a:pPr algn="l"/>
+            <a:r>
+              <a:rPr sz="1000" b="0" i="0">
+                <a:solidFill>
+                  <a:srgbClr val="54595D"/>
+                </a:solidFill>
+                <a:latin typeface="Calibri"/>
+              </a:rPr>
+              <a:t>Design and Development for Engineering and Manufacturing T Level  ·  Essential Mathematics for Engineering</a:t>
+            </a:r>
+          </a:p>
+        </p:txBody>
+      </p:sp>
+      <p:sp>
+        <p:nvSpPr>
+          <p:cNvPr id="5" name="TextBox 4"/>
+          <p:cNvSpPr txBox="1"/>
+          <p:nvPr/>
+        </p:nvSpPr>
+        <p:spPr>
+          <a:xfrm>
+            <a:off x="10728655" y="6446520"/>
+            <a:ext cx="914400" cy="274320"/>
+          </a:xfrm>
+          <a:prstGeom prst="rect">
+            <a:avLst/>
+          </a:prstGeom>
+          <a:noFill/>
+        </p:spPr>
+        <p:txBody>
+          <a:bodyPr wrap="square" anchor="t" lIns="0" rIns="0" tIns="0" bIns="0"/>
+          <a:lstStyle/>
+          <a:p>
+            <a:pPr algn="r"/>
+            <a:r>
+              <a:rPr sz="1000" b="0" i="0">
+                <a:solidFill>
+                  <a:srgbClr val="54595D"/>
+                </a:solidFill>
+                <a:latin typeface="Calibri"/>
+              </a:rPr>
+              <a:t>11</a:t>
+            </a:r>
+          </a:p>
+        </p:txBody>
+      </p:sp>
+      <p:sp>
+        <p:nvSpPr>
+          <p:cNvPr id="6" name="Oval 5"/>
+          <p:cNvSpPr/>
+          <p:nvPr/>
+        </p:nvSpPr>
+        <p:spPr>
+          <a:xfrm>
+            <a:off x="548640" y="1691640"/>
+            <a:ext cx="502920" cy="502920"/>
+          </a:xfrm>
+          <a:prstGeom prst="ellipse">
+            <a:avLst/>
+          </a:prstGeom>
+          <a:solidFill>
+            <a:srgbClr val="F2B705"/>
+          </a:solidFill>
+          <a:ln>
+            <a:noFill/>
+          </a:ln>
+          <a:effectLst/>
+        </p:spPr>
+        <p:style>
+          <a:lnRef idx="1">
+            <a:schemeClr val="accent1"/>
+          </a:lnRef>
+          <a:fillRef idx="3">
+            <a:schemeClr val="accent1"/>
+          </a:fillRef>
+          <a:effectRef idx="2">
+            <a:schemeClr val="accent1"/>
+          </a:effectRef>
+          <a:fontRef idx="minor">
+            <a:schemeClr val="lt1"/>
+          </a:fontRef>
+        </p:style>
+        <p:txBody>
+          <a:bodyPr rtlCol="0" anchor="ctr" lIns="0" rIns="0" tIns="0" bIns="0"/>
+          <a:lstStyle/>
+          <a:p>
+            <a:pPr algn="ctr"/>
+            <a:r>
+              <a:rPr sz="1600" b="1">
+                <a:solidFill>
+                  <a:srgbClr val="202122"/>
+                </a:solidFill>
+                <a:latin typeface="Calibri"/>
+              </a:rPr>
+              <a:t>1</a:t>
+            </a:r>
+          </a:p>
+        </p:txBody>
+      </p:sp>
+      <p:sp>
+        <p:nvSpPr>
+          <p:cNvPr id="7" name="TextBox 6"/>
+          <p:cNvSpPr txBox="1"/>
+          <p:nvPr/>
+        </p:nvSpPr>
+        <p:spPr>
+          <a:xfrm>
+            <a:off x="1371600" y="1645920"/>
+            <a:ext cx="10271455" cy="1188720"/>
+          </a:xfrm>
+          <a:prstGeom prst="rect">
+            <a:avLst/>
+          </a:prstGeom>
+          <a:noFill/>
+        </p:spPr>
+        <p:txBody>
+          <a:bodyPr wrap="square" anchor="t" lIns="0" rIns="0" tIns="0" bIns="0"/>
+          <a:lstStyle/>
+          <a:p>
+            <a:pPr algn="l"/>
+            <a:r>
+              <a:rPr sz="2400" b="0" i="0">
+                <a:solidFill>
+                  <a:srgbClr val="202122"/>
+                </a:solidFill>
+                <a:latin typeface="Calibri"/>
+              </a:rPr>
+              <a:t>Convert binary 1100 to decimal.</a:t>
+            </a:r>
+          </a:p>
+        </p:txBody>
+      </p:sp>
+      <p:sp>
+        <p:nvSpPr>
+          <p:cNvPr id="8" name="Oval 7"/>
+          <p:cNvSpPr/>
+          <p:nvPr/>
+        </p:nvSpPr>
+        <p:spPr>
+          <a:xfrm>
+            <a:off x="548640" y="3108960"/>
+            <a:ext cx="502920" cy="502920"/>
+          </a:xfrm>
+          <a:prstGeom prst="ellipse">
+            <a:avLst/>
+          </a:prstGeom>
+          <a:solidFill>
+            <a:srgbClr val="F2B705"/>
+          </a:solidFill>
+          <a:ln>
+            <a:noFill/>
+          </a:ln>
+          <a:effectLst/>
+        </p:spPr>
+        <p:style>
+          <a:lnRef idx="1">
+            <a:schemeClr val="accent1"/>
+          </a:lnRef>
+          <a:fillRef idx="3">
+            <a:schemeClr val="accent1"/>
+          </a:fillRef>
+          <a:effectRef idx="2">
+            <a:schemeClr val="accent1"/>
+          </a:effectRef>
+          <a:fontRef idx="minor">
+            <a:schemeClr val="lt1"/>
+          </a:fontRef>
+        </p:style>
+        <p:txBody>
+          <a:bodyPr rtlCol="0" anchor="ctr" lIns="0" rIns="0" tIns="0" bIns="0"/>
+          <a:lstStyle/>
+          <a:p>
+            <a:pPr algn="ctr"/>
+            <a:r>
+              <a:rPr sz="1600" b="1">
+                <a:solidFill>
+                  <a:srgbClr val="202122"/>
+                </a:solidFill>
+                <a:latin typeface="Calibri"/>
+              </a:rPr>
+              <a:t>2</a:t>
+            </a:r>
+          </a:p>
+        </p:txBody>
+      </p:sp>
+      <p:sp>
+        <p:nvSpPr>
+          <p:cNvPr id="9" name="TextBox 8"/>
+          <p:cNvSpPr txBox="1"/>
+          <p:nvPr/>
+        </p:nvSpPr>
+        <p:spPr>
+          <a:xfrm>
+            <a:off x="1371600" y="3063240"/>
+            <a:ext cx="10271455" cy="1188720"/>
+          </a:xfrm>
+          <a:prstGeom prst="rect">
+            <a:avLst/>
+          </a:prstGeom>
+          <a:noFill/>
+        </p:spPr>
+        <p:txBody>
+          <a:bodyPr wrap="square" anchor="t" lIns="0" rIns="0" tIns="0" bIns="0"/>
+          <a:lstStyle/>
+          <a:p>
+            <a:pPr algn="l"/>
+            <a:r>
+              <a:rPr sz="2400" b="0" i="0">
+                <a:solidFill>
+                  <a:srgbClr val="202122"/>
+                </a:solidFill>
+                <a:latin typeface="Calibri"/>
+              </a:rPr>
+              <a:t>Why do digital systems use binary?</a:t>
+            </a:r>
+          </a:p>
+        </p:txBody>
+      </p:sp>
+      <p:sp>
+        <p:nvSpPr>
+          <p:cNvPr id="10" name="Oval 9"/>
+          <p:cNvSpPr/>
+          <p:nvPr/>
+        </p:nvSpPr>
+        <p:spPr>
+          <a:xfrm>
+            <a:off x="548640" y="4526280"/>
+            <a:ext cx="502920" cy="502920"/>
+          </a:xfrm>
+          <a:prstGeom prst="ellipse">
+            <a:avLst/>
+          </a:prstGeom>
+          <a:solidFill>
+            <a:srgbClr val="F2B705"/>
+          </a:solidFill>
+          <a:ln>
+            <a:noFill/>
+          </a:ln>
+          <a:effectLst/>
+        </p:spPr>
+        <p:style>
+          <a:lnRef idx="1">
+            <a:schemeClr val="accent1"/>
+          </a:lnRef>
+          <a:fillRef idx="3">
+            <a:schemeClr val="accent1"/>
+          </a:fillRef>
+          <a:effectRef idx="2">
+            <a:schemeClr val="accent1"/>
+          </a:effectRef>
+          <a:fontRef idx="minor">
+            <a:schemeClr val="lt1"/>
+          </a:fontRef>
+        </p:style>
+        <p:txBody>
+          <a:bodyPr rtlCol="0" anchor="ctr" lIns="0" rIns="0" tIns="0" bIns="0"/>
+          <a:lstStyle/>
+          <a:p>
+            <a:pPr algn="ctr"/>
+            <a:r>
+              <a:rPr sz="1600" b="1">
+                <a:solidFill>
+                  <a:srgbClr val="202122"/>
+                </a:solidFill>
+                <a:latin typeface="Calibri"/>
+              </a:rPr>
+              <a:t>3</a:t>
+            </a:r>
+          </a:p>
+        </p:txBody>
+      </p:sp>
+      <p:sp>
+        <p:nvSpPr>
+          <p:cNvPr id="11" name="TextBox 10"/>
+          <p:cNvSpPr txBox="1"/>
+          <p:nvPr/>
+        </p:nvSpPr>
+        <p:spPr>
+          <a:xfrm>
+            <a:off x="1371600" y="4480560"/>
+            <a:ext cx="10271455" cy="1188720"/>
+          </a:xfrm>
+          <a:prstGeom prst="rect">
+            <a:avLst/>
+          </a:prstGeom>
+          <a:noFill/>
+        </p:spPr>
+        <p:txBody>
+          <a:bodyPr wrap="square" anchor="t" lIns="0" rIns="0" tIns="0" bIns="0"/>
+          <a:lstStyle/>
+          <a:p>
+            <a:pPr algn="l"/>
+            <a:r>
+              <a:rPr sz="2400" b="0" i="0">
+                <a:solidFill>
+                  <a:srgbClr val="202122"/>
+                </a:solidFill>
+                <a:latin typeface="Calibri"/>
+              </a:rPr>
+              <a:t>How many binary digits does one hex digit represent?</a:t>
+            </a:r>
+          </a:p>
+        </p:txBody>
+      </p:sp>
+      <p:sp>
+        <p:nvSpPr>
+          <p:cNvPr id="12" name="TextBox 11"/>
+          <p:cNvSpPr txBox="1"/>
+          <p:nvPr/>
+        </p:nvSpPr>
+        <p:spPr>
+          <a:xfrm>
+            <a:off x="548640" y="5852160"/>
+            <a:ext cx="11094415" cy="365760"/>
+          </a:xfrm>
+          <a:prstGeom prst="rect">
+            <a:avLst/>
+          </a:prstGeom>
+          <a:noFill/>
+        </p:spPr>
+        <p:txBody>
+          <a:bodyPr wrap="square" anchor="t" lIns="0" rIns="0" tIns="0" bIns="0"/>
+          <a:lstStyle/>
+          <a:p>
+            <a:pPr algn="l"/>
+            <a:r>
+              <a:rPr sz="1300" b="0" i="1">
+                <a:solidFill>
+                  <a:srgbClr val="54595D"/>
+                </a:solidFill>
+                <a:latin typeface="Calibri"/>
+              </a:rPr>
+              <a:t>Answer on mini whiteboards or in your book. Answers are in the speaker notes.</a:t>
+            </a:r>
+          </a:p>
+        </p:txBody>
+      </p:sp>
+    </p:spTree>
+  </p:cSld>
+  <p:clrMapOvr>
+    <a:masterClrMapping/>
+  </p:clrMapOvr>
+</p:sld>
+</file>
+
+<file path=ppt/slides/slide12.xml><?xml version="1.0" encoding="utf-8"?>
+<p:sld xmlns:a="http://schemas.openxmlformats.org/drawingml/2006/main" xmlns:p="http://schemas.openxmlformats.org/presentationml/2006/main" xmlns:r="http://schemas.openxmlformats.org/officeDocument/2006/relationships">
+  <p:cSld>
+    <p:bg>
+      <p:bgPr>
+        <a:solidFill>
+          <a:srgbClr val="FFFFFF"/>
+        </a:solidFill>
+        <a:effectLst/>
+      </p:bgPr>
+    </p:bg>
+    <p:spTree>
+      <p:nvGrpSpPr>
+        <p:cNvPr id="1" name=""/>
+        <p:cNvGrpSpPr/>
+        <p:nvPr/>
+      </p:nvGrpSpPr>
+      <p:grpSpPr/>
+      <p:sp>
+        <p:nvSpPr>
+          <p:cNvPr id="2" name="TextBox 1"/>
+          <p:cNvSpPr txBox="1"/>
+          <p:nvPr/>
+        </p:nvSpPr>
+        <p:spPr>
+          <a:xfrm>
+            <a:off x="548640" y="320040"/>
+            <a:ext cx="11094415" cy="274320"/>
+          </a:xfrm>
+          <a:prstGeom prst="rect">
+            <a:avLst/>
+          </a:prstGeom>
+          <a:noFill/>
+        </p:spPr>
+        <p:txBody>
+          <a:bodyPr wrap="square" anchor="t" lIns="0" rIns="0" tIns="0" bIns="0"/>
+          <a:lstStyle/>
+          <a:p>
+            <a:pPr algn="l"/>
+            <a:r>
+              <a:rPr sz="1100" b="1" i="0">
+                <a:solidFill>
+                  <a:srgbClr val="54595D"/>
+                </a:solidFill>
+                <a:latin typeface="Calibri"/>
+              </a:rPr>
+              <a:t>ENGINEERING CORE  ·  Core topic 4</a:t>
+            </a:r>
+          </a:p>
+        </p:txBody>
+      </p:sp>
+      <p:sp>
+        <p:nvSpPr>
+          <p:cNvPr id="3" name="TextBox 2"/>
+          <p:cNvSpPr txBox="1"/>
+          <p:nvPr/>
+        </p:nvSpPr>
+        <p:spPr>
+          <a:xfrm>
+            <a:off x="548640" y="566928"/>
+            <a:ext cx="11094415" cy="822960"/>
+          </a:xfrm>
+          <a:prstGeom prst="rect">
+            <a:avLst/>
+          </a:prstGeom>
+          <a:noFill/>
+        </p:spPr>
+        <p:txBody>
+          <a:bodyPr wrap="square" anchor="ctr" lIns="0" rIns="0" tIns="0" bIns="0"/>
+          <a:lstStyle/>
+          <a:p>
+            <a:pPr algn="l"/>
+            <a:r>
+              <a:rPr sz="3200" b="1" i="0">
+                <a:solidFill>
+                  <a:srgbClr val="03306E"/>
+                </a:solidFill>
+                <a:latin typeface="Cambria"/>
+              </a:rPr>
+              <a:t>Check your understanding</a:t>
+            </a:r>
+          </a:p>
+        </p:txBody>
+      </p:sp>
+      <p:sp>
+        <p:nvSpPr>
+          <p:cNvPr id="4" name="TextBox 3"/>
+          <p:cNvSpPr txBox="1"/>
+          <p:nvPr/>
+        </p:nvSpPr>
+        <p:spPr>
+          <a:xfrm>
+            <a:off x="548640" y="6446520"/>
+            <a:ext cx="8229600" cy="274320"/>
+          </a:xfrm>
+          <a:prstGeom prst="rect">
+            <a:avLst/>
+          </a:prstGeom>
+          <a:noFill/>
+        </p:spPr>
+        <p:txBody>
+          <a:bodyPr wrap="square" anchor="t" lIns="0" rIns="0" tIns="0" bIns="0"/>
+          <a:lstStyle/>
+          <a:p>
+            <a:pPr algn="l"/>
+            <a:r>
+              <a:rPr sz="1000" b="0" i="0">
+                <a:solidFill>
+                  <a:srgbClr val="54595D"/>
+                </a:solidFill>
+                <a:latin typeface="Calibri"/>
+              </a:rPr>
+              <a:t>Design and Development for Engineering and Manufacturing T Level  ·  Essential Mathematics for Engineering</a:t>
+            </a:r>
+          </a:p>
+        </p:txBody>
+      </p:sp>
+      <p:sp>
+        <p:nvSpPr>
+          <p:cNvPr id="5" name="TextBox 4"/>
+          <p:cNvSpPr txBox="1"/>
+          <p:nvPr/>
+        </p:nvSpPr>
+        <p:spPr>
+          <a:xfrm>
+            <a:off x="10728655" y="6446520"/>
+            <a:ext cx="914400" cy="274320"/>
+          </a:xfrm>
+          <a:prstGeom prst="rect">
+            <a:avLst/>
+          </a:prstGeom>
+          <a:noFill/>
+        </p:spPr>
+        <p:txBody>
+          <a:bodyPr wrap="square" anchor="t" lIns="0" rIns="0" tIns="0" bIns="0"/>
+          <a:lstStyle/>
+          <a:p>
+            <a:pPr algn="r"/>
+            <a:r>
+              <a:rPr sz="1000" b="0" i="0">
+                <a:solidFill>
+                  <a:srgbClr val="54595D"/>
+                </a:solidFill>
+                <a:latin typeface="Calibri"/>
+              </a:rPr>
+              <a:t>12</a:t>
+            </a:r>
+          </a:p>
+        </p:txBody>
+      </p:sp>
+      <p:sp>
+        <p:nvSpPr>
+          <p:cNvPr id="6" name="Oval 5"/>
+          <p:cNvSpPr/>
+          <p:nvPr/>
+        </p:nvSpPr>
+        <p:spPr>
+          <a:xfrm>
+            <a:off x="548640" y="1618488"/>
+            <a:ext cx="411480" cy="411480"/>
+          </a:xfrm>
+          <a:prstGeom prst="ellipse">
+            <a:avLst/>
+          </a:prstGeom>
+          <a:solidFill>
+            <a:srgbClr val="F2B705"/>
+          </a:solidFill>
+          <a:ln>
+            <a:noFill/>
+          </a:ln>
+          <a:effectLst/>
+        </p:spPr>
+        <p:style>
+          <a:lnRef idx="1">
+            <a:schemeClr val="accent1"/>
+          </a:lnRef>
+          <a:fillRef idx="3">
+            <a:schemeClr val="accent1"/>
+          </a:fillRef>
+          <a:effectRef idx="2">
+            <a:schemeClr val="accent1"/>
+          </a:effectRef>
+          <a:fontRef idx="minor">
+            <a:schemeClr val="lt1"/>
+          </a:fontRef>
+        </p:style>
+        <p:txBody>
+          <a:bodyPr rtlCol="0" anchor="ctr" lIns="0" rIns="0" tIns="0" bIns="0"/>
+          <a:lstStyle/>
+          <a:p>
+            <a:pPr algn="ctr"/>
+            <a:r>
+              <a:rPr sz="1400" b="1">
+                <a:solidFill>
+                  <a:srgbClr val="202122"/>
+                </a:solidFill>
+                <a:latin typeface="Calibri"/>
+              </a:rPr>
+              <a:t>1</a:t>
+            </a:r>
+          </a:p>
+        </p:txBody>
+      </p:sp>
+      <p:sp>
+        <p:nvSpPr>
+          <p:cNvPr id="7" name="TextBox 6"/>
+          <p:cNvSpPr txBox="1"/>
+          <p:nvPr/>
+        </p:nvSpPr>
+        <p:spPr>
+          <a:xfrm>
+            <a:off x="1234440" y="1600200"/>
+            <a:ext cx="10408615" cy="791870"/>
+          </a:xfrm>
+          <a:prstGeom prst="rect">
+            <a:avLst/>
+          </a:prstGeom>
+          <a:noFill/>
+        </p:spPr>
+        <p:txBody>
+          <a:bodyPr wrap="square" anchor="t" lIns="0" rIns="0" tIns="0" bIns="0"/>
+          <a:lstStyle/>
+          <a:p>
+            <a:pPr algn="l"/>
+            <a:r>
+              <a:rPr sz="2200" b="0" i="0">
+                <a:solidFill>
+                  <a:srgbClr val="202122"/>
+                </a:solidFill>
+                <a:latin typeface="Calibri"/>
+              </a:rPr>
+              <a:t>Write 0.0032 in standard form.</a:t>
+            </a:r>
+          </a:p>
+        </p:txBody>
+      </p:sp>
+      <p:sp>
+        <p:nvSpPr>
+          <p:cNvPr id="8" name="Oval 7"/>
+          <p:cNvSpPr/>
+          <p:nvPr/>
+        </p:nvSpPr>
+        <p:spPr>
+          <a:xfrm>
+            <a:off x="548640" y="2574950"/>
+            <a:ext cx="411480" cy="411480"/>
+          </a:xfrm>
+          <a:prstGeom prst="ellipse">
+            <a:avLst/>
+          </a:prstGeom>
+          <a:solidFill>
+            <a:srgbClr val="F2B705"/>
+          </a:solidFill>
+          <a:ln>
+            <a:noFill/>
+          </a:ln>
+          <a:effectLst/>
+        </p:spPr>
+        <p:style>
+          <a:lnRef idx="1">
+            <a:schemeClr val="accent1"/>
+          </a:lnRef>
+          <a:fillRef idx="3">
+            <a:schemeClr val="accent1"/>
+          </a:fillRef>
+          <a:effectRef idx="2">
+            <a:schemeClr val="accent1"/>
+          </a:effectRef>
+          <a:fontRef idx="minor">
+            <a:schemeClr val="lt1"/>
+          </a:fontRef>
+        </p:style>
+        <p:txBody>
+          <a:bodyPr rtlCol="0" anchor="ctr" lIns="0" rIns="0" tIns="0" bIns="0"/>
+          <a:lstStyle/>
+          <a:p>
+            <a:pPr algn="ctr"/>
+            <a:r>
+              <a:rPr sz="1400" b="1">
+                <a:solidFill>
+                  <a:srgbClr val="202122"/>
+                </a:solidFill>
+                <a:latin typeface="Calibri"/>
+              </a:rPr>
+              <a:t>2</a:t>
+            </a:r>
+          </a:p>
+        </p:txBody>
+      </p:sp>
+      <p:sp>
+        <p:nvSpPr>
+          <p:cNvPr id="9" name="TextBox 8"/>
+          <p:cNvSpPr txBox="1"/>
+          <p:nvPr/>
+        </p:nvSpPr>
+        <p:spPr>
+          <a:xfrm>
+            <a:off x="1234440" y="2556662"/>
+            <a:ext cx="10408615" cy="791870"/>
+          </a:xfrm>
+          <a:prstGeom prst="rect">
+            <a:avLst/>
+          </a:prstGeom>
+          <a:noFill/>
+        </p:spPr>
+        <p:txBody>
+          <a:bodyPr wrap="square" anchor="t" lIns="0" rIns="0" tIns="0" bIns="0"/>
+          <a:lstStyle/>
+          <a:p>
+            <a:pPr algn="l"/>
+            <a:r>
+              <a:rPr sz="2200" b="0" i="0">
+                <a:solidFill>
+                  <a:srgbClr val="202122"/>
+                </a:solidFill>
+                <a:latin typeface="Calibri"/>
+              </a:rPr>
+              <a:t>What is the gradient of y = 4x - 7?</a:t>
+            </a:r>
+          </a:p>
+        </p:txBody>
+      </p:sp>
+      <p:sp>
+        <p:nvSpPr>
+          <p:cNvPr id="10" name="Oval 9"/>
+          <p:cNvSpPr/>
+          <p:nvPr/>
+        </p:nvSpPr>
+        <p:spPr>
+          <a:xfrm>
+            <a:off x="548640" y="3531412"/>
+            <a:ext cx="411480" cy="411480"/>
+          </a:xfrm>
+          <a:prstGeom prst="ellipse">
+            <a:avLst/>
+          </a:prstGeom>
+          <a:solidFill>
+            <a:srgbClr val="F2B705"/>
+          </a:solidFill>
+          <a:ln>
+            <a:noFill/>
+          </a:ln>
+          <a:effectLst/>
+        </p:spPr>
+        <p:style>
+          <a:lnRef idx="1">
+            <a:schemeClr val="accent1"/>
+          </a:lnRef>
+          <a:fillRef idx="3">
+            <a:schemeClr val="accent1"/>
+          </a:fillRef>
+          <a:effectRef idx="2">
+            <a:schemeClr val="accent1"/>
+          </a:effectRef>
+          <a:fontRef idx="minor">
+            <a:schemeClr val="lt1"/>
+          </a:fontRef>
+        </p:style>
+        <p:txBody>
+          <a:bodyPr rtlCol="0" anchor="ctr" lIns="0" rIns="0" tIns="0" bIns="0"/>
+          <a:lstStyle/>
+          <a:p>
+            <a:pPr algn="ctr"/>
+            <a:r>
+              <a:rPr sz="1400" b="1">
+                <a:solidFill>
+                  <a:srgbClr val="202122"/>
+                </a:solidFill>
+                <a:latin typeface="Calibri"/>
+              </a:rPr>
+              <a:t>3</a:t>
+            </a:r>
+          </a:p>
+        </p:txBody>
+      </p:sp>
+      <p:sp>
+        <p:nvSpPr>
+          <p:cNvPr id="11" name="TextBox 10"/>
+          <p:cNvSpPr txBox="1"/>
+          <p:nvPr/>
+        </p:nvSpPr>
+        <p:spPr>
+          <a:xfrm>
+            <a:off x="1234440" y="3513124"/>
+            <a:ext cx="10408615" cy="791870"/>
+          </a:xfrm>
+          <a:prstGeom prst="rect">
+            <a:avLst/>
+          </a:prstGeom>
+          <a:noFill/>
+        </p:spPr>
+        <p:txBody>
+          <a:bodyPr wrap="square" anchor="t" lIns="0" rIns="0" tIns="0" bIns="0"/>
+          <a:lstStyle/>
+          <a:p>
+            <a:pPr algn="l"/>
+            <a:r>
+              <a:rPr sz="2200" b="0" i="0">
+                <a:solidFill>
+                  <a:srgbClr val="202122"/>
+                </a:solidFill>
+                <a:latin typeface="Calibri"/>
+              </a:rPr>
+              <a:t>Convert binary 1100 to decimal.</a:t>
+            </a:r>
+          </a:p>
+        </p:txBody>
+      </p:sp>
+      <p:sp>
+        <p:nvSpPr>
+          <p:cNvPr id="12" name="Oval 11"/>
+          <p:cNvSpPr/>
+          <p:nvPr/>
+        </p:nvSpPr>
+        <p:spPr>
+          <a:xfrm>
+            <a:off x="548640" y="4487875"/>
+            <a:ext cx="411480" cy="411480"/>
+          </a:xfrm>
+          <a:prstGeom prst="ellipse">
+            <a:avLst/>
+          </a:prstGeom>
+          <a:solidFill>
+            <a:srgbClr val="F2B705"/>
+          </a:solidFill>
+          <a:ln>
+            <a:noFill/>
+          </a:ln>
+          <a:effectLst/>
+        </p:spPr>
+        <p:style>
+          <a:lnRef idx="1">
+            <a:schemeClr val="accent1"/>
+          </a:lnRef>
+          <a:fillRef idx="3">
+            <a:schemeClr val="accent1"/>
+          </a:fillRef>
+          <a:effectRef idx="2">
+            <a:schemeClr val="accent1"/>
+          </a:effectRef>
+          <a:fontRef idx="minor">
+            <a:schemeClr val="lt1"/>
+          </a:fontRef>
+        </p:style>
+        <p:txBody>
+          <a:bodyPr rtlCol="0" anchor="ctr" lIns="0" rIns="0" tIns="0" bIns="0"/>
+          <a:lstStyle/>
+          <a:p>
+            <a:pPr algn="ctr"/>
+            <a:r>
+              <a:rPr sz="1400" b="1">
+                <a:solidFill>
+                  <a:srgbClr val="202122"/>
+                </a:solidFill>
+                <a:latin typeface="Calibri"/>
+              </a:rPr>
+              <a:t>4</a:t>
+            </a:r>
+          </a:p>
+        </p:txBody>
+      </p:sp>
+      <p:sp>
+        <p:nvSpPr>
+          <p:cNvPr id="13" name="TextBox 12"/>
+          <p:cNvSpPr txBox="1"/>
+          <p:nvPr/>
+        </p:nvSpPr>
+        <p:spPr>
+          <a:xfrm>
+            <a:off x="1234440" y="4469587"/>
+            <a:ext cx="10408615" cy="791870"/>
+          </a:xfrm>
+          <a:prstGeom prst="rect">
+            <a:avLst/>
+          </a:prstGeom>
+          <a:noFill/>
+        </p:spPr>
+        <p:txBody>
+          <a:bodyPr wrap="square" anchor="t" lIns="0" rIns="0" tIns="0" bIns="0"/>
+          <a:lstStyle/>
+          <a:p>
+            <a:pPr algn="l"/>
+            <a:r>
+              <a:rPr sz="2200" b="0" i="0">
+                <a:solidFill>
+                  <a:srgbClr val="202122"/>
+                </a:solidFill>
+                <a:latin typeface="Calibri"/>
+              </a:rPr>
+              <a:t>Find the mean of 12, 15, 18.</a:t>
+            </a:r>
+          </a:p>
+        </p:txBody>
+      </p:sp>
+      <p:sp>
+        <p:nvSpPr>
+          <p:cNvPr id="14" name="Oval 13"/>
+          <p:cNvSpPr/>
+          <p:nvPr/>
+        </p:nvSpPr>
+        <p:spPr>
+          <a:xfrm>
+            <a:off x="548640" y="5444337"/>
+            <a:ext cx="411480" cy="411480"/>
+          </a:xfrm>
+          <a:prstGeom prst="ellipse">
+            <a:avLst/>
+          </a:prstGeom>
+          <a:solidFill>
+            <a:srgbClr val="F2B705"/>
+          </a:solidFill>
+          <a:ln>
+            <a:noFill/>
+          </a:ln>
+          <a:effectLst/>
+        </p:spPr>
+        <p:style>
+          <a:lnRef idx="1">
+            <a:schemeClr val="accent1"/>
+          </a:lnRef>
+          <a:fillRef idx="3">
+            <a:schemeClr val="accent1"/>
+          </a:fillRef>
+          <a:effectRef idx="2">
+            <a:schemeClr val="accent1"/>
+          </a:effectRef>
+          <a:fontRef idx="minor">
+            <a:schemeClr val="lt1"/>
+          </a:fontRef>
+        </p:style>
+        <p:txBody>
+          <a:bodyPr rtlCol="0" anchor="ctr" lIns="0" rIns="0" tIns="0" bIns="0"/>
+          <a:lstStyle/>
+          <a:p>
+            <a:pPr algn="ctr"/>
+            <a:r>
+              <a:rPr sz="1400" b="1">
+                <a:solidFill>
+                  <a:srgbClr val="202122"/>
+                </a:solidFill>
+                <a:latin typeface="Calibri"/>
+              </a:rPr>
+              <a:t>5</a:t>
+            </a:r>
+          </a:p>
+        </p:txBody>
+      </p:sp>
+      <p:sp>
+        <p:nvSpPr>
+          <p:cNvPr id="15" name="TextBox 14"/>
+          <p:cNvSpPr txBox="1"/>
+          <p:nvPr/>
+        </p:nvSpPr>
+        <p:spPr>
+          <a:xfrm>
+            <a:off x="1234440" y="5426049"/>
+            <a:ext cx="10408615" cy="791870"/>
+          </a:xfrm>
+          <a:prstGeom prst="rect">
+            <a:avLst/>
+          </a:prstGeom>
+          <a:noFill/>
+        </p:spPr>
+        <p:txBody>
+          <a:bodyPr wrap="square" anchor="t" lIns="0" rIns="0" tIns="0" bIns="0"/>
+          <a:lstStyle/>
+          <a:p>
+            <a:pPr algn="l"/>
+            <a:r>
+              <a:rPr sz="2200" b="0" i="0">
+                <a:solidFill>
+                  <a:srgbClr val="202122"/>
+                </a:solidFill>
+                <a:latin typeface="Calibri"/>
+              </a:rPr>
+              <a:t>What is 180 degrees in radians?</a:t>
+            </a:r>
+          </a:p>
+        </p:txBody>
+      </p:sp>
+    </p:spTree>
+  </p:cSld>
+  <p:clrMapOvr>
+    <a:masterClrMapping/>
+  </p:clrMapOvr>
+</p:sld>
+</file>
+
+<file path=ppt/slides/slide13.xml><?xml version="1.0" encoding="utf-8"?>
+<p:sld xmlns:a="http://schemas.openxmlformats.org/drawingml/2006/main" xmlns:p="http://schemas.openxmlformats.org/presentationml/2006/main" xmlns:r="http://schemas.openxmlformats.org/officeDocument/2006/relationships">
+  <p:cSld>
+    <p:bg>
+      <p:bgPr>
+        <a:solidFill>
+          <a:srgbClr val="FFFFFF"/>
+        </a:solidFill>
+        <a:effectLst/>
+      </p:bgPr>
+    </p:bg>
+    <p:spTree>
+      <p:nvGrpSpPr>
+        <p:cNvPr id="1" name=""/>
+        <p:cNvGrpSpPr/>
+        <p:nvPr/>
+      </p:nvGrpSpPr>
+      <p:grpSpPr/>
+      <p:sp>
+        <p:nvSpPr>
+          <p:cNvPr id="2" name="TextBox 1"/>
+          <p:cNvSpPr txBox="1"/>
+          <p:nvPr/>
+        </p:nvSpPr>
+        <p:spPr>
+          <a:xfrm>
+            <a:off x="548640" y="320040"/>
+            <a:ext cx="11094415" cy="274320"/>
+          </a:xfrm>
+          <a:prstGeom prst="rect">
+            <a:avLst/>
+          </a:prstGeom>
+          <a:noFill/>
+        </p:spPr>
+        <p:txBody>
+          <a:bodyPr wrap="square" anchor="t" lIns="0" rIns="0" tIns="0" bIns="0"/>
+          <a:lstStyle/>
+          <a:p>
+            <a:pPr algn="l"/>
+            <a:r>
+              <a:rPr sz="1100" b="1" i="0">
+                <a:solidFill>
+                  <a:srgbClr val="54595D"/>
+                </a:solidFill>
+                <a:latin typeface="Calibri"/>
+              </a:rPr>
+              <a:t>ENGINEERING CORE  ·  Core topic 4</a:t>
+            </a:r>
+          </a:p>
+        </p:txBody>
+      </p:sp>
+      <p:sp>
+        <p:nvSpPr>
+          <p:cNvPr id="3" name="TextBox 2"/>
+          <p:cNvSpPr txBox="1"/>
+          <p:nvPr/>
+        </p:nvSpPr>
+        <p:spPr>
+          <a:xfrm>
+            <a:off x="548640" y="566928"/>
+            <a:ext cx="11094415" cy="822960"/>
+          </a:xfrm>
+          <a:prstGeom prst="rect">
+            <a:avLst/>
+          </a:prstGeom>
+          <a:noFill/>
+        </p:spPr>
+        <p:txBody>
+          <a:bodyPr wrap="square" anchor="ctr" lIns="0" rIns="0" tIns="0" bIns="0"/>
+          <a:lstStyle/>
+          <a:p>
+            <a:pPr algn="l"/>
+            <a:r>
+              <a:rPr sz="3200" b="1" i="0">
+                <a:solidFill>
+                  <a:srgbClr val="03306E"/>
+                </a:solidFill>
+                <a:latin typeface="Cambria"/>
+              </a:rPr>
+              <a:t>Answers</a:t>
+            </a:r>
+          </a:p>
+        </p:txBody>
+      </p:sp>
+      <p:sp>
+        <p:nvSpPr>
+          <p:cNvPr id="4" name="TextBox 3"/>
+          <p:cNvSpPr txBox="1"/>
+          <p:nvPr/>
+        </p:nvSpPr>
+        <p:spPr>
+          <a:xfrm>
+            <a:off x="548640" y="6446520"/>
+            <a:ext cx="8229600" cy="274320"/>
+          </a:xfrm>
+          <a:prstGeom prst="rect">
+            <a:avLst/>
+          </a:prstGeom>
+          <a:noFill/>
+        </p:spPr>
+        <p:txBody>
+          <a:bodyPr wrap="square" anchor="t" lIns="0" rIns="0" tIns="0" bIns="0"/>
+          <a:lstStyle/>
+          <a:p>
+            <a:pPr algn="l"/>
+            <a:r>
+              <a:rPr sz="1000" b="0" i="0">
+                <a:solidFill>
+                  <a:srgbClr val="54595D"/>
+                </a:solidFill>
+                <a:latin typeface="Calibri"/>
+              </a:rPr>
+              <a:t>Design and Development for Engineering and Manufacturing T Level  ·  Essential Mathematics for Engineering</a:t>
+            </a:r>
+          </a:p>
+        </p:txBody>
+      </p:sp>
+      <p:sp>
+        <p:nvSpPr>
+          <p:cNvPr id="5" name="TextBox 4"/>
+          <p:cNvSpPr txBox="1"/>
+          <p:nvPr/>
+        </p:nvSpPr>
+        <p:spPr>
+          <a:xfrm>
+            <a:off x="10728655" y="6446520"/>
+            <a:ext cx="914400" cy="274320"/>
+          </a:xfrm>
+          <a:prstGeom prst="rect">
+            <a:avLst/>
+          </a:prstGeom>
+          <a:noFill/>
+        </p:spPr>
+        <p:txBody>
+          <a:bodyPr wrap="square" anchor="t" lIns="0" rIns="0" tIns="0" bIns="0"/>
+          <a:lstStyle/>
+          <a:p>
+            <a:pPr algn="r"/>
+            <a:r>
+              <a:rPr sz="1000" b="0" i="0">
+                <a:solidFill>
+                  <a:srgbClr val="54595D"/>
+                </a:solidFill>
+                <a:latin typeface="Calibri"/>
+              </a:rPr>
+              <a:t>13</a:t>
+            </a:r>
+          </a:p>
+        </p:txBody>
+      </p:sp>
+      <p:sp>
+        <p:nvSpPr>
+          <p:cNvPr id="6" name="Oval 5"/>
+          <p:cNvSpPr/>
+          <p:nvPr/>
+        </p:nvSpPr>
+        <p:spPr>
+          <a:xfrm>
+            <a:off x="548640" y="1618488"/>
+            <a:ext cx="411480" cy="411480"/>
+          </a:xfrm>
+          <a:prstGeom prst="ellipse">
+            <a:avLst/>
+          </a:prstGeom>
+          <a:solidFill>
+            <a:srgbClr val="F2B705"/>
+          </a:solidFill>
+          <a:ln>
+            <a:noFill/>
+          </a:ln>
+          <a:effectLst/>
+        </p:spPr>
+        <p:style>
+          <a:lnRef idx="1">
+            <a:schemeClr val="accent1"/>
+          </a:lnRef>
+          <a:fillRef idx="3">
+            <a:schemeClr val="accent1"/>
+          </a:fillRef>
+          <a:effectRef idx="2">
+            <a:schemeClr val="accent1"/>
+          </a:effectRef>
+          <a:fontRef idx="minor">
+            <a:schemeClr val="lt1"/>
+          </a:fontRef>
+        </p:style>
+        <p:txBody>
+          <a:bodyPr rtlCol="0" anchor="ctr" lIns="0" rIns="0" tIns="0" bIns="0"/>
+          <a:lstStyle/>
+          <a:p>
+            <a:pPr algn="ctr"/>
+            <a:r>
+              <a:rPr sz="1400" b="1">
+                <a:solidFill>
+                  <a:srgbClr val="202122"/>
+                </a:solidFill>
+                <a:latin typeface="Calibri"/>
+              </a:rPr>
+              <a:t>1</a:t>
+            </a:r>
+          </a:p>
+        </p:txBody>
+      </p:sp>
+      <p:sp>
+        <p:nvSpPr>
+          <p:cNvPr id="7" name="TextBox 6"/>
+          <p:cNvSpPr txBox="1"/>
+          <p:nvPr/>
+        </p:nvSpPr>
+        <p:spPr>
+          <a:xfrm>
+            <a:off x="1234440" y="1600200"/>
+            <a:ext cx="10408615" cy="791870"/>
+          </a:xfrm>
+          <a:prstGeom prst="rect">
+            <a:avLst/>
+          </a:prstGeom>
+          <a:noFill/>
+        </p:spPr>
+        <p:txBody>
+          <a:bodyPr wrap="square" anchor="t" lIns="0" rIns="0" tIns="0" bIns="0"/>
+          <a:lstStyle/>
+          <a:p>
+            <a:pPr algn="l"/>
+            <a:r>
+              <a:rPr sz="1800" b="0" i="0">
+                <a:solidFill>
+                  <a:srgbClr val="54595D"/>
+                </a:solidFill>
+                <a:latin typeface="Calibri"/>
+              </a:rPr>
+              <a:t>Write 0.0032 in standard form.</a:t>
+            </a:r>
+          </a:p>
+          <a:p>
+            <a:r>
+              <a:rPr sz="1800" b="1">
+                <a:solidFill>
+                  <a:srgbClr val="03306E"/>
+                </a:solidFill>
+                <a:latin typeface="Calibri"/>
+              </a:rPr>
+              <a:t>3.2 x 10 to the power -3.</a:t>
+            </a:r>
+          </a:p>
+        </p:txBody>
+      </p:sp>
+      <p:sp>
+        <p:nvSpPr>
+          <p:cNvPr id="8" name="Oval 7"/>
+          <p:cNvSpPr/>
+          <p:nvPr/>
+        </p:nvSpPr>
+        <p:spPr>
+          <a:xfrm>
+            <a:off x="548640" y="2574950"/>
+            <a:ext cx="411480" cy="411480"/>
+          </a:xfrm>
+          <a:prstGeom prst="ellipse">
+            <a:avLst/>
+          </a:prstGeom>
+          <a:solidFill>
+            <a:srgbClr val="F2B705"/>
+          </a:solidFill>
+          <a:ln>
+            <a:noFill/>
+          </a:ln>
+          <a:effectLst/>
+        </p:spPr>
+        <p:style>
+          <a:lnRef idx="1">
+            <a:schemeClr val="accent1"/>
+          </a:lnRef>
+          <a:fillRef idx="3">
+            <a:schemeClr val="accent1"/>
+          </a:fillRef>
+          <a:effectRef idx="2">
+            <a:schemeClr val="accent1"/>
+          </a:effectRef>
+          <a:fontRef idx="minor">
+            <a:schemeClr val="lt1"/>
+          </a:fontRef>
+        </p:style>
+        <p:txBody>
+          <a:bodyPr rtlCol="0" anchor="ctr" lIns="0" rIns="0" tIns="0" bIns="0"/>
+          <a:lstStyle/>
+          <a:p>
+            <a:pPr algn="ctr"/>
+            <a:r>
+              <a:rPr sz="1400" b="1">
+                <a:solidFill>
+                  <a:srgbClr val="202122"/>
+                </a:solidFill>
+                <a:latin typeface="Calibri"/>
+              </a:rPr>
+              <a:t>2</a:t>
+            </a:r>
+          </a:p>
+        </p:txBody>
+      </p:sp>
+      <p:sp>
+        <p:nvSpPr>
+          <p:cNvPr id="9" name="TextBox 8"/>
+          <p:cNvSpPr txBox="1"/>
+          <p:nvPr/>
+        </p:nvSpPr>
+        <p:spPr>
+          <a:xfrm>
+            <a:off x="1234440" y="2556662"/>
+            <a:ext cx="10408615" cy="791870"/>
+          </a:xfrm>
+          <a:prstGeom prst="rect">
+            <a:avLst/>
+          </a:prstGeom>
+          <a:noFill/>
+        </p:spPr>
+        <p:txBody>
+          <a:bodyPr wrap="square" anchor="t" lIns="0" rIns="0" tIns="0" bIns="0"/>
+          <a:lstStyle/>
+          <a:p>
+            <a:pPr algn="l"/>
+            <a:r>
+              <a:rPr sz="1800" b="0" i="0">
+                <a:solidFill>
+                  <a:srgbClr val="54595D"/>
+                </a:solidFill>
+                <a:latin typeface="Calibri"/>
+              </a:rPr>
+              <a:t>What is the gradient of y = 4x - 7?</a:t>
+            </a:r>
+          </a:p>
+          <a:p>
+            <a:r>
+              <a:rPr sz="1800" b="1">
+                <a:solidFill>
+                  <a:srgbClr val="03306E"/>
+                </a:solidFill>
+                <a:latin typeface="Calibri"/>
+              </a:rPr>
+              <a:t>4.</a:t>
+            </a:r>
+          </a:p>
+        </p:txBody>
+      </p:sp>
+      <p:sp>
+        <p:nvSpPr>
+          <p:cNvPr id="10" name="Oval 9"/>
+          <p:cNvSpPr/>
+          <p:nvPr/>
+        </p:nvSpPr>
+        <p:spPr>
+          <a:xfrm>
+            <a:off x="548640" y="3531412"/>
+            <a:ext cx="411480" cy="411480"/>
+          </a:xfrm>
+          <a:prstGeom prst="ellipse">
+            <a:avLst/>
+          </a:prstGeom>
+          <a:solidFill>
+            <a:srgbClr val="F2B705"/>
+          </a:solidFill>
+          <a:ln>
+            <a:noFill/>
+          </a:ln>
+          <a:effectLst/>
+        </p:spPr>
+        <p:style>
+          <a:lnRef idx="1">
+            <a:schemeClr val="accent1"/>
+          </a:lnRef>
+          <a:fillRef idx="3">
+            <a:schemeClr val="accent1"/>
+          </a:fillRef>
+          <a:effectRef idx="2">
+            <a:schemeClr val="accent1"/>
+          </a:effectRef>
+          <a:fontRef idx="minor">
+            <a:schemeClr val="lt1"/>
+          </a:fontRef>
+        </p:style>
+        <p:txBody>
+          <a:bodyPr rtlCol="0" anchor="ctr" lIns="0" rIns="0" tIns="0" bIns="0"/>
+          <a:lstStyle/>
+          <a:p>
+            <a:pPr algn="ctr"/>
+            <a:r>
+              <a:rPr sz="1400" b="1">
+                <a:solidFill>
+                  <a:srgbClr val="202122"/>
+                </a:solidFill>
+                <a:latin typeface="Calibri"/>
+              </a:rPr>
+              <a:t>3</a:t>
+            </a:r>
+          </a:p>
+        </p:txBody>
+      </p:sp>
+      <p:sp>
+        <p:nvSpPr>
+          <p:cNvPr id="11" name="TextBox 10"/>
+          <p:cNvSpPr txBox="1"/>
+          <p:nvPr/>
+        </p:nvSpPr>
+        <p:spPr>
+          <a:xfrm>
+            <a:off x="1234440" y="3513124"/>
+            <a:ext cx="10408615" cy="791870"/>
+          </a:xfrm>
+          <a:prstGeom prst="rect">
+            <a:avLst/>
+          </a:prstGeom>
+          <a:noFill/>
+        </p:spPr>
+        <p:txBody>
+          <a:bodyPr wrap="square" anchor="t" lIns="0" rIns="0" tIns="0" bIns="0"/>
+          <a:lstStyle/>
+          <a:p>
+            <a:pPr algn="l"/>
+            <a:r>
+              <a:rPr sz="1800" b="0" i="0">
+                <a:solidFill>
+                  <a:srgbClr val="54595D"/>
+                </a:solidFill>
+                <a:latin typeface="Calibri"/>
+              </a:rPr>
+              <a:t>Convert binary 1100 to decimal.</a:t>
+            </a:r>
+          </a:p>
+          <a:p>
+            <a:r>
+              <a:rPr sz="1800" b="1">
+                <a:solidFill>
+                  <a:srgbClr val="03306E"/>
+                </a:solidFill>
+                <a:latin typeface="Calibri"/>
+              </a:rPr>
+              <a:t>12.</a:t>
+            </a:r>
+          </a:p>
+        </p:txBody>
+      </p:sp>
+      <p:sp>
+        <p:nvSpPr>
+          <p:cNvPr id="12" name="Oval 11"/>
+          <p:cNvSpPr/>
+          <p:nvPr/>
+        </p:nvSpPr>
+        <p:spPr>
+          <a:xfrm>
+            <a:off x="548640" y="4487875"/>
+            <a:ext cx="411480" cy="411480"/>
+          </a:xfrm>
+          <a:prstGeom prst="ellipse">
+            <a:avLst/>
+          </a:prstGeom>
+          <a:solidFill>
+            <a:srgbClr val="F2B705"/>
+          </a:solidFill>
+          <a:ln>
+            <a:noFill/>
+          </a:ln>
+          <a:effectLst/>
+        </p:spPr>
+        <p:style>
+          <a:lnRef idx="1">
+            <a:schemeClr val="accent1"/>
+          </a:lnRef>
+          <a:fillRef idx="3">
+            <a:schemeClr val="accent1"/>
+          </a:fillRef>
+          <a:effectRef idx="2">
+            <a:schemeClr val="accent1"/>
+          </a:effectRef>
+          <a:fontRef idx="minor">
+            <a:schemeClr val="lt1"/>
+          </a:fontRef>
+        </p:style>
+        <p:txBody>
+          <a:bodyPr rtlCol="0" anchor="ctr" lIns="0" rIns="0" tIns="0" bIns="0"/>
+          <a:lstStyle/>
+          <a:p>
+            <a:pPr algn="ctr"/>
+            <a:r>
+              <a:rPr sz="1400" b="1">
+                <a:solidFill>
+                  <a:srgbClr val="202122"/>
+                </a:solidFill>
+                <a:latin typeface="Calibri"/>
+              </a:rPr>
+              <a:t>4</a:t>
+            </a:r>
+          </a:p>
+        </p:txBody>
+      </p:sp>
+      <p:sp>
+        <p:nvSpPr>
+          <p:cNvPr id="13" name="TextBox 12"/>
+          <p:cNvSpPr txBox="1"/>
+          <p:nvPr/>
+        </p:nvSpPr>
+        <p:spPr>
+          <a:xfrm>
+            <a:off x="1234440" y="4469587"/>
+            <a:ext cx="10408615" cy="791870"/>
+          </a:xfrm>
+          <a:prstGeom prst="rect">
+            <a:avLst/>
+          </a:prstGeom>
+          <a:noFill/>
+        </p:spPr>
+        <p:txBody>
+          <a:bodyPr wrap="square" anchor="t" lIns="0" rIns="0" tIns="0" bIns="0"/>
+          <a:lstStyle/>
+          <a:p>
+            <a:pPr algn="l"/>
+            <a:r>
+              <a:rPr sz="1800" b="0" i="0">
+                <a:solidFill>
+                  <a:srgbClr val="54595D"/>
+                </a:solidFill>
+                <a:latin typeface="Calibri"/>
+              </a:rPr>
+              <a:t>Find the mean of 12, 15, 18.</a:t>
+            </a:r>
+          </a:p>
+          <a:p>
+            <a:r>
+              <a:rPr sz="1800" b="1">
+                <a:solidFill>
+                  <a:srgbClr val="03306E"/>
+                </a:solidFill>
+                <a:latin typeface="Calibri"/>
+              </a:rPr>
+              <a:t>15.</a:t>
+            </a:r>
+          </a:p>
+        </p:txBody>
+      </p:sp>
+      <p:sp>
+        <p:nvSpPr>
+          <p:cNvPr id="14" name="Oval 13"/>
+          <p:cNvSpPr/>
+          <p:nvPr/>
+        </p:nvSpPr>
+        <p:spPr>
+          <a:xfrm>
+            <a:off x="548640" y="5444337"/>
+            <a:ext cx="411480" cy="411480"/>
+          </a:xfrm>
+          <a:prstGeom prst="ellipse">
+            <a:avLst/>
+          </a:prstGeom>
+          <a:solidFill>
+            <a:srgbClr val="F2B705"/>
+          </a:solidFill>
+          <a:ln>
+            <a:noFill/>
+          </a:ln>
+          <a:effectLst/>
+        </p:spPr>
+        <p:style>
+          <a:lnRef idx="1">
+            <a:schemeClr val="accent1"/>
+          </a:lnRef>
+          <a:fillRef idx="3">
+            <a:schemeClr val="accent1"/>
+          </a:fillRef>
+          <a:effectRef idx="2">
+            <a:schemeClr val="accent1"/>
+          </a:effectRef>
+          <a:fontRef idx="minor">
+            <a:schemeClr val="lt1"/>
+          </a:fontRef>
+        </p:style>
+        <p:txBody>
+          <a:bodyPr rtlCol="0" anchor="ctr" lIns="0" rIns="0" tIns="0" bIns="0"/>
+          <a:lstStyle/>
+          <a:p>
+            <a:pPr algn="ctr"/>
+            <a:r>
+              <a:rPr sz="1400" b="1">
+                <a:solidFill>
+                  <a:srgbClr val="202122"/>
+                </a:solidFill>
+                <a:latin typeface="Calibri"/>
+              </a:rPr>
+              <a:t>5</a:t>
+            </a:r>
+          </a:p>
+        </p:txBody>
+      </p:sp>
+      <p:sp>
+        <p:nvSpPr>
+          <p:cNvPr id="15" name="TextBox 14"/>
+          <p:cNvSpPr txBox="1"/>
+          <p:nvPr/>
+        </p:nvSpPr>
+        <p:spPr>
+          <a:xfrm>
+            <a:off x="1234440" y="5426049"/>
+            <a:ext cx="10408615" cy="791870"/>
+          </a:xfrm>
+          <a:prstGeom prst="rect">
+            <a:avLst/>
+          </a:prstGeom>
+          <a:noFill/>
+        </p:spPr>
+        <p:txBody>
+          <a:bodyPr wrap="square" anchor="t" lIns="0" rIns="0" tIns="0" bIns="0"/>
+          <a:lstStyle/>
+          <a:p>
+            <a:pPr algn="l"/>
+            <a:r>
+              <a:rPr sz="1800" b="0" i="0">
+                <a:solidFill>
+                  <a:srgbClr val="54595D"/>
+                </a:solidFill>
+                <a:latin typeface="Calibri"/>
+              </a:rPr>
+              <a:t>What is 180 degrees in radians?</a:t>
+            </a:r>
+          </a:p>
+          <a:p>
+            <a:r>
+              <a:rPr sz="1800" b="1">
+                <a:solidFill>
+                  <a:srgbClr val="03306E"/>
+                </a:solidFill>
+                <a:latin typeface="Calibri"/>
+              </a:rPr>
+              <a:t>Pi radians.</a:t>
+            </a:r>
+          </a:p>
+        </p:txBody>
+      </p:sp>
+    </p:spTree>
+  </p:cSld>
+  <p:clrMapOvr>
+    <a:masterClrMapping/>
+  </p:clrMapOvr>
+</p:sld>
+</file>
+
+<file path=ppt/slides/slide14.xml><?xml version="1.0" encoding="utf-8"?>
+<p:sld xmlns:a="http://schemas.openxmlformats.org/drawingml/2006/main" xmlns:p="http://schemas.openxmlformats.org/presentationml/2006/main" xmlns:r="http://schemas.openxmlformats.org/officeDocument/2006/relationships">
+  <p:cSld>
+    <p:bg>
+      <p:bgPr>
+        <a:solidFill>
+          <a:srgbClr val="FFFFFF"/>
+        </a:solidFill>
+        <a:effectLst/>
+      </p:bgPr>
+    </p:bg>
+    <p:spTree>
+      <p:nvGrpSpPr>
+        <p:cNvPr id="1" name=""/>
+        <p:cNvGrpSpPr/>
+        <p:nvPr/>
+      </p:nvGrpSpPr>
+      <p:grpSpPr/>
+      <p:sp>
+        <p:nvSpPr>
+          <p:cNvPr id="2" name="TextBox 1"/>
+          <p:cNvSpPr txBox="1"/>
+          <p:nvPr/>
+        </p:nvSpPr>
+        <p:spPr>
+          <a:xfrm>
+            <a:off x="548640" y="320040"/>
+            <a:ext cx="11094415" cy="274320"/>
+          </a:xfrm>
+          <a:prstGeom prst="rect">
+            <a:avLst/>
+          </a:prstGeom>
+          <a:noFill/>
+        </p:spPr>
+        <p:txBody>
+          <a:bodyPr wrap="square" anchor="t" lIns="0" rIns="0" tIns="0" bIns="0"/>
+          <a:lstStyle/>
+          <a:p>
+            <a:pPr algn="l"/>
+            <a:r>
+              <a:rPr sz="1100" b="1" i="0">
+                <a:solidFill>
+                  <a:srgbClr val="54595D"/>
+                </a:solidFill>
+                <a:latin typeface="Calibri"/>
+              </a:rPr>
+              <a:t>ENGINEERING CORE  ·  Core topic 4</a:t>
+            </a:r>
+          </a:p>
+        </p:txBody>
+      </p:sp>
+      <p:sp>
+        <p:nvSpPr>
+          <p:cNvPr id="3" name="TextBox 2"/>
+          <p:cNvSpPr txBox="1"/>
+          <p:nvPr/>
+        </p:nvSpPr>
+        <p:spPr>
+          <a:xfrm>
+            <a:off x="548640" y="566928"/>
+            <a:ext cx="11094415" cy="822960"/>
+          </a:xfrm>
+          <a:prstGeom prst="rect">
+            <a:avLst/>
+          </a:prstGeom>
+          <a:noFill/>
+        </p:spPr>
+        <p:txBody>
+          <a:bodyPr wrap="square" anchor="ctr" lIns="0" rIns="0" tIns="0" bIns="0"/>
+          <a:lstStyle/>
+          <a:p>
+            <a:pPr algn="l"/>
+            <a:r>
+              <a:rPr sz="3200" b="1" i="0">
+                <a:solidFill>
+                  <a:srgbClr val="03306E"/>
+                </a:solidFill>
+                <a:latin typeface="Cambria"/>
+              </a:rPr>
+              <a:t>Activity: Maths in the workshop</a:t>
+            </a:r>
+          </a:p>
+        </p:txBody>
+      </p:sp>
+      <p:sp>
+        <p:nvSpPr>
+          <p:cNvPr id="4" name="TextBox 3"/>
+          <p:cNvSpPr txBox="1"/>
+          <p:nvPr/>
+        </p:nvSpPr>
+        <p:spPr>
+          <a:xfrm>
+            <a:off x="548640" y="6446520"/>
+            <a:ext cx="8229600" cy="274320"/>
+          </a:xfrm>
+          <a:prstGeom prst="rect">
+            <a:avLst/>
+          </a:prstGeom>
+          <a:noFill/>
+        </p:spPr>
+        <p:txBody>
+          <a:bodyPr wrap="square" anchor="t" lIns="0" rIns="0" tIns="0" bIns="0"/>
+          <a:lstStyle/>
+          <a:p>
+            <a:pPr algn="l"/>
+            <a:r>
+              <a:rPr sz="1000" b="0" i="0">
+                <a:solidFill>
+                  <a:srgbClr val="54595D"/>
+                </a:solidFill>
+                <a:latin typeface="Calibri"/>
+              </a:rPr>
+              <a:t>Design and Development for Engineering and Manufacturing T Level  ·  Essential Mathematics for Engineering</a:t>
+            </a:r>
+          </a:p>
+        </p:txBody>
+      </p:sp>
+      <p:sp>
+        <p:nvSpPr>
+          <p:cNvPr id="5" name="TextBox 4"/>
+          <p:cNvSpPr txBox="1"/>
+          <p:nvPr/>
+        </p:nvSpPr>
+        <p:spPr>
+          <a:xfrm>
+            <a:off x="10728655" y="6446520"/>
+            <a:ext cx="914400" cy="274320"/>
+          </a:xfrm>
+          <a:prstGeom prst="rect">
+            <a:avLst/>
+          </a:prstGeom>
+          <a:noFill/>
+        </p:spPr>
+        <p:txBody>
+          <a:bodyPr wrap="square" anchor="t" lIns="0" rIns="0" tIns="0" bIns="0"/>
+          <a:lstStyle/>
+          <a:p>
+            <a:pPr algn="r"/>
+            <a:r>
+              <a:rPr sz="1000" b="0" i="0">
+                <a:solidFill>
+                  <a:srgbClr val="54595D"/>
+                </a:solidFill>
+                <a:latin typeface="Calibri"/>
+              </a:rPr>
+              <a:t>14</a:t>
+            </a:r>
+          </a:p>
+        </p:txBody>
+      </p:sp>
+      <p:sp>
+        <p:nvSpPr>
+          <p:cNvPr id="6" name="Rounded Rectangle 5"/>
+          <p:cNvSpPr/>
+          <p:nvPr/>
+        </p:nvSpPr>
+        <p:spPr>
+          <a:xfrm>
+            <a:off x="548640" y="1508760"/>
+            <a:ext cx="2011680" cy="457200"/>
+          </a:xfrm>
+          <a:prstGeom prst="roundRect">
+            <a:avLst>
+              <a:gd name="adj" fmla="val 50000"/>
+            </a:avLst>
+          </a:prstGeom>
+          <a:solidFill>
+            <a:srgbClr val="F2B705"/>
+          </a:solidFill>
+          <a:ln>
+            <a:noFill/>
+          </a:ln>
+          <a:effectLst/>
+        </p:spPr>
+        <p:style>
+          <a:lnRef idx="1">
+            <a:schemeClr val="accent1"/>
+          </a:lnRef>
+          <a:fillRef idx="3">
+            <a:schemeClr val="accent1"/>
+          </a:fillRef>
+          <a:effectRef idx="2">
+            <a:schemeClr val="accent1"/>
+          </a:effectRef>
+          <a:fontRef idx="minor">
+            <a:schemeClr val="lt1"/>
+          </a:fontRef>
+        </p:style>
+        <p:txBody>
+          <a:bodyPr rtlCol="0" anchor="ctr"/>
+          <a:lstStyle/>
+          <a:p/>
+        </p:txBody>
+      </p:sp>
+      <p:sp>
+        <p:nvSpPr>
+          <p:cNvPr id="7" name="TextBox 6"/>
+          <p:cNvSpPr txBox="1"/>
+          <p:nvPr/>
+        </p:nvSpPr>
+        <p:spPr>
+          <a:xfrm>
+            <a:off x="548640" y="1508760"/>
+            <a:ext cx="2011680" cy="457200"/>
+          </a:xfrm>
+          <a:prstGeom prst="rect">
+            <a:avLst/>
+          </a:prstGeom>
+          <a:noFill/>
+        </p:spPr>
+        <p:txBody>
+          <a:bodyPr wrap="square" anchor="ctr" lIns="0" rIns="0" tIns="0" bIns="0"/>
+          <a:lstStyle/>
+          <a:p>
+            <a:pPr algn="ctr"/>
+            <a:r>
+              <a:rPr sz="1400" b="1" i="0">
+                <a:solidFill>
+                  <a:srgbClr val="202122"/>
+                </a:solidFill>
+                <a:latin typeface="Calibri"/>
+              </a:rPr>
+              <a:t>30 minutes</a:t>
+            </a:r>
+          </a:p>
+        </p:txBody>
+      </p:sp>
+      <p:sp>
+        <p:nvSpPr>
+          <p:cNvPr id="8" name="TextBox 7"/>
+          <p:cNvSpPr txBox="1"/>
+          <p:nvPr/>
+        </p:nvSpPr>
+        <p:spPr>
+          <a:xfrm>
+            <a:off x="2743200" y="1508760"/>
+            <a:ext cx="4754880" cy="457200"/>
+          </a:xfrm>
+          <a:prstGeom prst="rect">
+            <a:avLst/>
+          </a:prstGeom>
+          <a:noFill/>
+        </p:spPr>
+        <p:txBody>
+          <a:bodyPr wrap="square" anchor="ctr" lIns="0" rIns="0" tIns="0" bIns="0"/>
+          <a:lstStyle/>
+          <a:p>
+            <a:pPr algn="l"/>
+            <a:r>
+              <a:rPr sz="1400" b="0" i="1">
+                <a:solidFill>
+                  <a:srgbClr val="54595D"/>
+                </a:solidFill>
+                <a:latin typeface="Calibri"/>
+              </a:rPr>
+              <a:t>Pairs</a:t>
+            </a:r>
+          </a:p>
+        </p:txBody>
+      </p:sp>
+      <p:sp>
+        <p:nvSpPr>
+          <p:cNvPr id="9" name="Oval 8"/>
+          <p:cNvSpPr/>
+          <p:nvPr/>
+        </p:nvSpPr>
+        <p:spPr>
+          <a:xfrm>
+            <a:off x="548640" y="2482596"/>
+            <a:ext cx="384048" cy="384048"/>
+          </a:xfrm>
+          <a:prstGeom prst="ellipse">
+            <a:avLst/>
+          </a:prstGeom>
+          <a:solidFill>
+            <a:srgbClr val="0645AD"/>
+          </a:solidFill>
+          <a:ln>
+            <a:noFill/>
+          </a:ln>
+          <a:effectLst/>
+        </p:spPr>
+        <p:style>
+          <a:lnRef idx="1">
+            <a:schemeClr val="accent1"/>
+          </a:lnRef>
+          <a:fillRef idx="3">
+            <a:schemeClr val="accent1"/>
+          </a:fillRef>
+          <a:effectRef idx="2">
+            <a:schemeClr val="accent1"/>
+          </a:effectRef>
+          <a:fontRef idx="minor">
+            <a:schemeClr val="lt1"/>
+          </a:fontRef>
+        </p:style>
+        <p:txBody>
+          <a:bodyPr rtlCol="0" anchor="ctr" lIns="0" rIns="0" tIns="0" bIns="0"/>
+          <a:lstStyle/>
+          <a:p>
+            <a:pPr algn="ctr"/>
+            <a:r>
+              <a:rPr sz="1300" b="1">
+                <a:solidFill>
+                  <a:srgbClr val="FFFFFF"/>
+                </a:solidFill>
+                <a:latin typeface="Calibri"/>
+              </a:rPr>
+              <a:t>1</a:t>
+            </a:r>
+          </a:p>
+        </p:txBody>
+      </p:sp>
+      <p:sp>
+        <p:nvSpPr>
+          <p:cNvPr id="10" name="TextBox 9"/>
+          <p:cNvSpPr txBox="1"/>
+          <p:nvPr/>
+        </p:nvSpPr>
+        <p:spPr>
+          <a:xfrm>
+            <a:off x="1143000" y="2240280"/>
+            <a:ext cx="5943600" cy="868680"/>
+          </a:xfrm>
+          <a:prstGeom prst="rect">
+            <a:avLst/>
+          </a:prstGeom>
+          <a:noFill/>
+        </p:spPr>
+        <p:txBody>
+          <a:bodyPr wrap="square" anchor="ctr" lIns="0" rIns="0" tIns="0" bIns="0"/>
+          <a:lstStyle/>
+          <a:p>
+            <a:pPr algn="l"/>
+            <a:r>
+              <a:rPr sz="1700" b="0" i="0">
+                <a:solidFill>
+                  <a:srgbClr val="202122"/>
+                </a:solidFill>
+                <a:latin typeface="Calibri"/>
+              </a:rPr>
+              <a:t>Work through the six engineering problems from your teacher (one per toolkit area).</a:t>
+            </a:r>
+          </a:p>
+        </p:txBody>
+      </p:sp>
+      <p:sp>
+        <p:nvSpPr>
+          <p:cNvPr id="11" name="Oval 10"/>
+          <p:cNvSpPr/>
+          <p:nvPr/>
+        </p:nvSpPr>
+        <p:spPr>
+          <a:xfrm>
+            <a:off x="548640" y="3461004"/>
+            <a:ext cx="384048" cy="384048"/>
+          </a:xfrm>
+          <a:prstGeom prst="ellipse">
+            <a:avLst/>
+          </a:prstGeom>
+          <a:solidFill>
+            <a:srgbClr val="0645AD"/>
+          </a:solidFill>
+          <a:ln>
+            <a:noFill/>
+          </a:ln>
+          <a:effectLst/>
+        </p:spPr>
+        <p:style>
+          <a:lnRef idx="1">
+            <a:schemeClr val="accent1"/>
+          </a:lnRef>
+          <a:fillRef idx="3">
+            <a:schemeClr val="accent1"/>
+          </a:fillRef>
+          <a:effectRef idx="2">
+            <a:schemeClr val="accent1"/>
+          </a:effectRef>
+          <a:fontRef idx="minor">
+            <a:schemeClr val="lt1"/>
+          </a:fontRef>
+        </p:style>
+        <p:txBody>
+          <a:bodyPr rtlCol="0" anchor="ctr" lIns="0" rIns="0" tIns="0" bIns="0"/>
+          <a:lstStyle/>
+          <a:p>
+            <a:pPr algn="ctr"/>
+            <a:r>
+              <a:rPr sz="1300" b="1">
+                <a:solidFill>
+                  <a:srgbClr val="FFFFFF"/>
+                </a:solidFill>
+                <a:latin typeface="Calibri"/>
+              </a:rPr>
+              <a:t>2</a:t>
+            </a:r>
+          </a:p>
+        </p:txBody>
+      </p:sp>
+      <p:sp>
+        <p:nvSpPr>
+          <p:cNvPr id="12" name="TextBox 11"/>
+          <p:cNvSpPr txBox="1"/>
+          <p:nvPr/>
+        </p:nvSpPr>
+        <p:spPr>
+          <a:xfrm>
+            <a:off x="1143000" y="3218688"/>
+            <a:ext cx="5943600" cy="868680"/>
+          </a:xfrm>
+          <a:prstGeom prst="rect">
+            <a:avLst/>
+          </a:prstGeom>
+          <a:noFill/>
+        </p:spPr>
+        <p:txBody>
+          <a:bodyPr wrap="square" anchor="ctr" lIns="0" rIns="0" tIns="0" bIns="0"/>
+          <a:lstStyle/>
+          <a:p>
+            <a:pPr algn="l"/>
+            <a:r>
+              <a:rPr sz="1700" b="0" i="0">
+                <a:solidFill>
+                  <a:srgbClr val="202122"/>
+                </a:solidFill>
+                <a:latin typeface="Calibri"/>
+              </a:rPr>
+              <a:t>Show the formula, substitution and units every time.</a:t>
+            </a:r>
+          </a:p>
+        </p:txBody>
+      </p:sp>
+      <p:sp>
+        <p:nvSpPr>
+          <p:cNvPr id="13" name="Oval 12"/>
+          <p:cNvSpPr/>
+          <p:nvPr/>
+        </p:nvSpPr>
+        <p:spPr>
+          <a:xfrm>
+            <a:off x="548640" y="4439412"/>
+            <a:ext cx="384048" cy="384048"/>
+          </a:xfrm>
+          <a:prstGeom prst="ellipse">
+            <a:avLst/>
+          </a:prstGeom>
+          <a:solidFill>
+            <a:srgbClr val="0645AD"/>
+          </a:solidFill>
+          <a:ln>
+            <a:noFill/>
+          </a:ln>
+          <a:effectLst/>
+        </p:spPr>
+        <p:style>
+          <a:lnRef idx="1">
+            <a:schemeClr val="accent1"/>
+          </a:lnRef>
+          <a:fillRef idx="3">
+            <a:schemeClr val="accent1"/>
+          </a:fillRef>
+          <a:effectRef idx="2">
+            <a:schemeClr val="accent1"/>
+          </a:effectRef>
+          <a:fontRef idx="minor">
+            <a:schemeClr val="lt1"/>
+          </a:fontRef>
+        </p:style>
+        <p:txBody>
+          <a:bodyPr rtlCol="0" anchor="ctr" lIns="0" rIns="0" tIns="0" bIns="0"/>
+          <a:lstStyle/>
+          <a:p>
+            <a:pPr algn="ctr"/>
+            <a:r>
+              <a:rPr sz="1300" b="1">
+                <a:solidFill>
+                  <a:srgbClr val="FFFFFF"/>
+                </a:solidFill>
+                <a:latin typeface="Calibri"/>
+              </a:rPr>
+              <a:t>3</a:t>
+            </a:r>
+          </a:p>
+        </p:txBody>
+      </p:sp>
+      <p:sp>
+        <p:nvSpPr>
+          <p:cNvPr id="14" name="TextBox 13"/>
+          <p:cNvSpPr txBox="1"/>
+          <p:nvPr/>
+        </p:nvSpPr>
+        <p:spPr>
+          <a:xfrm>
+            <a:off x="1143000" y="4197096"/>
+            <a:ext cx="5943600" cy="868680"/>
+          </a:xfrm>
+          <a:prstGeom prst="rect">
+            <a:avLst/>
+          </a:prstGeom>
+          <a:noFill/>
+        </p:spPr>
+        <p:txBody>
+          <a:bodyPr wrap="square" anchor="ctr" lIns="0" rIns="0" tIns="0" bIns="0"/>
+          <a:lstStyle/>
+          <a:p>
+            <a:pPr algn="l"/>
+            <a:r>
+              <a:rPr sz="1700" b="0" i="0">
+                <a:solidFill>
+                  <a:srgbClr val="202122"/>
+                </a:solidFill>
+                <a:latin typeface="Calibri"/>
+              </a:rPr>
+              <a:t>Check each answer with a partner.</a:t>
+            </a:r>
+          </a:p>
+        </p:txBody>
+      </p:sp>
+      <p:sp>
+        <p:nvSpPr>
+          <p:cNvPr id="15" name="Oval 14"/>
+          <p:cNvSpPr/>
+          <p:nvPr/>
+        </p:nvSpPr>
+        <p:spPr>
+          <a:xfrm>
+            <a:off x="548640" y="5417820"/>
+            <a:ext cx="384048" cy="384048"/>
+          </a:xfrm>
+          <a:prstGeom prst="ellipse">
+            <a:avLst/>
+          </a:prstGeom>
+          <a:solidFill>
+            <a:srgbClr val="0645AD"/>
+          </a:solidFill>
+          <a:ln>
+            <a:noFill/>
+          </a:ln>
+          <a:effectLst/>
+        </p:spPr>
+        <p:style>
+          <a:lnRef idx="1">
+            <a:schemeClr val="accent1"/>
+          </a:lnRef>
+          <a:fillRef idx="3">
+            <a:schemeClr val="accent1"/>
+          </a:fillRef>
+          <a:effectRef idx="2">
+            <a:schemeClr val="accent1"/>
+          </a:effectRef>
+          <a:fontRef idx="minor">
+            <a:schemeClr val="lt1"/>
+          </a:fontRef>
+        </p:style>
+        <p:txBody>
+          <a:bodyPr rtlCol="0" anchor="ctr" lIns="0" rIns="0" tIns="0" bIns="0"/>
+          <a:lstStyle/>
+          <a:p>
+            <a:pPr algn="ctr"/>
+            <a:r>
+              <a:rPr sz="1300" b="1">
+                <a:solidFill>
+                  <a:srgbClr val="FFFFFF"/>
+                </a:solidFill>
+                <a:latin typeface="Calibri"/>
+              </a:rPr>
+              <a:t>4</a:t>
+            </a:r>
+          </a:p>
+        </p:txBody>
+      </p:sp>
+      <p:sp>
+        <p:nvSpPr>
+          <p:cNvPr id="16" name="TextBox 15"/>
+          <p:cNvSpPr txBox="1"/>
+          <p:nvPr/>
+        </p:nvSpPr>
+        <p:spPr>
+          <a:xfrm>
+            <a:off x="1143000" y="5175504"/>
+            <a:ext cx="5943600" cy="868680"/>
+          </a:xfrm>
+          <a:prstGeom prst="rect">
+            <a:avLst/>
+          </a:prstGeom>
+          <a:noFill/>
+        </p:spPr>
+        <p:txBody>
+          <a:bodyPr wrap="square" anchor="ctr" lIns="0" rIns="0" tIns="0" bIns="0"/>
+          <a:lstStyle/>
+          <a:p>
+            <a:pPr algn="l"/>
+            <a:r>
+              <a:rPr sz="1700" b="0" i="0">
+                <a:solidFill>
+                  <a:srgbClr val="202122"/>
+                </a:solidFill>
+                <a:latin typeface="Calibri"/>
+              </a:rPr>
+              <a:t>Convert three sensor readings from binary to decimal and hex.</a:t>
+            </a:r>
+          </a:p>
+        </p:txBody>
+      </p:sp>
+      <p:sp>
+        <p:nvSpPr>
+          <p:cNvPr id="17" name="Rounded Rectangle 16"/>
+          <p:cNvSpPr/>
+          <p:nvPr/>
+        </p:nvSpPr>
+        <p:spPr>
+          <a:xfrm>
+            <a:off x="7772400" y="1508760"/>
+            <a:ext cx="3867912" cy="4572000"/>
+          </a:xfrm>
+          <a:prstGeom prst="roundRect">
+            <a:avLst>
+              <a:gd name="adj" fmla="val 8000"/>
+            </a:avLst>
+          </a:prstGeom>
+          <a:solidFill>
+            <a:srgbClr val="EAF3FF"/>
+          </a:solidFill>
+          <a:ln>
+            <a:noFill/>
+          </a:ln>
+          <a:effectLst/>
+        </p:spPr>
+        <p:style>
+          <a:lnRef idx="1">
+            <a:schemeClr val="accent1"/>
+          </a:lnRef>
+          <a:fillRef idx="3">
+            <a:schemeClr val="accent1"/>
+          </a:fillRef>
+          <a:effectRef idx="2">
+            <a:schemeClr val="accent1"/>
+          </a:effectRef>
+          <a:fontRef idx="minor">
+            <a:schemeClr val="lt1"/>
+          </a:fontRef>
+        </p:style>
+        <p:txBody>
+          <a:bodyPr rtlCol="0" anchor="ctr"/>
+          <a:lstStyle/>
+          <a:p/>
+        </p:txBody>
+      </p:sp>
+      <p:sp>
+        <p:nvSpPr>
+          <p:cNvPr id="18" name="TextBox 17"/>
+          <p:cNvSpPr txBox="1"/>
+          <p:nvPr/>
+        </p:nvSpPr>
+        <p:spPr>
+          <a:xfrm>
+            <a:off x="8046720" y="1737360"/>
+            <a:ext cx="3291840" cy="365760"/>
+          </a:xfrm>
+          <a:prstGeom prst="rect">
+            <a:avLst/>
+          </a:prstGeom>
+          <a:noFill/>
+        </p:spPr>
+        <p:txBody>
+          <a:bodyPr wrap="square" anchor="t" lIns="0" rIns="0" tIns="0" bIns="0"/>
+          <a:lstStyle/>
+          <a:p>
+            <a:pPr algn="l"/>
+            <a:r>
+              <a:rPr sz="1300" b="1" i="0">
+                <a:solidFill>
+                  <a:srgbClr val="0645AD"/>
+                </a:solidFill>
+                <a:latin typeface="Calibri"/>
+              </a:rPr>
+              <a:t>SUCCESS CRITERIA</a:t>
+            </a:r>
+          </a:p>
+        </p:txBody>
+      </p:sp>
+      <p:sp>
+        <p:nvSpPr>
+          <p:cNvPr id="19" name="TextBox 18"/>
+          <p:cNvSpPr txBox="1"/>
+          <p:nvPr/>
+        </p:nvSpPr>
+        <p:spPr>
+          <a:xfrm>
+            <a:off x="8046720" y="2240280"/>
+            <a:ext cx="3337560" cy="3657600"/>
+          </a:xfrm>
+          <a:prstGeom prst="rect">
+            <a:avLst/>
+          </a:prstGeom>
+          <a:noFill/>
+        </p:spPr>
+        <p:txBody>
+          <a:bodyPr wrap="square" lIns="0" rIns="0" tIns="0" bIns="0">
+            <a:spAutoFit/>
+          </a:bodyPr>
+          <a:lstStyle/>
+          <a:p>
+            <a:pPr marL="274320" indent="-274320">
+              <a:spcAft>
+                <a:spcPts val="810"/>
+              </a:spcAft>
+              <a:buClr>
+                <a:srgbClr val="0645AD"/>
+              </a:buClr>
+              <a:buFont typeface="Arial"/>
+              <a:buChar char="•"/>
+            </a:pPr>
+            <a:r>
+              <a:rPr sz="1800" b="0">
+                <a:solidFill>
+                  <a:srgbClr val="202122"/>
+                </a:solidFill>
+                <a:latin typeface="Calibri"/>
+              </a:rPr>
+              <a:t>Working shown clearly</a:t>
+            </a:r>
+          </a:p>
+          <a:p>
+            <a:pPr marL="274320" indent="-274320">
+              <a:spcAft>
+                <a:spcPts val="810"/>
+              </a:spcAft>
+              <a:buClr>
+                <a:srgbClr val="0645AD"/>
+              </a:buClr>
+              <a:buFont typeface="Arial"/>
+              <a:buChar char="•"/>
+            </a:pPr>
+            <a:r>
+              <a:rPr sz="1800" b="0">
+                <a:solidFill>
+                  <a:srgbClr val="202122"/>
+                </a:solidFill>
+                <a:latin typeface="Calibri"/>
+              </a:rPr>
+              <a:t>Correct units</a:t>
+            </a:r>
+          </a:p>
+          <a:p>
+            <a:pPr marL="274320" indent="-274320">
+              <a:spcAft>
+                <a:spcPts val="810"/>
+              </a:spcAft>
+              <a:buClr>
+                <a:srgbClr val="0645AD"/>
+              </a:buClr>
+              <a:buFont typeface="Arial"/>
+              <a:buChar char="•"/>
+            </a:pPr>
+            <a:r>
+              <a:rPr sz="1800" b="0">
+                <a:solidFill>
+                  <a:srgbClr val="202122"/>
+                </a:solidFill>
+                <a:latin typeface="Calibri"/>
+              </a:rPr>
+              <a:t>Conversions correct</a:t>
+            </a:r>
+          </a:p>
+        </p:txBody>
+      </p:sp>
+    </p:spTree>
+  </p:cSld>
+  <p:clrMapOvr>
+    <a:masterClrMapping/>
+  </p:clrMapOvr>
+</p:sld>
+</file>
+
+<file path=ppt/slides/slide15.xml><?xml version="1.0" encoding="utf-8"?>
+<p:sld xmlns:a="http://schemas.openxmlformats.org/drawingml/2006/main" xmlns:p="http://schemas.openxmlformats.org/presentationml/2006/main" xmlns:r="http://schemas.openxmlformats.org/officeDocument/2006/relationships">
+  <p:cSld>
+    <p:bg>
+      <p:bgPr>
+        <a:solidFill>
+          <a:srgbClr val="03306E"/>
+        </a:solidFill>
+        <a:effectLst/>
+      </p:bgPr>
+    </p:bg>
+    <p:spTree>
+      <p:nvGrpSpPr>
+        <p:cNvPr id="1" name=""/>
+        <p:cNvGrpSpPr/>
+        <p:nvPr/>
+      </p:nvGrpSpPr>
+      <p:grpSpPr/>
+      <p:sp>
+        <p:nvSpPr>
+          <p:cNvPr id="2" name="TextBox 1"/>
+          <p:cNvSpPr txBox="1"/>
+          <p:nvPr/>
+        </p:nvSpPr>
+        <p:spPr>
+          <a:xfrm>
+            <a:off x="548640" y="320040"/>
+            <a:ext cx="11094415" cy="274320"/>
+          </a:xfrm>
+          <a:prstGeom prst="rect">
+            <a:avLst/>
+          </a:prstGeom>
+          <a:noFill/>
+        </p:spPr>
+        <p:txBody>
+          <a:bodyPr wrap="square" anchor="t" lIns="0" rIns="0" tIns="0" bIns="0"/>
+          <a:lstStyle/>
+          <a:p>
+            <a:pPr algn="l"/>
+            <a:r>
+              <a:rPr sz="1100" b="1" i="0">
+                <a:solidFill>
+                  <a:srgbClr val="A9C8F0"/>
+                </a:solidFill>
+                <a:latin typeface="Calibri"/>
+              </a:rPr>
+              <a:t>ENGINEERING CORE  ·  Core topic 4</a:t>
+            </a:r>
+          </a:p>
+        </p:txBody>
+      </p:sp>
+      <p:sp>
+        <p:nvSpPr>
+          <p:cNvPr id="3" name="TextBox 2"/>
+          <p:cNvSpPr txBox="1"/>
+          <p:nvPr/>
+        </p:nvSpPr>
+        <p:spPr>
+          <a:xfrm>
+            <a:off x="548640" y="566928"/>
+            <a:ext cx="11094415" cy="822960"/>
+          </a:xfrm>
+          <a:prstGeom prst="rect">
+            <a:avLst/>
+          </a:prstGeom>
+          <a:noFill/>
+        </p:spPr>
+        <p:txBody>
+          <a:bodyPr wrap="square" anchor="ctr" lIns="0" rIns="0" tIns="0" bIns="0"/>
+          <a:lstStyle/>
+          <a:p>
+            <a:pPr algn="l"/>
+            <a:r>
+              <a:rPr sz="3200" b="1" i="0">
+                <a:solidFill>
+                  <a:srgbClr val="FFFFFF"/>
+                </a:solidFill>
+                <a:latin typeface="Cambria"/>
+              </a:rPr>
+              <a:t>Exit ticket</a:t>
+            </a:r>
+          </a:p>
+        </p:txBody>
+      </p:sp>
+      <p:sp>
+        <p:nvSpPr>
+          <p:cNvPr id="4" name="Oval 3"/>
+          <p:cNvSpPr/>
+          <p:nvPr/>
+        </p:nvSpPr>
+        <p:spPr>
+          <a:xfrm>
+            <a:off x="548640" y="1737360"/>
+            <a:ext cx="502920" cy="502920"/>
+          </a:xfrm>
+          <a:prstGeom prst="ellipse">
+            <a:avLst/>
+          </a:prstGeom>
+          <a:solidFill>
+            <a:srgbClr val="F2B705"/>
+          </a:solidFill>
+          <a:ln>
+            <a:noFill/>
+          </a:ln>
+          <a:effectLst/>
+        </p:spPr>
+        <p:style>
+          <a:lnRef idx="1">
+            <a:schemeClr val="accent1"/>
+          </a:lnRef>
+          <a:fillRef idx="3">
+            <a:schemeClr val="accent1"/>
+          </a:fillRef>
+          <a:effectRef idx="2">
+            <a:schemeClr val="accent1"/>
+          </a:effectRef>
+          <a:fontRef idx="minor">
+            <a:schemeClr val="lt1"/>
+          </a:fontRef>
+        </p:style>
+        <p:txBody>
+          <a:bodyPr rtlCol="0" anchor="ctr" lIns="0" rIns="0" tIns="0" bIns="0"/>
+          <a:lstStyle/>
+          <a:p>
+            <a:pPr algn="ctr"/>
+            <a:r>
+              <a:rPr sz="1700" b="1">
+                <a:solidFill>
+                  <a:srgbClr val="202122"/>
+                </a:solidFill>
+                <a:latin typeface="Calibri"/>
+              </a:rPr>
+              <a:t>1</a:t>
+            </a:r>
+          </a:p>
+        </p:txBody>
+      </p:sp>
+      <p:sp>
+        <p:nvSpPr>
+          <p:cNvPr id="5" name="TextBox 4"/>
+          <p:cNvSpPr txBox="1"/>
+          <p:nvPr/>
+        </p:nvSpPr>
+        <p:spPr>
+          <a:xfrm>
+            <a:off x="1325880" y="1645920"/>
+            <a:ext cx="6583680" cy="822960"/>
+          </a:xfrm>
+          <a:prstGeom prst="rect">
+            <a:avLst/>
+          </a:prstGeom>
+          <a:noFill/>
+        </p:spPr>
+        <p:txBody>
+          <a:bodyPr wrap="square" anchor="ctr" lIns="0" rIns="0" tIns="0" bIns="0"/>
+          <a:lstStyle/>
+          <a:p>
+            <a:pPr algn="l"/>
+            <a:r>
+              <a:rPr sz="2000" b="0" i="0">
+                <a:solidFill>
+                  <a:srgbClr val="FFFFFF"/>
+                </a:solidFill>
+                <a:latin typeface="Calibri"/>
+              </a:rPr>
+              <a:t>Which area of maths do you find hardest?</a:t>
+            </a:r>
+          </a:p>
+        </p:txBody>
+      </p:sp>
+      <p:sp>
+        <p:nvSpPr>
+          <p:cNvPr id="6" name="Oval 5"/>
+          <p:cNvSpPr/>
+          <p:nvPr/>
+        </p:nvSpPr>
+        <p:spPr>
+          <a:xfrm>
+            <a:off x="548640" y="2697480"/>
+            <a:ext cx="502920" cy="502920"/>
+          </a:xfrm>
+          <a:prstGeom prst="ellipse">
+            <a:avLst/>
+          </a:prstGeom>
+          <a:solidFill>
+            <a:srgbClr val="F2B705"/>
+          </a:solidFill>
+          <a:ln>
+            <a:noFill/>
+          </a:ln>
+          <a:effectLst/>
+        </p:spPr>
+        <p:style>
+          <a:lnRef idx="1">
+            <a:schemeClr val="accent1"/>
+          </a:lnRef>
+          <a:fillRef idx="3">
+            <a:schemeClr val="accent1"/>
+          </a:fillRef>
+          <a:effectRef idx="2">
+            <a:schemeClr val="accent1"/>
+          </a:effectRef>
+          <a:fontRef idx="minor">
+            <a:schemeClr val="lt1"/>
+          </a:fontRef>
+        </p:style>
+        <p:txBody>
+          <a:bodyPr rtlCol="0" anchor="ctr" lIns="0" rIns="0" tIns="0" bIns="0"/>
+          <a:lstStyle/>
+          <a:p>
+            <a:pPr algn="ctr"/>
+            <a:r>
+              <a:rPr sz="1700" b="1">
+                <a:solidFill>
+                  <a:srgbClr val="202122"/>
+                </a:solidFill>
+                <a:latin typeface="Calibri"/>
+              </a:rPr>
+              <a:t>2</a:t>
+            </a:r>
+          </a:p>
+        </p:txBody>
+      </p:sp>
+      <p:sp>
+        <p:nvSpPr>
+          <p:cNvPr id="7" name="TextBox 6"/>
+          <p:cNvSpPr txBox="1"/>
+          <p:nvPr/>
+        </p:nvSpPr>
+        <p:spPr>
+          <a:xfrm>
+            <a:off x="1325880" y="2606040"/>
+            <a:ext cx="6583680" cy="822960"/>
+          </a:xfrm>
+          <a:prstGeom prst="rect">
+            <a:avLst/>
+          </a:prstGeom>
+          <a:noFill/>
+        </p:spPr>
+        <p:txBody>
+          <a:bodyPr wrap="square" anchor="ctr" lIns="0" rIns="0" tIns="0" bIns="0"/>
+          <a:lstStyle/>
+          <a:p>
+            <a:pPr algn="l"/>
+            <a:r>
+              <a:rPr sz="2000" b="0" i="0">
+                <a:solidFill>
+                  <a:srgbClr val="FFFFFF"/>
+                </a:solidFill>
+                <a:latin typeface="Calibri"/>
+              </a:rPr>
+              <a:t>Why do engineers use standard form?</a:t>
+            </a:r>
+          </a:p>
+        </p:txBody>
+      </p:sp>
+      <p:sp>
+        <p:nvSpPr>
+          <p:cNvPr id="8" name="Oval 7"/>
+          <p:cNvSpPr/>
+          <p:nvPr/>
+        </p:nvSpPr>
+        <p:spPr>
+          <a:xfrm>
+            <a:off x="548640" y="3657600"/>
+            <a:ext cx="502920" cy="502920"/>
+          </a:xfrm>
+          <a:prstGeom prst="ellipse">
+            <a:avLst/>
+          </a:prstGeom>
+          <a:solidFill>
+            <a:srgbClr val="F2B705"/>
+          </a:solidFill>
+          <a:ln>
+            <a:noFill/>
+          </a:ln>
+          <a:effectLst/>
+        </p:spPr>
+        <p:style>
+          <a:lnRef idx="1">
+            <a:schemeClr val="accent1"/>
+          </a:lnRef>
+          <a:fillRef idx="3">
+            <a:schemeClr val="accent1"/>
+          </a:fillRef>
+          <a:effectRef idx="2">
+            <a:schemeClr val="accent1"/>
+          </a:effectRef>
+          <a:fontRef idx="minor">
+            <a:schemeClr val="lt1"/>
+          </a:fontRef>
+        </p:style>
+        <p:txBody>
+          <a:bodyPr rtlCol="0" anchor="ctr" lIns="0" rIns="0" tIns="0" bIns="0"/>
+          <a:lstStyle/>
+          <a:p>
+            <a:pPr algn="ctr"/>
+            <a:r>
+              <a:rPr sz="1700" b="1">
+                <a:solidFill>
+                  <a:srgbClr val="202122"/>
+                </a:solidFill>
+                <a:latin typeface="Calibri"/>
+              </a:rPr>
+              <a:t>3</a:t>
+            </a:r>
+          </a:p>
+        </p:txBody>
+      </p:sp>
+      <p:sp>
+        <p:nvSpPr>
+          <p:cNvPr id="9" name="TextBox 8"/>
+          <p:cNvSpPr txBox="1"/>
+          <p:nvPr/>
+        </p:nvSpPr>
+        <p:spPr>
+          <a:xfrm>
+            <a:off x="1325880" y="3566160"/>
+            <a:ext cx="6583680" cy="822960"/>
+          </a:xfrm>
+          <a:prstGeom prst="rect">
+            <a:avLst/>
+          </a:prstGeom>
+          <a:noFill/>
+        </p:spPr>
+        <p:txBody>
+          <a:bodyPr wrap="square" anchor="ctr" lIns="0" rIns="0" tIns="0" bIns="0"/>
+          <a:lstStyle/>
+          <a:p>
+            <a:pPr algn="l"/>
+            <a:r>
+              <a:rPr sz="2000" b="0" i="0">
+                <a:solidFill>
+                  <a:srgbClr val="FFFFFF"/>
+                </a:solidFill>
+                <a:latin typeface="Calibri"/>
+              </a:rPr>
+              <a:t>Where might you meet hexadecimal in engineering?</a:t>
+            </a:r>
+          </a:p>
+        </p:txBody>
+      </p:sp>
+      <p:sp>
+        <p:nvSpPr>
+          <p:cNvPr id="10" name="Rounded Rectangle 9"/>
+          <p:cNvSpPr/>
+          <p:nvPr/>
+        </p:nvSpPr>
+        <p:spPr>
+          <a:xfrm>
+            <a:off x="8229600" y="1645920"/>
+            <a:ext cx="3410712" cy="2926080"/>
+          </a:xfrm>
+          <a:prstGeom prst="roundRect">
+            <a:avLst>
+              <a:gd name="adj" fmla="val 8000"/>
+            </a:avLst>
+          </a:prstGeom>
+          <a:solidFill>
+            <a:srgbClr val="0645AD"/>
+          </a:solidFill>
+          <a:ln>
+            <a:noFill/>
+          </a:ln>
+          <a:effectLst/>
+        </p:spPr>
+        <p:style>
+          <a:lnRef idx="1">
+            <a:schemeClr val="accent1"/>
+          </a:lnRef>
+          <a:fillRef idx="3">
+            <a:schemeClr val="accent1"/>
+          </a:fillRef>
+          <a:effectRef idx="2">
+            <a:schemeClr val="accent1"/>
+          </a:effectRef>
+          <a:fontRef idx="minor">
+            <a:schemeClr val="lt1"/>
+          </a:fontRef>
+        </p:style>
+        <p:txBody>
+          <a:bodyPr rtlCol="0" anchor="ctr"/>
+          <a:lstStyle/>
+          <a:p/>
+        </p:txBody>
+      </p:sp>
+      <p:sp>
+        <p:nvSpPr>
+          <p:cNvPr id="11" name="TextBox 10"/>
+          <p:cNvSpPr txBox="1"/>
+          <p:nvPr/>
+        </p:nvSpPr>
+        <p:spPr>
+          <a:xfrm>
+            <a:off x="8503920" y="1874519"/>
+            <a:ext cx="2926080" cy="365760"/>
+          </a:xfrm>
+          <a:prstGeom prst="rect">
+            <a:avLst/>
+          </a:prstGeom>
+          <a:noFill/>
+        </p:spPr>
+        <p:txBody>
+          <a:bodyPr wrap="square" anchor="t" lIns="0" rIns="0" tIns="0" bIns="0"/>
+          <a:lstStyle/>
+          <a:p>
+            <a:pPr algn="l"/>
+            <a:r>
+              <a:rPr sz="1300" b="1" i="0">
+                <a:solidFill>
+                  <a:srgbClr val="A9C8F0"/>
+                </a:solidFill>
+                <a:latin typeface="Calibri"/>
+              </a:rPr>
+              <a:t>REVISE THIS TOPIC</a:t>
+            </a:r>
+          </a:p>
+        </p:txBody>
+      </p:sp>
+      <p:sp>
+        <p:nvSpPr>
+          <p:cNvPr id="12" name="TextBox 11"/>
+          <p:cNvSpPr txBox="1"/>
+          <p:nvPr/>
+        </p:nvSpPr>
+        <p:spPr>
+          <a:xfrm>
+            <a:off x="8503920" y="2286000"/>
+            <a:ext cx="2926080" cy="548640"/>
+          </a:xfrm>
+          <a:prstGeom prst="rect">
+            <a:avLst/>
+          </a:prstGeom>
+          <a:noFill/>
+        </p:spPr>
+        <p:txBody>
+          <a:bodyPr wrap="square" anchor="t" lIns="0" rIns="0" tIns="0" bIns="0"/>
+          <a:lstStyle/>
+          <a:p>
+            <a:pPr algn="l"/>
+            <a:r>
+              <a:rPr sz="1400" b="0" i="0">
+                <a:solidFill>
+                  <a:srgbClr val="FFFFFF"/>
+                </a:solidFill>
+                <a:latin typeface="Calibri"/>
+              </a:rPr>
+              <a:t>Revision notes for this lesson are on the study wiki:</a:t>
+            </a:r>
+          </a:p>
+        </p:txBody>
+      </p:sp>
+      <p:sp>
+        <p:nvSpPr>
+          <p:cNvPr id="13" name="TextBox 12"/>
+          <p:cNvSpPr txBox="1"/>
+          <p:nvPr/>
+        </p:nvSpPr>
+        <p:spPr>
+          <a:xfrm>
+            <a:off x="8503920" y="2926080"/>
+            <a:ext cx="2926080" cy="1463040"/>
+          </a:xfrm>
+          <a:prstGeom prst="rect">
+            <a:avLst/>
+          </a:prstGeom>
+          <a:noFill/>
+        </p:spPr>
+        <p:txBody>
+          <a:bodyPr wrap="square" anchor="t" lIns="0" rIns="0" tIns="0" bIns="0"/>
+          <a:lstStyle/>
+          <a:p>
+            <a:pPr algn="l"/>
+            <a:r>
+              <a:rPr sz="2000" b="1" i="0">
+                <a:solidFill>
+                  <a:srgbClr val="FFFFFF"/>
+                </a:solidFill>
+                <a:latin typeface="Cambria"/>
+              </a:rPr>
+              <a:t>Engineering Core, Part 1</a:t>
+            </a:r>
+          </a:p>
+        </p:txBody>
+      </p:sp>
+      <p:sp>
+        <p:nvSpPr>
+          <p:cNvPr id="14" name="TextBox 13"/>
+          <p:cNvSpPr txBox="1"/>
+          <p:nvPr/>
+        </p:nvSpPr>
+        <p:spPr>
+          <a:xfrm>
+            <a:off x="548640" y="5669280"/>
+            <a:ext cx="11094415" cy="548640"/>
+          </a:xfrm>
+          <a:prstGeom prst="rect">
+            <a:avLst/>
+          </a:prstGeom>
+          <a:noFill/>
+        </p:spPr>
+        <p:txBody>
+          <a:bodyPr wrap="square" anchor="t" lIns="0" rIns="0" tIns="0" bIns="0"/>
+          <a:lstStyle/>
+          <a:p>
+            <a:pPr algn="l"/>
+            <a:r>
+              <a:rPr sz="1200" b="0" i="0">
+                <a:solidFill>
+                  <a:srgbClr val="A9C8F0"/>
+                </a:solidFill>
+                <a:latin typeface="Calibri"/>
+              </a:rPr>
+              <a:t>https://lana6478.github.io/T-level-Design-Development-Engineering-Manufacturing/#/01-core-component/01-engineering-core-part1.md</a:t>
+            </a:r>
+          </a:p>
+        </p:txBody>
+      </p:sp>
+    </p:spTree>
+  </p:cSld>
+  <p:clrMapOvr>
+    <a:masterClrMapping/>
+  </p:clrMapOvr>
+</p:sld>
+</file>
+
+<file path=ppt/slides/slide2.xml><?xml version="1.0" encoding="utf-8"?>
+<p:sld xmlns:a="http://schemas.openxmlformats.org/drawingml/2006/main" xmlns:p="http://schemas.openxmlformats.org/presentationml/2006/main" xmlns:r="http://schemas.openxmlformats.org/officeDocument/2006/relationships">
+  <p:cSld>
+    <p:bg>
+      <p:bgPr>
+        <a:solidFill>
+          <a:srgbClr val="FFFFFF"/>
+        </a:solidFill>
+        <a:effectLst/>
+      </p:bgPr>
+    </p:bg>
+    <p:spTree>
+      <p:nvGrpSpPr>
+        <p:cNvPr id="1" name=""/>
+        <p:cNvGrpSpPr/>
+        <p:nvPr/>
+      </p:nvGrpSpPr>
+      <p:grpSpPr/>
+      <p:sp>
+        <p:nvSpPr>
+          <p:cNvPr id="2" name="TextBox 1"/>
+          <p:cNvSpPr txBox="1"/>
+          <p:nvPr/>
+        </p:nvSpPr>
+        <p:spPr>
+          <a:xfrm>
+            <a:off x="548640" y="320040"/>
+            <a:ext cx="11094415" cy="274320"/>
+          </a:xfrm>
+          <a:prstGeom prst="rect">
+            <a:avLst/>
+          </a:prstGeom>
+          <a:noFill/>
+        </p:spPr>
+        <p:txBody>
+          <a:bodyPr wrap="square" anchor="t" lIns="0" rIns="0" tIns="0" bIns="0"/>
+          <a:lstStyle/>
+          <a:p>
+            <a:pPr algn="l"/>
+            <a:r>
+              <a:rPr sz="1100" b="1" i="0">
+                <a:solidFill>
+                  <a:srgbClr val="54595D"/>
+                </a:solidFill>
+                <a:latin typeface="Calibri"/>
+              </a:rPr>
+              <a:t>ENGINEERING CORE  ·  Core topic 4</a:t>
+            </a:r>
+          </a:p>
+        </p:txBody>
+      </p:sp>
+      <p:sp>
+        <p:nvSpPr>
+          <p:cNvPr id="3" name="TextBox 2"/>
+          <p:cNvSpPr txBox="1"/>
+          <p:nvPr/>
+        </p:nvSpPr>
+        <p:spPr>
+          <a:xfrm>
+            <a:off x="548640" y="566928"/>
+            <a:ext cx="11094415" cy="822960"/>
+          </a:xfrm>
+          <a:prstGeom prst="rect">
+            <a:avLst/>
+          </a:prstGeom>
+          <a:noFill/>
+        </p:spPr>
+        <p:txBody>
+          <a:bodyPr wrap="square" anchor="ctr" lIns="0" rIns="0" tIns="0" bIns="0"/>
+          <a:lstStyle/>
+          <a:p>
+            <a:pPr algn="l"/>
+            <a:r>
+              <a:rPr sz="3200" b="1" i="0">
+                <a:solidFill>
+                  <a:srgbClr val="03306E"/>
+                </a:solidFill>
+                <a:latin typeface="Cambria"/>
+              </a:rPr>
+              <a:t>Learning objectives</a:t>
+            </a:r>
+          </a:p>
+        </p:txBody>
+      </p:sp>
+      <p:sp>
+        <p:nvSpPr>
+          <p:cNvPr id="4" name="TextBox 3"/>
+          <p:cNvSpPr txBox="1"/>
+          <p:nvPr/>
+        </p:nvSpPr>
+        <p:spPr>
+          <a:xfrm>
+            <a:off x="548640" y="6446520"/>
+            <a:ext cx="8229600" cy="274320"/>
+          </a:xfrm>
+          <a:prstGeom prst="rect">
+            <a:avLst/>
+          </a:prstGeom>
+          <a:noFill/>
+        </p:spPr>
+        <p:txBody>
+          <a:bodyPr wrap="square" anchor="t" lIns="0" rIns="0" tIns="0" bIns="0"/>
+          <a:lstStyle/>
+          <a:p>
+            <a:pPr algn="l"/>
+            <a:r>
+              <a:rPr sz="1000" b="0" i="0">
+                <a:solidFill>
+                  <a:srgbClr val="54595D"/>
+                </a:solidFill>
+                <a:latin typeface="Calibri"/>
+              </a:rPr>
+              <a:t>Design and Development for Engineering and Manufacturing T Level  ·  Essential Mathematics for Engineering</a:t>
+            </a:r>
+          </a:p>
+        </p:txBody>
+      </p:sp>
+      <p:sp>
+        <p:nvSpPr>
+          <p:cNvPr id="5" name="TextBox 4"/>
+          <p:cNvSpPr txBox="1"/>
+          <p:nvPr/>
+        </p:nvSpPr>
+        <p:spPr>
+          <a:xfrm>
+            <a:off x="10728655" y="6446520"/>
+            <a:ext cx="914400" cy="274320"/>
+          </a:xfrm>
+          <a:prstGeom prst="rect">
+            <a:avLst/>
+          </a:prstGeom>
+          <a:noFill/>
+        </p:spPr>
+        <p:txBody>
+          <a:bodyPr wrap="square" anchor="t" lIns="0" rIns="0" tIns="0" bIns="0"/>
+          <a:lstStyle/>
+          <a:p>
+            <a:pPr algn="r"/>
+            <a:r>
+              <a:rPr sz="1000" b="0" i="0">
+                <a:solidFill>
+                  <a:srgbClr val="54595D"/>
+                </a:solidFill>
+                <a:latin typeface="Calibri"/>
+              </a:rPr>
+              <a:t>2</a:t>
+            </a:r>
+          </a:p>
+        </p:txBody>
+      </p:sp>
+      <p:sp>
+        <p:nvSpPr>
+          <p:cNvPr id="6" name="TextBox 5"/>
+          <p:cNvSpPr txBox="1"/>
+          <p:nvPr/>
+        </p:nvSpPr>
+        <p:spPr>
+          <a:xfrm>
+            <a:off x="548640" y="1508760"/>
+            <a:ext cx="6766560" cy="365760"/>
+          </a:xfrm>
+          <a:prstGeom prst="rect">
+            <a:avLst/>
+          </a:prstGeom>
+          <a:noFill/>
+        </p:spPr>
+        <p:txBody>
+          <a:bodyPr wrap="square" anchor="t" lIns="0" rIns="0" tIns="0" bIns="0"/>
+          <a:lstStyle/>
+          <a:p>
+            <a:pPr algn="l"/>
+            <a:r>
+              <a:rPr sz="1600" b="0" i="1">
+                <a:solidFill>
+                  <a:srgbClr val="54595D"/>
+                </a:solidFill>
+                <a:latin typeface="Calibri"/>
+              </a:rPr>
+              <a:t>By the end of this lesson you should be able to:</a:t>
+            </a:r>
+          </a:p>
+        </p:txBody>
+      </p:sp>
+      <p:sp>
+        <p:nvSpPr>
+          <p:cNvPr id="7" name="Oval 6"/>
+          <p:cNvSpPr/>
+          <p:nvPr/>
+        </p:nvSpPr>
+        <p:spPr>
+          <a:xfrm>
+            <a:off x="548640" y="2234565"/>
+            <a:ext cx="457200" cy="457200"/>
+          </a:xfrm>
+          <a:prstGeom prst="ellipse">
+            <a:avLst/>
+          </a:prstGeom>
+          <a:solidFill>
+            <a:srgbClr val="F2B705"/>
+          </a:solidFill>
+          <a:ln>
+            <a:noFill/>
+          </a:ln>
+          <a:effectLst/>
+        </p:spPr>
+        <p:style>
+          <a:lnRef idx="1">
+            <a:schemeClr val="accent1"/>
+          </a:lnRef>
+          <a:fillRef idx="3">
+            <a:schemeClr val="accent1"/>
+          </a:fillRef>
+          <a:effectRef idx="2">
+            <a:schemeClr val="accent1"/>
+          </a:effectRef>
+          <a:fontRef idx="minor">
+            <a:schemeClr val="lt1"/>
+          </a:fontRef>
+        </p:style>
+        <p:txBody>
+          <a:bodyPr rtlCol="0" anchor="ctr" lIns="0" rIns="0" tIns="0" bIns="0"/>
+          <a:lstStyle/>
+          <a:p>
+            <a:pPr algn="ctr"/>
+            <a:r>
+              <a:rPr sz="1600" b="1">
+                <a:solidFill>
+                  <a:srgbClr val="202122"/>
+                </a:solidFill>
+                <a:latin typeface="Calibri"/>
+              </a:rPr>
+              <a:t>1</a:t>
+            </a:r>
+          </a:p>
+        </p:txBody>
+      </p:sp>
+      <p:sp>
+        <p:nvSpPr>
+          <p:cNvPr id="8" name="TextBox 7"/>
+          <p:cNvSpPr txBox="1"/>
+          <p:nvPr/>
+        </p:nvSpPr>
+        <p:spPr>
+          <a:xfrm>
+            <a:off x="1234440" y="2011680"/>
+            <a:ext cx="6035040" cy="902969"/>
+          </a:xfrm>
+          <a:prstGeom prst="rect">
+            <a:avLst/>
+          </a:prstGeom>
+          <a:noFill/>
+        </p:spPr>
+        <p:txBody>
+          <a:bodyPr wrap="square" anchor="ctr" lIns="0" rIns="0" tIns="0" bIns="0"/>
+          <a:lstStyle/>
+          <a:p>
+            <a:pPr algn="l"/>
+            <a:r>
+              <a:rPr sz="2000" b="0" i="0">
+                <a:solidFill>
+                  <a:srgbClr val="202122"/>
+                </a:solidFill>
+                <a:latin typeface="Calibri"/>
+              </a:rPr>
+              <a:t>Apply arithmetic, algebra and geometry to engineering problems.</a:t>
+            </a:r>
+          </a:p>
+        </p:txBody>
+      </p:sp>
+      <p:sp>
+        <p:nvSpPr>
+          <p:cNvPr id="9" name="Oval 8"/>
+          <p:cNvSpPr/>
+          <p:nvPr/>
+        </p:nvSpPr>
+        <p:spPr>
+          <a:xfrm>
+            <a:off x="548640" y="3274695"/>
+            <a:ext cx="457200" cy="457200"/>
+          </a:xfrm>
+          <a:prstGeom prst="ellipse">
+            <a:avLst/>
+          </a:prstGeom>
+          <a:solidFill>
+            <a:srgbClr val="F2B705"/>
+          </a:solidFill>
+          <a:ln>
+            <a:noFill/>
+          </a:ln>
+          <a:effectLst/>
+        </p:spPr>
+        <p:style>
+          <a:lnRef idx="1">
+            <a:schemeClr val="accent1"/>
+          </a:lnRef>
+          <a:fillRef idx="3">
+            <a:schemeClr val="accent1"/>
+          </a:fillRef>
+          <a:effectRef idx="2">
+            <a:schemeClr val="accent1"/>
+          </a:effectRef>
+          <a:fontRef idx="minor">
+            <a:schemeClr val="lt1"/>
+          </a:fontRef>
+        </p:style>
+        <p:txBody>
+          <a:bodyPr rtlCol="0" anchor="ctr" lIns="0" rIns="0" tIns="0" bIns="0"/>
+          <a:lstStyle/>
+          <a:p>
+            <a:pPr algn="ctr"/>
+            <a:r>
+              <a:rPr sz="1600" b="1">
+                <a:solidFill>
+                  <a:srgbClr val="202122"/>
+                </a:solidFill>
+                <a:latin typeface="Calibri"/>
+              </a:rPr>
+              <a:t>2</a:t>
+            </a:r>
+          </a:p>
+        </p:txBody>
+      </p:sp>
+      <p:sp>
+        <p:nvSpPr>
+          <p:cNvPr id="10" name="TextBox 9"/>
+          <p:cNvSpPr txBox="1"/>
+          <p:nvPr/>
+        </p:nvSpPr>
+        <p:spPr>
+          <a:xfrm>
+            <a:off x="1234440" y="3051810"/>
+            <a:ext cx="6035040" cy="902969"/>
+          </a:xfrm>
+          <a:prstGeom prst="rect">
+            <a:avLst/>
+          </a:prstGeom>
+          <a:noFill/>
+        </p:spPr>
+        <p:txBody>
+          <a:bodyPr wrap="square" anchor="ctr" lIns="0" rIns="0" tIns="0" bIns="0"/>
+          <a:lstStyle/>
+          <a:p>
+            <a:pPr algn="l"/>
+            <a:r>
+              <a:rPr sz="2000" b="0" i="0">
+                <a:solidFill>
+                  <a:srgbClr val="202122"/>
+                </a:solidFill>
+                <a:latin typeface="Calibri"/>
+              </a:rPr>
+              <a:t>Use trigonometry, graphs and basic calculus.</a:t>
+            </a:r>
+          </a:p>
+        </p:txBody>
+      </p:sp>
+      <p:sp>
+        <p:nvSpPr>
+          <p:cNvPr id="11" name="Oval 10"/>
+          <p:cNvSpPr/>
+          <p:nvPr/>
+        </p:nvSpPr>
+        <p:spPr>
+          <a:xfrm>
+            <a:off x="548640" y="4314825"/>
+            <a:ext cx="457200" cy="457200"/>
+          </a:xfrm>
+          <a:prstGeom prst="ellipse">
+            <a:avLst/>
+          </a:prstGeom>
+          <a:solidFill>
+            <a:srgbClr val="F2B705"/>
+          </a:solidFill>
+          <a:ln>
+            <a:noFill/>
+          </a:ln>
+          <a:effectLst/>
+        </p:spPr>
+        <p:style>
+          <a:lnRef idx="1">
+            <a:schemeClr val="accent1"/>
+          </a:lnRef>
+          <a:fillRef idx="3">
+            <a:schemeClr val="accent1"/>
+          </a:fillRef>
+          <a:effectRef idx="2">
+            <a:schemeClr val="accent1"/>
+          </a:effectRef>
+          <a:fontRef idx="minor">
+            <a:schemeClr val="lt1"/>
+          </a:fontRef>
+        </p:style>
+        <p:txBody>
+          <a:bodyPr rtlCol="0" anchor="ctr" lIns="0" rIns="0" tIns="0" bIns="0"/>
+          <a:lstStyle/>
+          <a:p>
+            <a:pPr algn="ctr"/>
+            <a:r>
+              <a:rPr sz="1600" b="1">
+                <a:solidFill>
+                  <a:srgbClr val="202122"/>
+                </a:solidFill>
+                <a:latin typeface="Calibri"/>
+              </a:rPr>
+              <a:t>3</a:t>
+            </a:r>
+          </a:p>
+        </p:txBody>
+      </p:sp>
+      <p:sp>
+        <p:nvSpPr>
+          <p:cNvPr id="12" name="TextBox 11"/>
+          <p:cNvSpPr txBox="1"/>
+          <p:nvPr/>
+        </p:nvSpPr>
+        <p:spPr>
+          <a:xfrm>
+            <a:off x="1234440" y="4091939"/>
+            <a:ext cx="6035040" cy="902969"/>
+          </a:xfrm>
+          <a:prstGeom prst="rect">
+            <a:avLst/>
+          </a:prstGeom>
+          <a:noFill/>
+        </p:spPr>
+        <p:txBody>
+          <a:bodyPr wrap="square" anchor="ctr" lIns="0" rIns="0" tIns="0" bIns="0"/>
+          <a:lstStyle/>
+          <a:p>
+            <a:pPr algn="l"/>
+            <a:r>
+              <a:rPr sz="2000" b="0" i="0">
+                <a:solidFill>
+                  <a:srgbClr val="202122"/>
+                </a:solidFill>
+                <a:latin typeface="Calibri"/>
+              </a:rPr>
+              <a:t>Calculate statistical measures.</a:t>
+            </a:r>
+          </a:p>
+        </p:txBody>
+      </p:sp>
+      <p:sp>
+        <p:nvSpPr>
+          <p:cNvPr id="13" name="Oval 12"/>
+          <p:cNvSpPr/>
+          <p:nvPr/>
+        </p:nvSpPr>
+        <p:spPr>
+          <a:xfrm>
+            <a:off x="548640" y="5354954"/>
+            <a:ext cx="457200" cy="457200"/>
+          </a:xfrm>
+          <a:prstGeom prst="ellipse">
+            <a:avLst/>
+          </a:prstGeom>
+          <a:solidFill>
+            <a:srgbClr val="F2B705"/>
+          </a:solidFill>
+          <a:ln>
+            <a:noFill/>
+          </a:ln>
+          <a:effectLst/>
+        </p:spPr>
+        <p:style>
+          <a:lnRef idx="1">
+            <a:schemeClr val="accent1"/>
+          </a:lnRef>
+          <a:fillRef idx="3">
+            <a:schemeClr val="accent1"/>
+          </a:fillRef>
+          <a:effectRef idx="2">
+            <a:schemeClr val="accent1"/>
+          </a:effectRef>
+          <a:fontRef idx="minor">
+            <a:schemeClr val="lt1"/>
+          </a:fontRef>
+        </p:style>
+        <p:txBody>
+          <a:bodyPr rtlCol="0" anchor="ctr" lIns="0" rIns="0" tIns="0" bIns="0"/>
+          <a:lstStyle/>
+          <a:p>
+            <a:pPr algn="ctr"/>
+            <a:r>
+              <a:rPr sz="1600" b="1">
+                <a:solidFill>
+                  <a:srgbClr val="202122"/>
+                </a:solidFill>
+                <a:latin typeface="Calibri"/>
+              </a:rPr>
+              <a:t>4</a:t>
+            </a:r>
+          </a:p>
+        </p:txBody>
+      </p:sp>
+      <p:sp>
+        <p:nvSpPr>
+          <p:cNvPr id="14" name="TextBox 13"/>
+          <p:cNvSpPr txBox="1"/>
+          <p:nvPr/>
+        </p:nvSpPr>
+        <p:spPr>
+          <a:xfrm>
+            <a:off x="1234440" y="5132069"/>
+            <a:ext cx="6035040" cy="902969"/>
+          </a:xfrm>
+          <a:prstGeom prst="rect">
+            <a:avLst/>
+          </a:prstGeom>
+          <a:noFill/>
+        </p:spPr>
+        <p:txBody>
+          <a:bodyPr wrap="square" anchor="ctr" lIns="0" rIns="0" tIns="0" bIns="0"/>
+          <a:lstStyle/>
+          <a:p>
+            <a:pPr algn="l"/>
+            <a:r>
+              <a:rPr sz="2000" b="0" i="0">
+                <a:solidFill>
+                  <a:srgbClr val="202122"/>
+                </a:solidFill>
+                <a:latin typeface="Calibri"/>
+              </a:rPr>
+              <a:t>Convert between decimal, binary and hexadecimal.</a:t>
+            </a:r>
+          </a:p>
+        </p:txBody>
+      </p:sp>
+      <p:sp>
+        <p:nvSpPr>
+          <p:cNvPr id="15" name="Rounded Rectangle 14"/>
+          <p:cNvSpPr/>
+          <p:nvPr/>
+        </p:nvSpPr>
+        <p:spPr>
+          <a:xfrm>
+            <a:off x="7772400" y="1508760"/>
+            <a:ext cx="3867912" cy="4526280"/>
+          </a:xfrm>
+          <a:prstGeom prst="roundRect">
+            <a:avLst>
+              <a:gd name="adj" fmla="val 8000"/>
+            </a:avLst>
+          </a:prstGeom>
+          <a:solidFill>
+            <a:srgbClr val="EAF3FF"/>
+          </a:solidFill>
+          <a:ln>
+            <a:noFill/>
+          </a:ln>
+          <a:effectLst/>
+        </p:spPr>
+        <p:style>
+          <a:lnRef idx="1">
+            <a:schemeClr val="accent1"/>
+          </a:lnRef>
+          <a:fillRef idx="3">
+            <a:schemeClr val="accent1"/>
+          </a:fillRef>
+          <a:effectRef idx="2">
+            <a:schemeClr val="accent1"/>
+          </a:effectRef>
+          <a:fontRef idx="minor">
+            <a:schemeClr val="lt1"/>
+          </a:fontRef>
+        </p:style>
+        <p:txBody>
+          <a:bodyPr rtlCol="0" anchor="ctr"/>
+          <a:lstStyle/>
+          <a:p/>
+        </p:txBody>
+      </p:sp>
+      <p:sp>
+        <p:nvSpPr>
+          <p:cNvPr id="16" name="TextBox 15"/>
+          <p:cNvSpPr txBox="1"/>
+          <p:nvPr/>
+        </p:nvSpPr>
+        <p:spPr>
+          <a:xfrm>
+            <a:off x="8046720" y="1737360"/>
+            <a:ext cx="3291840" cy="365760"/>
+          </a:xfrm>
+          <a:prstGeom prst="rect">
+            <a:avLst/>
+          </a:prstGeom>
+          <a:noFill/>
+        </p:spPr>
+        <p:txBody>
+          <a:bodyPr wrap="square" anchor="t" lIns="0" rIns="0" tIns="0" bIns="0"/>
+          <a:lstStyle/>
+          <a:p>
+            <a:pPr algn="l"/>
+            <a:r>
+              <a:rPr sz="1300" b="1" i="0">
+                <a:solidFill>
+                  <a:srgbClr val="0645AD"/>
+                </a:solidFill>
+                <a:latin typeface="Calibri"/>
+              </a:rPr>
+              <a:t>STARTER</a:t>
+            </a:r>
+          </a:p>
+        </p:txBody>
+      </p:sp>
+      <p:sp>
+        <p:nvSpPr>
+          <p:cNvPr id="17" name="TextBox 16"/>
+          <p:cNvSpPr txBox="1"/>
+          <p:nvPr/>
+        </p:nvSpPr>
+        <p:spPr>
+          <a:xfrm>
+            <a:off x="8046720" y="2194560"/>
+            <a:ext cx="3291840" cy="3657600"/>
+          </a:xfrm>
+          <a:prstGeom prst="rect">
+            <a:avLst/>
+          </a:prstGeom>
+          <a:noFill/>
+        </p:spPr>
+        <p:txBody>
+          <a:bodyPr wrap="square" anchor="t" lIns="0" rIns="0" tIns="0" bIns="0"/>
+          <a:lstStyle/>
+          <a:p>
+            <a:pPr algn="l"/>
+            <a:r>
+              <a:rPr sz="2200" b="0" i="0">
+                <a:solidFill>
+                  <a:srgbClr val="03306E"/>
+                </a:solidFill>
+                <a:latin typeface="Cambria"/>
+              </a:rPr>
+              <a:t>A ladder 5 m long leans against a wall with its foot 3 m out. How high up the wall does it reach?</a:t>
+            </a:r>
+          </a:p>
+        </p:txBody>
+      </p:sp>
+    </p:spTree>
+  </p:cSld>
+  <p:clrMapOvr>
+    <a:masterClrMapping/>
+  </p:clrMapOvr>
+</p:sld>
+</file>
+
+<file path=ppt/slides/slide3.xml><?xml version="1.0" encoding="utf-8"?>
+<p:sld xmlns:a="http://schemas.openxmlformats.org/drawingml/2006/main" xmlns:p="http://schemas.openxmlformats.org/presentationml/2006/main" xmlns:r="http://schemas.openxmlformats.org/officeDocument/2006/relationships">
+  <p:cSld>
+    <p:bg>
+      <p:bgPr>
+        <a:solidFill>
+          <a:srgbClr val="FFFFFF"/>
+        </a:solidFill>
+        <a:effectLst/>
+      </p:bgPr>
+    </p:bg>
+    <p:spTree>
+      <p:nvGrpSpPr>
+        <p:cNvPr id="1" name=""/>
+        <p:cNvGrpSpPr/>
+        <p:nvPr/>
+      </p:nvGrpSpPr>
+      <p:grpSpPr/>
+      <p:sp>
+        <p:nvSpPr>
+          <p:cNvPr id="2" name="TextBox 1"/>
+          <p:cNvSpPr txBox="1"/>
+          <p:nvPr/>
+        </p:nvSpPr>
+        <p:spPr>
+          <a:xfrm>
+            <a:off x="548640" y="320040"/>
+            <a:ext cx="11094415" cy="274320"/>
+          </a:xfrm>
+          <a:prstGeom prst="rect">
+            <a:avLst/>
+          </a:prstGeom>
+          <a:noFill/>
+        </p:spPr>
+        <p:txBody>
+          <a:bodyPr wrap="square" anchor="t" lIns="0" rIns="0" tIns="0" bIns="0"/>
+          <a:lstStyle/>
+          <a:p>
+            <a:pPr algn="l"/>
+            <a:r>
+              <a:rPr sz="1100" b="1" i="0">
+                <a:solidFill>
+                  <a:srgbClr val="54595D"/>
+                </a:solidFill>
+                <a:latin typeface="Calibri"/>
+              </a:rPr>
+              <a:t>ENGINEERING CORE  ·  Core topic 4</a:t>
+            </a:r>
+          </a:p>
+        </p:txBody>
+      </p:sp>
+      <p:sp>
+        <p:nvSpPr>
+          <p:cNvPr id="3" name="TextBox 2"/>
+          <p:cNvSpPr txBox="1"/>
+          <p:nvPr/>
+        </p:nvSpPr>
+        <p:spPr>
+          <a:xfrm>
+            <a:off x="548640" y="566928"/>
+            <a:ext cx="11094415" cy="822960"/>
+          </a:xfrm>
+          <a:prstGeom prst="rect">
+            <a:avLst/>
+          </a:prstGeom>
+          <a:noFill/>
+        </p:spPr>
+        <p:txBody>
+          <a:bodyPr wrap="square" anchor="ctr" lIns="0" rIns="0" tIns="0" bIns="0"/>
+          <a:lstStyle/>
+          <a:p>
+            <a:pPr algn="l"/>
+            <a:r>
+              <a:rPr sz="3200" b="1" i="0">
+                <a:solidFill>
+                  <a:srgbClr val="03306E"/>
+                </a:solidFill>
+                <a:latin typeface="Cambria"/>
+              </a:rPr>
+              <a:t>The maths toolkit</a:t>
+            </a:r>
+          </a:p>
+        </p:txBody>
+      </p:sp>
+      <p:sp>
+        <p:nvSpPr>
+          <p:cNvPr id="4" name="TextBox 3"/>
+          <p:cNvSpPr txBox="1"/>
+          <p:nvPr/>
+        </p:nvSpPr>
+        <p:spPr>
+          <a:xfrm>
+            <a:off x="548640" y="6446520"/>
+            <a:ext cx="8229600" cy="274320"/>
+          </a:xfrm>
+          <a:prstGeom prst="rect">
+            <a:avLst/>
+          </a:prstGeom>
+          <a:noFill/>
+        </p:spPr>
+        <p:txBody>
+          <a:bodyPr wrap="square" anchor="t" lIns="0" rIns="0" tIns="0" bIns="0"/>
+          <a:lstStyle/>
+          <a:p>
+            <a:pPr algn="l"/>
+            <a:r>
+              <a:rPr sz="1000" b="0" i="0">
+                <a:solidFill>
+                  <a:srgbClr val="54595D"/>
+                </a:solidFill>
+                <a:latin typeface="Calibri"/>
+              </a:rPr>
+              <a:t>Design and Development for Engineering and Manufacturing T Level  ·  Essential Mathematics for Engineering</a:t>
+            </a:r>
+          </a:p>
+        </p:txBody>
+      </p:sp>
+      <p:sp>
+        <p:nvSpPr>
+          <p:cNvPr id="5" name="TextBox 4"/>
+          <p:cNvSpPr txBox="1"/>
+          <p:nvPr/>
+        </p:nvSpPr>
+        <p:spPr>
+          <a:xfrm>
+            <a:off x="10728655" y="6446520"/>
+            <a:ext cx="914400" cy="274320"/>
+          </a:xfrm>
+          <a:prstGeom prst="rect">
+            <a:avLst/>
+          </a:prstGeom>
+          <a:noFill/>
+        </p:spPr>
+        <p:txBody>
+          <a:bodyPr wrap="square" anchor="t" lIns="0" rIns="0" tIns="0" bIns="0"/>
+          <a:lstStyle/>
+          <a:p>
+            <a:pPr algn="r"/>
+            <a:r>
+              <a:rPr sz="1000" b="0" i="0">
+                <a:solidFill>
+                  <a:srgbClr val="54595D"/>
+                </a:solidFill>
+                <a:latin typeface="Calibri"/>
+              </a:rPr>
+              <a:t>3</a:t>
+            </a:r>
+          </a:p>
+        </p:txBody>
+      </p:sp>
+      <p:sp>
+        <p:nvSpPr>
+          <p:cNvPr id="6" name="TextBox 5"/>
+          <p:cNvSpPr txBox="1"/>
+          <p:nvPr/>
+        </p:nvSpPr>
+        <p:spPr>
+          <a:xfrm>
+            <a:off x="548640" y="1554480"/>
+            <a:ext cx="6720840" cy="4617720"/>
+          </a:xfrm>
+          <a:prstGeom prst="rect">
+            <a:avLst/>
+          </a:prstGeom>
+          <a:noFill/>
+        </p:spPr>
+        <p:txBody>
+          <a:bodyPr wrap="square" lIns="0" rIns="0" tIns="0" bIns="0">
+            <a:spAutoFit/>
+          </a:bodyPr>
+          <a:lstStyle/>
+          <a:p>
+            <a:pPr>
+              <a:spcAft>
+                <a:spcPts val="1320"/>
+              </a:spcAft>
+            </a:pPr>
+            <a:r>
+              <a:rPr sz="2200" b="0">
+                <a:solidFill>
+                  <a:srgbClr val="202122"/>
+                </a:solidFill>
+                <a:latin typeface="Calibri"/>
+              </a:rPr>
+              <a:t>Engineers use maths every day to design, check and make things.</a:t>
+            </a:r>
+          </a:p>
+          <a:p>
+            <a:pPr>
+              <a:spcAft>
+                <a:spcPts val="1320"/>
+              </a:spcAft>
+            </a:pPr>
+            <a:r>
+              <a:rPr sz="2200" b="1">
+                <a:solidFill>
+                  <a:srgbClr val="202122"/>
+                </a:solidFill>
+                <a:latin typeface="Calibri"/>
+              </a:rPr>
+              <a:t>Arithmetic:</a:t>
+            </a:r>
+            <a:r>
+              <a:rPr sz="2200" b="0">
+                <a:solidFill>
+                  <a:srgbClr val="202122"/>
+                </a:solidFill>
+                <a:latin typeface="Calibri"/>
+              </a:rPr>
+              <a:t> standard form for very large or small numbers, fractions, percentages, ratios and BIDMAS (the order of operations). Algebra: rearranging formulae, solving simultaneous and quadratic equations, indices, logarithms, sequences and matrices. Geometry: areas and volumes. Calculus: straight-line graphs (y = mx + c), differentiation to find maximum and minimum values, and integration. Trigonometry: Pythagoras, sine and cosine rules, radians and vectors. Statistics: averages, range, standard deviation and probability.</a:t>
+            </a:r>
+          </a:p>
+        </p:txBody>
+      </p:sp>
+      <p:sp>
+        <p:nvSpPr>
+          <p:cNvPr id="7" name="Rounded Rectangle 6"/>
+          <p:cNvSpPr/>
+          <p:nvPr/>
+        </p:nvSpPr>
+        <p:spPr>
+          <a:xfrm>
+            <a:off x="7772400" y="1554480"/>
+            <a:ext cx="3867912" cy="4526280"/>
+          </a:xfrm>
+          <a:prstGeom prst="roundRect">
+            <a:avLst>
+              <a:gd name="adj" fmla="val 8000"/>
+            </a:avLst>
+          </a:prstGeom>
+          <a:solidFill>
+            <a:srgbClr val="03306E"/>
+          </a:solidFill>
+          <a:ln>
+            <a:noFill/>
+          </a:ln>
+          <a:effectLst/>
+        </p:spPr>
+        <p:style>
+          <a:lnRef idx="1">
+            <a:schemeClr val="accent1"/>
+          </a:lnRef>
+          <a:fillRef idx="3">
+            <a:schemeClr val="accent1"/>
+          </a:fillRef>
+          <a:effectRef idx="2">
+            <a:schemeClr val="accent1"/>
+          </a:effectRef>
+          <a:fontRef idx="minor">
+            <a:schemeClr val="lt1"/>
+          </a:fontRef>
+        </p:style>
+        <p:txBody>
+          <a:bodyPr rtlCol="0" anchor="ctr"/>
+          <a:lstStyle/>
+          <a:p/>
+        </p:txBody>
+      </p:sp>
+      <p:sp>
+        <p:nvSpPr>
+          <p:cNvPr id="8" name="Oval 7"/>
+          <p:cNvSpPr/>
+          <p:nvPr/>
+        </p:nvSpPr>
+        <p:spPr>
+          <a:xfrm>
+            <a:off x="8046720" y="1828800"/>
+            <a:ext cx="548640" cy="548640"/>
+          </a:xfrm>
+          <a:prstGeom prst="ellipse">
+            <a:avLst/>
+          </a:prstGeom>
+          <a:solidFill>
+            <a:srgbClr val="F2B705"/>
+          </a:solidFill>
+          <a:ln>
+            <a:noFill/>
+          </a:ln>
+          <a:effectLst/>
+        </p:spPr>
+        <p:style>
+          <a:lnRef idx="1">
+            <a:schemeClr val="accent1"/>
+          </a:lnRef>
+          <a:fillRef idx="3">
+            <a:schemeClr val="accent1"/>
+          </a:fillRef>
+          <a:effectRef idx="2">
+            <a:schemeClr val="accent1"/>
+          </a:effectRef>
+          <a:fontRef idx="minor">
+            <a:schemeClr val="lt1"/>
+          </a:fontRef>
+        </p:style>
+        <p:txBody>
+          <a:bodyPr rtlCol="0" anchor="ctr" lIns="0" rIns="0" tIns="0" bIns="0"/>
+          <a:lstStyle/>
+          <a:p>
+            <a:pPr algn="ctr"/>
+            <a:r>
+              <a:rPr sz="1300" b="1">
+                <a:solidFill>
+                  <a:srgbClr val="202122"/>
+                </a:solidFill>
+                <a:latin typeface="Calibri"/>
+              </a:rPr>
+              <a:t>e.g.</a:t>
+            </a:r>
+          </a:p>
+        </p:txBody>
+      </p:sp>
+      <p:sp>
+        <p:nvSpPr>
+          <p:cNvPr id="9" name="TextBox 8"/>
+          <p:cNvSpPr txBox="1"/>
+          <p:nvPr/>
+        </p:nvSpPr>
+        <p:spPr>
+          <a:xfrm>
+            <a:off x="8046720" y="2560320"/>
+            <a:ext cx="3291840" cy="365760"/>
+          </a:xfrm>
+          <a:prstGeom prst="rect">
+            <a:avLst/>
+          </a:prstGeom>
+          <a:noFill/>
+        </p:spPr>
+        <p:txBody>
+          <a:bodyPr wrap="square" anchor="t" lIns="0" rIns="0" tIns="0" bIns="0"/>
+          <a:lstStyle/>
+          <a:p>
+            <a:pPr algn="l"/>
+            <a:r>
+              <a:rPr sz="1300" b="1" i="0">
+                <a:solidFill>
+                  <a:srgbClr val="A9C8F0"/>
+                </a:solidFill>
+                <a:latin typeface="Calibri"/>
+              </a:rPr>
+              <a:t>EXAMPLE</a:t>
+            </a:r>
+          </a:p>
+        </p:txBody>
+      </p:sp>
+      <p:sp>
+        <p:nvSpPr>
+          <p:cNvPr id="10" name="TextBox 9"/>
+          <p:cNvSpPr txBox="1"/>
+          <p:nvPr/>
+        </p:nvSpPr>
+        <p:spPr>
+          <a:xfrm>
+            <a:off x="8046720" y="2971800"/>
+            <a:ext cx="3291840" cy="2971800"/>
+          </a:xfrm>
+          <a:prstGeom prst="rect">
+            <a:avLst/>
+          </a:prstGeom>
+          <a:noFill/>
+        </p:spPr>
+        <p:txBody>
+          <a:bodyPr wrap="square" anchor="t" lIns="0" rIns="0" tIns="0" bIns="0"/>
+          <a:lstStyle/>
+          <a:p>
+            <a:pPr algn="l"/>
+            <a:r>
+              <a:rPr sz="1900" b="0" i="0">
+                <a:solidFill>
+                  <a:srgbClr val="FFFFFF"/>
+                </a:solidFill>
+                <a:latin typeface="Cambria"/>
+              </a:rPr>
+              <a:t>Working out how much steel is needed for 200 cylindrical pins uses geometry (volume), arithmetic (multiplying up) and percentages (adding waste).</a:t>
+            </a:r>
+          </a:p>
+        </p:txBody>
+      </p:sp>
+    </p:spTree>
+  </p:cSld>
+  <p:clrMapOvr>
+    <a:masterClrMapping/>
+  </p:clrMapOvr>
+</p:sld>
+</file>
+
+<file path=ppt/slides/slide4.xml><?xml version="1.0" encoding="utf-8"?>
+<p:sld xmlns:a="http://schemas.openxmlformats.org/drawingml/2006/main" xmlns:p="http://schemas.openxmlformats.org/presentationml/2006/main" xmlns:r="http://schemas.openxmlformats.org/officeDocument/2006/relationships">
+  <p:cSld>
+    <p:bg>
+      <p:bgPr>
+        <a:solidFill>
+          <a:srgbClr val="FFFFFF"/>
+        </a:solidFill>
+        <a:effectLst/>
+      </p:bgPr>
+    </p:bg>
+    <p:spTree>
+      <p:nvGrpSpPr>
+        <p:cNvPr id="1" name=""/>
+        <p:cNvGrpSpPr/>
+        <p:nvPr/>
+      </p:nvGrpSpPr>
+      <p:grpSpPr/>
+      <p:sp>
+        <p:nvSpPr>
+          <p:cNvPr id="2" name="TextBox 1"/>
+          <p:cNvSpPr txBox="1"/>
+          <p:nvPr/>
+        </p:nvSpPr>
+        <p:spPr>
+          <a:xfrm>
+            <a:off x="548640" y="320040"/>
+            <a:ext cx="11094415" cy="274320"/>
+          </a:xfrm>
+          <a:prstGeom prst="rect">
+            <a:avLst/>
+          </a:prstGeom>
+          <a:noFill/>
+        </p:spPr>
+        <p:txBody>
+          <a:bodyPr wrap="square" anchor="t" lIns="0" rIns="0" tIns="0" bIns="0"/>
+          <a:lstStyle/>
+          <a:p>
+            <a:pPr algn="l"/>
+            <a:r>
+              <a:rPr sz="1100" b="1" i="0">
+                <a:solidFill>
+                  <a:srgbClr val="54595D"/>
+                </a:solidFill>
+                <a:latin typeface="Calibri"/>
+              </a:rPr>
+              <a:t>ENGINEERING CORE  ·  Core topic 4</a:t>
+            </a:r>
+          </a:p>
+        </p:txBody>
+      </p:sp>
+      <p:sp>
+        <p:nvSpPr>
+          <p:cNvPr id="3" name="TextBox 2"/>
+          <p:cNvSpPr txBox="1"/>
+          <p:nvPr/>
+        </p:nvSpPr>
+        <p:spPr>
+          <a:xfrm>
+            <a:off x="548640" y="566928"/>
+            <a:ext cx="11094415" cy="822960"/>
+          </a:xfrm>
+          <a:prstGeom prst="rect">
+            <a:avLst/>
+          </a:prstGeom>
+          <a:noFill/>
+        </p:spPr>
+        <p:txBody>
+          <a:bodyPr wrap="square" anchor="ctr" lIns="0" rIns="0" tIns="0" bIns="0"/>
+          <a:lstStyle/>
+          <a:p>
+            <a:pPr algn="l"/>
+            <a:r>
+              <a:rPr sz="3200" b="1" i="0">
+                <a:solidFill>
+                  <a:srgbClr val="03306E"/>
+                </a:solidFill>
+                <a:latin typeface="Cambria"/>
+              </a:rPr>
+              <a:t>The maths toolkit</a:t>
+            </a:r>
+          </a:p>
+        </p:txBody>
+      </p:sp>
+      <p:sp>
+        <p:nvSpPr>
+          <p:cNvPr id="4" name="TextBox 3"/>
+          <p:cNvSpPr txBox="1"/>
+          <p:nvPr/>
+        </p:nvSpPr>
+        <p:spPr>
+          <a:xfrm>
+            <a:off x="548640" y="6446520"/>
+            <a:ext cx="8229600" cy="274320"/>
+          </a:xfrm>
+          <a:prstGeom prst="rect">
+            <a:avLst/>
+          </a:prstGeom>
+          <a:noFill/>
+        </p:spPr>
+        <p:txBody>
+          <a:bodyPr wrap="square" anchor="t" lIns="0" rIns="0" tIns="0" bIns="0"/>
+          <a:lstStyle/>
+          <a:p>
+            <a:pPr algn="l"/>
+            <a:r>
+              <a:rPr sz="1000" b="0" i="0">
+                <a:solidFill>
+                  <a:srgbClr val="54595D"/>
+                </a:solidFill>
+                <a:latin typeface="Calibri"/>
+              </a:rPr>
+              <a:t>Design and Development for Engineering and Manufacturing T Level  ·  Essential Mathematics for Engineering</a:t>
+            </a:r>
+          </a:p>
+        </p:txBody>
+      </p:sp>
+      <p:sp>
+        <p:nvSpPr>
+          <p:cNvPr id="5" name="TextBox 4"/>
+          <p:cNvSpPr txBox="1"/>
+          <p:nvPr/>
+        </p:nvSpPr>
+        <p:spPr>
+          <a:xfrm>
+            <a:off x="10728655" y="6446520"/>
+            <a:ext cx="914400" cy="274320"/>
+          </a:xfrm>
+          <a:prstGeom prst="rect">
+            <a:avLst/>
+          </a:prstGeom>
+          <a:noFill/>
+        </p:spPr>
+        <p:txBody>
+          <a:bodyPr wrap="square" anchor="t" lIns="0" rIns="0" tIns="0" bIns="0"/>
+          <a:lstStyle/>
+          <a:p>
+            <a:pPr algn="r"/>
+            <a:r>
+              <a:rPr sz="1000" b="0" i="0">
+                <a:solidFill>
+                  <a:srgbClr val="54595D"/>
+                </a:solidFill>
+                <a:latin typeface="Calibri"/>
+              </a:rPr>
+              <a:t>4</a:t>
+            </a:r>
+          </a:p>
+        </p:txBody>
+      </p:sp>
+      <p:graphicFrame>
+        <p:nvGraphicFramePr>
+          <p:cNvPr id="6" name="Table 5"/>
+          <p:cNvGraphicFramePr>
+            <a:graphicFrameLocks noGrp="1"/>
+          </p:cNvGraphicFramePr>
+          <p:nvPr/>
+        </p:nvGraphicFramePr>
+        <p:xfrm>
+          <a:off x="548640" y="1600200"/>
+          <a:ext cx="11094414" cy="4526277"/>
+        </p:xfrm>
+        <a:graphic>
+          <a:graphicData uri="http://schemas.openxmlformats.org/drawingml/2006/table">
+            <a:tbl>
+              <a:tblPr firstRow="1" bandRow="1">
+                <a:tableStyleId>{5C22544A-7EE6-4342-B048-85BDC9FD1C3A}</a:tableStyleId>
+              </a:tblPr>
+              <a:tblGrid>
+                <a:gridCol w="2580096"/>
+                <a:gridCol w="8514318"/>
+              </a:tblGrid>
+              <a:tr h="646611">
+                <a:tc>
+                  <a:txBody>
+                    <a:bodyPr wrap="square"/>
+                    <a:lstStyle/>
+                    <a:p>
+                      <a:r>
+                        <a:rPr sz="1600" b="1">
+                          <a:solidFill>
+                            <a:srgbClr val="FFFFFF"/>
+                          </a:solidFill>
+                          <a:latin typeface="Calibri"/>
+                        </a:rPr>
+                        <a:t>Area</a:t>
+                      </a:r>
+                    </a:p>
+                  </a:txBody>
+                  <a:tcPr marL="91440" marR="91440" anchor="ctr">
+                    <a:solidFill>
+                      <a:srgbClr val="03306E"/>
+                    </a:solidFill>
+                  </a:tcPr>
+                </a:tc>
+                <a:tc>
+                  <a:txBody>
+                    <a:bodyPr wrap="square"/>
+                    <a:lstStyle/>
+                    <a:p>
+                      <a:r>
+                        <a:rPr sz="1600" b="1">
+                          <a:solidFill>
+                            <a:srgbClr val="FFFFFF"/>
+                          </a:solidFill>
+                          <a:latin typeface="Calibri"/>
+                        </a:rPr>
+                        <a:t>What to be able to do</a:t>
+                      </a:r>
+                    </a:p>
+                  </a:txBody>
+                  <a:tcPr marL="91440" marR="91440" anchor="ctr">
+                    <a:solidFill>
+                      <a:srgbClr val="03306E"/>
+                    </a:solidFill>
+                  </a:tcPr>
+                </a:tc>
+              </a:tr>
+              <a:tr h="646611">
+                <a:tc>
+                  <a:txBody>
+                    <a:bodyPr wrap="square"/>
+                    <a:lstStyle/>
+                    <a:p>
+                      <a:r>
+                        <a:rPr sz="1600" b="1">
+                          <a:solidFill>
+                            <a:srgbClr val="03306E"/>
+                          </a:solidFill>
+                          <a:latin typeface="Calibri"/>
+                        </a:rPr>
+                        <a:t>Arithmetic</a:t>
+                      </a:r>
+                    </a:p>
+                  </a:txBody>
+                  <a:tcPr marL="91440" marR="91440" anchor="ctr">
+                    <a:solidFill>
+                      <a:srgbClr val="FFFFFF"/>
+                    </a:solidFill>
+                  </a:tcPr>
+                </a:tc>
+                <a:tc>
+                  <a:txBody>
+                    <a:bodyPr wrap="square"/>
+                    <a:lstStyle/>
+                    <a:p>
+                      <a:r>
+                        <a:rPr sz="1600" b="0">
+                          <a:solidFill>
+                            <a:srgbClr val="202122"/>
+                          </a:solidFill>
+                          <a:latin typeface="Calibri"/>
+                        </a:rPr>
+                        <a:t>Standard form, fractions, percentages, ratios, BIDMAS</a:t>
+                      </a:r>
+                    </a:p>
+                  </a:txBody>
+                  <a:tcPr marL="91440" marR="91440" anchor="ctr">
+                    <a:solidFill>
+                      <a:srgbClr val="FFFFFF"/>
+                    </a:solidFill>
+                  </a:tcPr>
+                </a:tc>
+              </a:tr>
+              <a:tr h="646611">
+                <a:tc>
+                  <a:txBody>
+                    <a:bodyPr wrap="square"/>
+                    <a:lstStyle/>
+                    <a:p>
+                      <a:r>
+                        <a:rPr sz="1600" b="1">
+                          <a:solidFill>
+                            <a:srgbClr val="03306E"/>
+                          </a:solidFill>
+                          <a:latin typeface="Calibri"/>
+                        </a:rPr>
+                        <a:t>Algebra</a:t>
+                      </a:r>
+                    </a:p>
+                  </a:txBody>
+                  <a:tcPr marL="91440" marR="91440" anchor="ctr">
+                    <a:solidFill>
+                      <a:srgbClr val="EAF3FF"/>
+                    </a:solidFill>
+                  </a:tcPr>
+                </a:tc>
+                <a:tc>
+                  <a:txBody>
+                    <a:bodyPr wrap="square"/>
+                    <a:lstStyle/>
+                    <a:p>
+                      <a:r>
+                        <a:rPr sz="1600" b="0">
+                          <a:solidFill>
+                            <a:srgbClr val="202122"/>
+                          </a:solidFill>
+                          <a:latin typeface="Calibri"/>
+                        </a:rPr>
+                        <a:t>Rearrange equations; simultaneous and quadratic equations; indices; logarithms; sequences; matrices</a:t>
+                      </a:r>
+                    </a:p>
+                  </a:txBody>
+                  <a:tcPr marL="91440" marR="91440" anchor="ctr">
+                    <a:solidFill>
+                      <a:srgbClr val="EAF3FF"/>
+                    </a:solidFill>
+                  </a:tcPr>
+                </a:tc>
+              </a:tr>
+              <a:tr h="646611">
+                <a:tc>
+                  <a:txBody>
+                    <a:bodyPr wrap="square"/>
+                    <a:lstStyle/>
+                    <a:p>
+                      <a:r>
+                        <a:rPr sz="1600" b="1">
+                          <a:solidFill>
+                            <a:srgbClr val="03306E"/>
+                          </a:solidFill>
+                          <a:latin typeface="Calibri"/>
+                        </a:rPr>
+                        <a:t>Geometry</a:t>
+                      </a:r>
+                    </a:p>
+                  </a:txBody>
+                  <a:tcPr marL="91440" marR="91440" anchor="ctr">
+                    <a:solidFill>
+                      <a:srgbClr val="FFFFFF"/>
+                    </a:solidFill>
+                  </a:tcPr>
+                </a:tc>
+                <a:tc>
+                  <a:txBody>
+                    <a:bodyPr wrap="square"/>
+                    <a:lstStyle/>
+                    <a:p>
+                      <a:r>
+                        <a:rPr sz="1600" b="0">
+                          <a:solidFill>
+                            <a:srgbClr val="202122"/>
+                          </a:solidFill>
+                          <a:latin typeface="Calibri"/>
+                        </a:rPr>
+                        <a:t>Areas of 2D shapes, volumes of 3D shapes</a:t>
+                      </a:r>
+                    </a:p>
+                  </a:txBody>
+                  <a:tcPr marL="91440" marR="91440" anchor="ctr">
+                    <a:solidFill>
+                      <a:srgbClr val="FFFFFF"/>
+                    </a:solidFill>
+                  </a:tcPr>
+                </a:tc>
+              </a:tr>
+              <a:tr h="646611">
+                <a:tc>
+                  <a:txBody>
+                    <a:bodyPr wrap="square"/>
+                    <a:lstStyle/>
+                    <a:p>
+                      <a:r>
+                        <a:rPr sz="1600" b="1">
+                          <a:solidFill>
+                            <a:srgbClr val="03306E"/>
+                          </a:solidFill>
+                          <a:latin typeface="Calibri"/>
+                        </a:rPr>
+                        <a:t>Calculus</a:t>
+                      </a:r>
+                    </a:p>
+                  </a:txBody>
+                  <a:tcPr marL="91440" marR="91440" anchor="ctr">
+                    <a:solidFill>
+                      <a:srgbClr val="EAF3FF"/>
+                    </a:solidFill>
+                  </a:tcPr>
+                </a:tc>
+                <a:tc>
+                  <a:txBody>
+                    <a:bodyPr wrap="square"/>
+                    <a:lstStyle/>
+                    <a:p>
+                      <a:r>
+                        <a:rPr sz="1600" b="0">
+                          <a:solidFill>
+                            <a:srgbClr val="202122"/>
+                          </a:solidFill>
+                          <a:latin typeface="Calibri"/>
+                        </a:rPr>
+                        <a:t>Straight-line graphs y = mx + c; standard differentials and integrals; maximum and minimum</a:t>
+                      </a:r>
+                    </a:p>
+                  </a:txBody>
+                  <a:tcPr marL="91440" marR="91440" anchor="ctr">
+                    <a:solidFill>
+                      <a:srgbClr val="EAF3FF"/>
+                    </a:solidFill>
+                  </a:tcPr>
+                </a:tc>
+              </a:tr>
+              <a:tr h="646611">
+                <a:tc>
+                  <a:txBody>
+                    <a:bodyPr wrap="square"/>
+                    <a:lstStyle/>
+                    <a:p>
+                      <a:r>
+                        <a:rPr sz="1600" b="1">
+                          <a:solidFill>
+                            <a:srgbClr val="03306E"/>
+                          </a:solidFill>
+                          <a:latin typeface="Calibri"/>
+                        </a:rPr>
+                        <a:t>Trigonometry</a:t>
+                      </a:r>
+                    </a:p>
+                  </a:txBody>
+                  <a:tcPr marL="91440" marR="91440" anchor="ctr">
+                    <a:solidFill>
+                      <a:srgbClr val="FFFFFF"/>
+                    </a:solidFill>
+                  </a:tcPr>
+                </a:tc>
+                <a:tc>
+                  <a:txBody>
+                    <a:bodyPr wrap="square"/>
+                    <a:lstStyle/>
+                    <a:p>
+                      <a:r>
+                        <a:rPr sz="1600" b="0">
+                          <a:solidFill>
+                            <a:srgbClr val="202122"/>
+                          </a:solidFill>
+                          <a:latin typeface="Calibri"/>
+                        </a:rPr>
+                        <a:t>Pythagoras, sine and cosine rules, radians, vectors</a:t>
+                      </a:r>
+                    </a:p>
+                  </a:txBody>
+                  <a:tcPr marL="91440" marR="91440" anchor="ctr">
+                    <a:solidFill>
+                      <a:srgbClr val="FFFFFF"/>
+                    </a:solidFill>
+                  </a:tcPr>
+                </a:tc>
+              </a:tr>
+              <a:tr h="646611">
+                <a:tc>
+                  <a:txBody>
+                    <a:bodyPr wrap="square"/>
+                    <a:lstStyle/>
+                    <a:p>
+                      <a:r>
+                        <a:rPr sz="1600" b="1">
+                          <a:solidFill>
+                            <a:srgbClr val="03306E"/>
+                          </a:solidFill>
+                          <a:latin typeface="Calibri"/>
+                        </a:rPr>
+                        <a:t>Statistics</a:t>
+                      </a:r>
+                    </a:p>
+                  </a:txBody>
+                  <a:tcPr marL="91440" marR="91440" anchor="ctr">
+                    <a:solidFill>
+                      <a:srgbClr val="EAF3FF"/>
+                    </a:solidFill>
+                  </a:tcPr>
+                </a:tc>
+                <a:tc>
+                  <a:txBody>
+                    <a:bodyPr wrap="square"/>
+                    <a:lstStyle/>
+                    <a:p>
+                      <a:r>
+                        <a:rPr sz="1600" b="0">
+                          <a:solidFill>
+                            <a:srgbClr val="202122"/>
+                          </a:solidFill>
+                          <a:latin typeface="Calibri"/>
+                        </a:rPr>
+                        <a:t>Range, mean, median, mode, standard deviation, probability</a:t>
+                      </a:r>
+                    </a:p>
+                  </a:txBody>
+                  <a:tcPr marL="91440" marR="91440" anchor="ctr">
+                    <a:solidFill>
+                      <a:srgbClr val="EAF3FF"/>
+                    </a:solidFill>
+                  </a:tcPr>
+                </a:tc>
+              </a:tr>
+            </a:tbl>
+          </a:graphicData>
+        </a:graphic>
+      </p:graphicFrame>
+    </p:spTree>
+  </p:cSld>
+  <p:clrMapOvr>
+    <a:masterClrMapping/>
+  </p:clrMapOvr>
+</p:sld>
+</file>
+
+<file path=ppt/slides/slide5.xml><?xml version="1.0" encoding="utf-8"?>
+<p:sld xmlns:a="http://schemas.openxmlformats.org/drawingml/2006/main" xmlns:p="http://schemas.openxmlformats.org/presentationml/2006/main" xmlns:r="http://schemas.openxmlformats.org/officeDocument/2006/relationships">
+  <p:cSld>
+    <p:bg>
+      <p:bgPr>
+        <a:solidFill>
+          <a:srgbClr val="FFFFFF"/>
+        </a:solidFill>
+        <a:effectLst/>
+      </p:bgPr>
+    </p:bg>
+    <p:spTree>
+      <p:nvGrpSpPr>
+        <p:cNvPr id="1" name=""/>
+        <p:cNvGrpSpPr/>
+        <p:nvPr/>
+      </p:nvGrpSpPr>
+      <p:grpSpPr/>
+      <p:sp>
+        <p:nvSpPr>
+          <p:cNvPr id="2" name="TextBox 1"/>
+          <p:cNvSpPr txBox="1"/>
+          <p:nvPr/>
+        </p:nvSpPr>
+        <p:spPr>
+          <a:xfrm>
+            <a:off x="548640" y="320040"/>
+            <a:ext cx="11094415" cy="274320"/>
+          </a:xfrm>
+          <a:prstGeom prst="rect">
+            <a:avLst/>
+          </a:prstGeom>
+          <a:noFill/>
+        </p:spPr>
+        <p:txBody>
+          <a:bodyPr wrap="square" anchor="t" lIns="0" rIns="0" tIns="0" bIns="0"/>
+          <a:lstStyle/>
+          <a:p>
+            <a:pPr algn="l"/>
+            <a:r>
+              <a:rPr sz="1100" b="1" i="0">
+                <a:solidFill>
+                  <a:srgbClr val="54595D"/>
+                </a:solidFill>
+                <a:latin typeface="Calibri"/>
+              </a:rPr>
+              <a:t>ENGINEERING CORE  ·  Core topic 4</a:t>
+            </a:r>
+          </a:p>
+        </p:txBody>
+      </p:sp>
+      <p:sp>
+        <p:nvSpPr>
+          <p:cNvPr id="3" name="TextBox 2"/>
+          <p:cNvSpPr txBox="1"/>
+          <p:nvPr/>
+        </p:nvSpPr>
+        <p:spPr>
+          <a:xfrm>
+            <a:off x="548640" y="566928"/>
+            <a:ext cx="11094415" cy="822960"/>
+          </a:xfrm>
+          <a:prstGeom prst="rect">
+            <a:avLst/>
+          </a:prstGeom>
+          <a:noFill/>
+        </p:spPr>
+        <p:txBody>
+          <a:bodyPr wrap="square" anchor="ctr" lIns="0" rIns="0" tIns="0" bIns="0"/>
+          <a:lstStyle/>
+          <a:p>
+            <a:pPr algn="l"/>
+            <a:r>
+              <a:rPr sz="3200" b="1" i="0">
+                <a:solidFill>
+                  <a:srgbClr val="03306E"/>
+                </a:solidFill>
+                <a:latin typeface="Cambria"/>
+              </a:rPr>
+              <a:t>Quick check: The maths toolkit</a:t>
+            </a:r>
+          </a:p>
+        </p:txBody>
+      </p:sp>
+      <p:sp>
+        <p:nvSpPr>
+          <p:cNvPr id="4" name="TextBox 3"/>
+          <p:cNvSpPr txBox="1"/>
+          <p:nvPr/>
+        </p:nvSpPr>
+        <p:spPr>
+          <a:xfrm>
+            <a:off x="548640" y="6446520"/>
+            <a:ext cx="8229600" cy="274320"/>
+          </a:xfrm>
+          <a:prstGeom prst="rect">
+            <a:avLst/>
+          </a:prstGeom>
+          <a:noFill/>
+        </p:spPr>
+        <p:txBody>
+          <a:bodyPr wrap="square" anchor="t" lIns="0" rIns="0" tIns="0" bIns="0"/>
+          <a:lstStyle/>
+          <a:p>
+            <a:pPr algn="l"/>
+            <a:r>
+              <a:rPr sz="1000" b="0" i="0">
+                <a:solidFill>
+                  <a:srgbClr val="54595D"/>
+                </a:solidFill>
+                <a:latin typeface="Calibri"/>
+              </a:rPr>
+              <a:t>Design and Development for Engineering and Manufacturing T Level  ·  Essential Mathematics for Engineering</a:t>
+            </a:r>
+          </a:p>
+        </p:txBody>
+      </p:sp>
+      <p:sp>
+        <p:nvSpPr>
+          <p:cNvPr id="5" name="TextBox 4"/>
+          <p:cNvSpPr txBox="1"/>
+          <p:nvPr/>
+        </p:nvSpPr>
+        <p:spPr>
+          <a:xfrm>
+            <a:off x="10728655" y="6446520"/>
+            <a:ext cx="914400" cy="274320"/>
+          </a:xfrm>
+          <a:prstGeom prst="rect">
+            <a:avLst/>
+          </a:prstGeom>
+          <a:noFill/>
+        </p:spPr>
+        <p:txBody>
+          <a:bodyPr wrap="square" anchor="t" lIns="0" rIns="0" tIns="0" bIns="0"/>
+          <a:lstStyle/>
+          <a:p>
+            <a:pPr algn="r"/>
+            <a:r>
+              <a:rPr sz="1000" b="0" i="0">
+                <a:solidFill>
+                  <a:srgbClr val="54595D"/>
+                </a:solidFill>
+                <a:latin typeface="Calibri"/>
+              </a:rPr>
+              <a:t>5</a:t>
+            </a:r>
+          </a:p>
+        </p:txBody>
+      </p:sp>
+      <p:sp>
+        <p:nvSpPr>
+          <p:cNvPr id="6" name="Oval 5"/>
+          <p:cNvSpPr/>
+          <p:nvPr/>
+        </p:nvSpPr>
+        <p:spPr>
+          <a:xfrm>
+            <a:off x="548640" y="1691640"/>
+            <a:ext cx="502920" cy="502920"/>
+          </a:xfrm>
+          <a:prstGeom prst="ellipse">
+            <a:avLst/>
+          </a:prstGeom>
+          <a:solidFill>
+            <a:srgbClr val="F2B705"/>
+          </a:solidFill>
+          <a:ln>
+            <a:noFill/>
+          </a:ln>
+          <a:effectLst/>
+        </p:spPr>
+        <p:style>
+          <a:lnRef idx="1">
+            <a:schemeClr val="accent1"/>
+          </a:lnRef>
+          <a:fillRef idx="3">
+            <a:schemeClr val="accent1"/>
+          </a:fillRef>
+          <a:effectRef idx="2">
+            <a:schemeClr val="accent1"/>
+          </a:effectRef>
+          <a:fontRef idx="minor">
+            <a:schemeClr val="lt1"/>
+          </a:fontRef>
+        </p:style>
+        <p:txBody>
+          <a:bodyPr rtlCol="0" anchor="ctr" lIns="0" rIns="0" tIns="0" bIns="0"/>
+          <a:lstStyle/>
+          <a:p>
+            <a:pPr algn="ctr"/>
+            <a:r>
+              <a:rPr sz="1600" b="1">
+                <a:solidFill>
+                  <a:srgbClr val="202122"/>
+                </a:solidFill>
+                <a:latin typeface="Calibri"/>
+              </a:rPr>
+              <a:t>1</a:t>
+            </a:r>
+          </a:p>
+        </p:txBody>
+      </p:sp>
+      <p:sp>
+        <p:nvSpPr>
+          <p:cNvPr id="7" name="TextBox 6"/>
+          <p:cNvSpPr txBox="1"/>
+          <p:nvPr/>
+        </p:nvSpPr>
+        <p:spPr>
+          <a:xfrm>
+            <a:off x="1371600" y="1645920"/>
+            <a:ext cx="10271455" cy="1188720"/>
+          </a:xfrm>
+          <a:prstGeom prst="rect">
+            <a:avLst/>
+          </a:prstGeom>
+          <a:noFill/>
+        </p:spPr>
+        <p:txBody>
+          <a:bodyPr wrap="square" anchor="t" lIns="0" rIns="0" tIns="0" bIns="0"/>
+          <a:lstStyle/>
+          <a:p>
+            <a:pPr algn="l"/>
+            <a:r>
+              <a:rPr sz="2400" b="0" i="0">
+                <a:solidFill>
+                  <a:srgbClr val="202122"/>
+                </a:solidFill>
+                <a:latin typeface="Calibri"/>
+              </a:rPr>
+              <a:t>What does BIDMAS tell you?</a:t>
+            </a:r>
+          </a:p>
+        </p:txBody>
+      </p:sp>
+      <p:sp>
+        <p:nvSpPr>
+          <p:cNvPr id="8" name="Oval 7"/>
+          <p:cNvSpPr/>
+          <p:nvPr/>
+        </p:nvSpPr>
+        <p:spPr>
+          <a:xfrm>
+            <a:off x="548640" y="3108960"/>
+            <a:ext cx="502920" cy="502920"/>
+          </a:xfrm>
+          <a:prstGeom prst="ellipse">
+            <a:avLst/>
+          </a:prstGeom>
+          <a:solidFill>
+            <a:srgbClr val="F2B705"/>
+          </a:solidFill>
+          <a:ln>
+            <a:noFill/>
+          </a:ln>
+          <a:effectLst/>
+        </p:spPr>
+        <p:style>
+          <a:lnRef idx="1">
+            <a:schemeClr val="accent1"/>
+          </a:lnRef>
+          <a:fillRef idx="3">
+            <a:schemeClr val="accent1"/>
+          </a:fillRef>
+          <a:effectRef idx="2">
+            <a:schemeClr val="accent1"/>
+          </a:effectRef>
+          <a:fontRef idx="minor">
+            <a:schemeClr val="lt1"/>
+          </a:fontRef>
+        </p:style>
+        <p:txBody>
+          <a:bodyPr rtlCol="0" anchor="ctr" lIns="0" rIns="0" tIns="0" bIns="0"/>
+          <a:lstStyle/>
+          <a:p>
+            <a:pPr algn="ctr"/>
+            <a:r>
+              <a:rPr sz="1600" b="1">
+                <a:solidFill>
+                  <a:srgbClr val="202122"/>
+                </a:solidFill>
+                <a:latin typeface="Calibri"/>
+              </a:rPr>
+              <a:t>2</a:t>
+            </a:r>
+          </a:p>
+        </p:txBody>
+      </p:sp>
+      <p:sp>
+        <p:nvSpPr>
+          <p:cNvPr id="9" name="TextBox 8"/>
+          <p:cNvSpPr txBox="1"/>
+          <p:nvPr/>
+        </p:nvSpPr>
+        <p:spPr>
+          <a:xfrm>
+            <a:off x="1371600" y="3063240"/>
+            <a:ext cx="10271455" cy="1188720"/>
+          </a:xfrm>
+          <a:prstGeom prst="rect">
+            <a:avLst/>
+          </a:prstGeom>
+          <a:noFill/>
+        </p:spPr>
+        <p:txBody>
+          <a:bodyPr wrap="square" anchor="t" lIns="0" rIns="0" tIns="0" bIns="0"/>
+          <a:lstStyle/>
+          <a:p>
+            <a:pPr algn="l"/>
+            <a:r>
+              <a:rPr sz="2400" b="0" i="0">
+                <a:solidFill>
+                  <a:srgbClr val="202122"/>
+                </a:solidFill>
+                <a:latin typeface="Calibri"/>
+              </a:rPr>
+              <a:t>What is y = mx + c?</a:t>
+            </a:r>
+          </a:p>
+        </p:txBody>
+      </p:sp>
+      <p:sp>
+        <p:nvSpPr>
+          <p:cNvPr id="10" name="Oval 9"/>
+          <p:cNvSpPr/>
+          <p:nvPr/>
+        </p:nvSpPr>
+        <p:spPr>
+          <a:xfrm>
+            <a:off x="548640" y="4526280"/>
+            <a:ext cx="502920" cy="502920"/>
+          </a:xfrm>
+          <a:prstGeom prst="ellipse">
+            <a:avLst/>
+          </a:prstGeom>
+          <a:solidFill>
+            <a:srgbClr val="F2B705"/>
+          </a:solidFill>
+          <a:ln>
+            <a:noFill/>
+          </a:ln>
+          <a:effectLst/>
+        </p:spPr>
+        <p:style>
+          <a:lnRef idx="1">
+            <a:schemeClr val="accent1"/>
+          </a:lnRef>
+          <a:fillRef idx="3">
+            <a:schemeClr val="accent1"/>
+          </a:fillRef>
+          <a:effectRef idx="2">
+            <a:schemeClr val="accent1"/>
+          </a:effectRef>
+          <a:fontRef idx="minor">
+            <a:schemeClr val="lt1"/>
+          </a:fontRef>
+        </p:style>
+        <p:txBody>
+          <a:bodyPr rtlCol="0" anchor="ctr" lIns="0" rIns="0" tIns="0" bIns="0"/>
+          <a:lstStyle/>
+          <a:p>
+            <a:pPr algn="ctr"/>
+            <a:r>
+              <a:rPr sz="1600" b="1">
+                <a:solidFill>
+                  <a:srgbClr val="202122"/>
+                </a:solidFill>
+                <a:latin typeface="Calibri"/>
+              </a:rPr>
+              <a:t>3</a:t>
+            </a:r>
+          </a:p>
+        </p:txBody>
+      </p:sp>
+      <p:sp>
+        <p:nvSpPr>
+          <p:cNvPr id="11" name="TextBox 10"/>
+          <p:cNvSpPr txBox="1"/>
+          <p:nvPr/>
+        </p:nvSpPr>
+        <p:spPr>
+          <a:xfrm>
+            <a:off x="1371600" y="4480560"/>
+            <a:ext cx="10271455" cy="1188720"/>
+          </a:xfrm>
+          <a:prstGeom prst="rect">
+            <a:avLst/>
+          </a:prstGeom>
+          <a:noFill/>
+        </p:spPr>
+        <p:txBody>
+          <a:bodyPr wrap="square" anchor="t" lIns="0" rIns="0" tIns="0" bIns="0"/>
+          <a:lstStyle/>
+          <a:p>
+            <a:pPr algn="l"/>
+            <a:r>
+              <a:rPr sz="2400" b="0" i="0">
+                <a:solidFill>
+                  <a:srgbClr val="202122"/>
+                </a:solidFill>
+                <a:latin typeface="Calibri"/>
+              </a:rPr>
+              <a:t>What is differentiation used for?</a:t>
+            </a:r>
+          </a:p>
+        </p:txBody>
+      </p:sp>
+      <p:sp>
+        <p:nvSpPr>
+          <p:cNvPr id="12" name="TextBox 11"/>
+          <p:cNvSpPr txBox="1"/>
+          <p:nvPr/>
+        </p:nvSpPr>
+        <p:spPr>
+          <a:xfrm>
+            <a:off x="548640" y="5852160"/>
+            <a:ext cx="11094415" cy="365760"/>
+          </a:xfrm>
+          <a:prstGeom prst="rect">
+            <a:avLst/>
+          </a:prstGeom>
+          <a:noFill/>
+        </p:spPr>
+        <p:txBody>
+          <a:bodyPr wrap="square" anchor="t" lIns="0" rIns="0" tIns="0" bIns="0"/>
+          <a:lstStyle/>
+          <a:p>
+            <a:pPr algn="l"/>
+            <a:r>
+              <a:rPr sz="1300" b="0" i="1">
+                <a:solidFill>
+                  <a:srgbClr val="54595D"/>
+                </a:solidFill>
+                <a:latin typeface="Calibri"/>
+              </a:rPr>
+              <a:t>Answer on mini whiteboards or in your book. Answers are in the speaker notes.</a:t>
+            </a:r>
+          </a:p>
+        </p:txBody>
+      </p:sp>
+    </p:spTree>
+  </p:cSld>
+  <p:clrMapOvr>
+    <a:masterClrMapping/>
+  </p:clrMapOvr>
+</p:sld>
+</file>
+
 <file path=ppt/slides/slide6.xml><?xml version="1.0" encoding="utf-8"?>
 <p:sld xmlns:a="http://schemas.openxmlformats.org/drawingml/2006/main" xmlns:p="http://schemas.openxmlformats.org/presentationml/2006/main" xmlns:r="http://schemas.openxmlformats.org/officeDocument/2006/relationships">
   <p:cSld>
@@ -6285,7 +9897,7 @@
                 </a:solidFill>
                 <a:latin typeface="Cambria"/>
               </a:rPr>
-              <a:t>Check your understanding</a:t>
+              <a:t>Worked examples</a:t>
             </a:r>
           </a:p>
         </p:txBody>
@@ -6358,14 +9970,197 @@
       </p:sp>
       <p:sp>
         <p:nvSpPr>
-          <p:cNvPr id="6" name="Oval 5"/>
+          <p:cNvPr id="6" name="TextBox 5"/>
+          <p:cNvSpPr txBox="1"/>
+          <p:nvPr/>
+        </p:nvSpPr>
+        <p:spPr>
+          <a:xfrm>
+            <a:off x="548640" y="1554480"/>
+            <a:ext cx="6720840" cy="4617720"/>
+          </a:xfrm>
+          <a:prstGeom prst="rect">
+            <a:avLst/>
+          </a:prstGeom>
+          <a:noFill/>
+        </p:spPr>
+        <p:txBody>
+          <a:bodyPr wrap="square" lIns="0" rIns="0" tIns="0" bIns="0">
+            <a:spAutoFit/>
+          </a:bodyPr>
+          <a:lstStyle/>
+          <a:p>
+            <a:pPr>
+              <a:spcAft>
+                <a:spcPts val="1200"/>
+              </a:spcAft>
+            </a:pPr>
+            <a:r>
+              <a:rPr sz="2000" b="1">
+                <a:solidFill>
+                  <a:srgbClr val="202122"/>
+                </a:solidFill>
+                <a:latin typeface="Calibri"/>
+              </a:rPr>
+              <a:t>Standard form:</a:t>
+            </a:r>
+            <a:r>
+              <a:rPr sz="2000" b="0">
+                <a:solidFill>
+                  <a:srgbClr val="202122"/>
+                </a:solidFill>
+                <a:latin typeface="Calibri"/>
+              </a:rPr>
+              <a:t> 0.00045 m is written 4.5 x 10 to the power -4 m, so the size is clear at a glance.</a:t>
+            </a:r>
+          </a:p>
+          <a:p>
+            <a:pPr>
+              <a:spcAft>
+                <a:spcPts val="1200"/>
+              </a:spcAft>
+            </a:pPr>
+            <a:r>
+              <a:rPr sz="2000" b="1">
+                <a:solidFill>
+                  <a:srgbClr val="202122"/>
+                </a:solidFill>
+                <a:latin typeface="Calibri"/>
+              </a:rPr>
+              <a:t>Straight lines:</a:t>
+            </a:r>
+            <a:r>
+              <a:rPr sz="2000" b="0">
+                <a:solidFill>
+                  <a:srgbClr val="202122"/>
+                </a:solidFill>
+                <a:latin typeface="Calibri"/>
+              </a:rPr>
+              <a:t> a line through (0, 2) with a gradient of 3 is y = 3x + 2.</a:t>
+            </a:r>
+          </a:p>
+          <a:p>
+            <a:pPr>
+              <a:spcAft>
+                <a:spcPts val="1200"/>
+              </a:spcAft>
+            </a:pPr>
+            <a:r>
+              <a:rPr sz="2000" b="1">
+                <a:solidFill>
+                  <a:srgbClr val="202122"/>
+                </a:solidFill>
+                <a:latin typeface="Calibri"/>
+              </a:rPr>
+              <a:t>Volume:</a:t>
+            </a:r>
+            <a:r>
+              <a:rPr sz="2000" b="0">
+                <a:solidFill>
+                  <a:srgbClr val="202122"/>
+                </a:solidFill>
+                <a:latin typeface="Calibri"/>
+              </a:rPr>
+              <a:t> a cylinder's volume is pi x r squared x h. With r = 0.1 m and h = 2 m, that's about 0.063 cubic metres.</a:t>
+            </a:r>
+          </a:p>
+          <a:p>
+            <a:pPr>
+              <a:spcAft>
+                <a:spcPts val="1200"/>
+              </a:spcAft>
+            </a:pPr>
+            <a:r>
+              <a:rPr sz="2000" b="1">
+                <a:solidFill>
+                  <a:srgbClr val="202122"/>
+                </a:solidFill>
+                <a:latin typeface="Calibri"/>
+              </a:rPr>
+              <a:t>Triangles:</a:t>
+            </a:r>
+            <a:r>
+              <a:rPr sz="2000" b="0">
+                <a:solidFill>
+                  <a:srgbClr val="202122"/>
+                </a:solidFill>
+                <a:latin typeface="Calibri"/>
+              </a:rPr>
+              <a:t> Pythagoras (a squared + b squared = c squared) works for right-angled triangles; the sine rule (a / sin A = b / sin B) and cosine rule handle any triangle.</a:t>
+            </a:r>
+          </a:p>
+          <a:p>
+            <a:pPr>
+              <a:spcAft>
+                <a:spcPts val="1200"/>
+              </a:spcAft>
+            </a:pPr>
+            <a:r>
+              <a:rPr sz="2000" b="0">
+                <a:solidFill>
+                  <a:srgbClr val="202122"/>
+                </a:solidFill>
+                <a:latin typeface="Calibri"/>
+              </a:rPr>
+              <a:t>Always write the formula, substitute with units, then round sensibly.</a:t>
+            </a:r>
+          </a:p>
+        </p:txBody>
+      </p:sp>
+      <p:sp>
+        <p:nvSpPr>
+          <p:cNvPr id="7" name="Rounded Rectangle 6"/>
           <p:cNvSpPr/>
           <p:nvPr/>
         </p:nvSpPr>
         <p:spPr>
           <a:xfrm>
-            <a:off x="548640" y="1618488"/>
-            <a:ext cx="411480" cy="411480"/>
+            <a:off x="7772400" y="1554480"/>
+            <a:ext cx="3867912" cy="4526280"/>
+          </a:xfrm>
+          <a:prstGeom prst="roundRect">
+            <a:avLst>
+              <a:gd name="adj" fmla="val 8000"/>
+            </a:avLst>
+          </a:prstGeom>
+          <a:solidFill>
+            <a:srgbClr val="03306E"/>
+          </a:solidFill>
+          <a:ln>
+            <a:noFill/>
+          </a:ln>
+          <a:effectLst/>
+        </p:spPr>
+        <p:style>
+          <a:lnRef idx="1">
+            <a:schemeClr val="accent1"/>
+          </a:lnRef>
+          <a:fillRef idx="3">
+            <a:schemeClr val="accent1"/>
+          </a:fillRef>
+          <a:effectRef idx="2">
+            <a:schemeClr val="accent1"/>
+          </a:effectRef>
+          <a:fontRef idx="minor">
+            <a:schemeClr val="lt1"/>
+          </a:fontRef>
+        </p:style>
+        <p:txBody>
+          <a:bodyPr rtlCol="0" anchor="ctr"/>
+          <a:lstStyle/>
+          <a:p/>
+        </p:txBody>
+      </p:sp>
+      <p:sp>
+        <p:nvSpPr>
+          <p:cNvPr id="8" name="Oval 7"/>
+          <p:cNvSpPr/>
+          <p:nvPr/>
+        </p:nvSpPr>
+        <p:spPr>
+          <a:xfrm>
+            <a:off x="8046720" y="1828800"/>
+            <a:ext cx="548640" cy="548640"/>
           </a:xfrm>
           <a:prstGeom prst="ellipse">
             <a:avLst/>
@@ -6398,99 +10193,13 @@
           <a:p>
             <a:pPr algn="ctr"/>
             <a:r>
-              <a:rPr sz="1400" b="1">
+              <a:rPr sz="1300" b="1">
                 <a:solidFill>
                   <a:srgbClr val="202122"/>
                 </a:solidFill>
                 <a:latin typeface="Calibri"/>
               </a:rPr>
-              <a:t>1</a:t>
-            </a:r>
-          </a:p>
-        </p:txBody>
-      </p:sp>
-      <p:sp>
-        <p:nvSpPr>
-          <p:cNvPr id="7" name="TextBox 6"/>
-          <p:cNvSpPr txBox="1"/>
-          <p:nvPr/>
-        </p:nvSpPr>
-        <p:spPr>
-          <a:xfrm>
-            <a:off x="1234440" y="1600200"/>
-            <a:ext cx="10408615" cy="791870"/>
-          </a:xfrm>
-          <a:prstGeom prst="rect">
-            <a:avLst/>
-          </a:prstGeom>
-          <a:noFill/>
-        </p:spPr>
-        <p:txBody>
-          <a:bodyPr wrap="square" anchor="t" lIns="0" rIns="0" tIns="0" bIns="0"/>
-          <a:lstStyle/>
-          <a:p>
-            <a:pPr algn="l"/>
-            <a:r>
-              <a:rPr sz="2200" b="0" i="0">
-                <a:solidFill>
-                  <a:srgbClr val="202122"/>
-                </a:solidFill>
-                <a:latin typeface="Calibri"/>
-              </a:rPr>
-              <a:t>Write 0.0032 in standard form.</a:t>
-            </a:r>
-          </a:p>
-        </p:txBody>
-      </p:sp>
-      <p:sp>
-        <p:nvSpPr>
-          <p:cNvPr id="8" name="Oval 7"/>
-          <p:cNvSpPr/>
-          <p:nvPr/>
-        </p:nvSpPr>
-        <p:spPr>
-          <a:xfrm>
-            <a:off x="548640" y="2574950"/>
-            <a:ext cx="411480" cy="411480"/>
-          </a:xfrm>
-          <a:prstGeom prst="ellipse">
-            <a:avLst/>
-          </a:prstGeom>
-          <a:solidFill>
-            <a:srgbClr val="F2B705"/>
-          </a:solidFill>
-          <a:ln>
-            <a:noFill/>
-          </a:ln>
-          <a:effectLst/>
-        </p:spPr>
-        <p:style>
-          <a:lnRef idx="1">
-            <a:schemeClr val="accent1"/>
-          </a:lnRef>
-          <a:fillRef idx="3">
-            <a:schemeClr val="accent1"/>
-          </a:fillRef>
-          <a:effectRef idx="2">
-            <a:schemeClr val="accent1"/>
-          </a:effectRef>
-          <a:fontRef idx="minor">
-            <a:schemeClr val="lt1"/>
-          </a:fontRef>
-        </p:style>
-        <p:txBody>
-          <a:bodyPr rtlCol="0" anchor="ctr" lIns="0" rIns="0" tIns="0" bIns="0"/>
-          <a:lstStyle/>
-          <a:p>
-            <a:pPr algn="ctr"/>
-            <a:r>
-              <a:rPr sz="1400" b="1">
-                <a:solidFill>
-                  <a:srgbClr val="202122"/>
-                </a:solidFill>
-                <a:latin typeface="Calibri"/>
-              </a:rPr>
-              <a:t>2</a:t>
+              <a:t>e.g.</a:t>
             </a:r>
           </a:p>
         </p:txBody>
@@ -6503,8 +10212,8 @@
         </p:nvSpPr>
         <p:spPr>
           <a:xfrm>
-            <a:off x="1234440" y="2556662"/>
-            <a:ext cx="10408615" cy="791870"/>
+            <a:off x="8046720" y="2560320"/>
+            <a:ext cx="3291840" cy="365760"/>
           </a:xfrm>
           <a:prstGeom prst="rect">
             <a:avLst/>
@@ -6517,80 +10226,27 @@
           <a:p>
             <a:pPr algn="l"/>
             <a:r>
-              <a:rPr sz="2200" b="0" i="0">
-                <a:solidFill>
-                  <a:srgbClr val="202122"/>
-                </a:solidFill>
-                <a:latin typeface="Calibri"/>
-              </a:rPr>
-              <a:t>What is the gradient of y = 4x - 7?</a:t>
-            </a:r>
-          </a:p>
-        </p:txBody>
-      </p:sp>
-      <p:sp>
-        <p:nvSpPr>
-          <p:cNvPr id="10" name="Oval 9"/>
-          <p:cNvSpPr/>
-          <p:nvPr/>
-        </p:nvSpPr>
-        <p:spPr>
-          <a:xfrm>
-            <a:off x="548640" y="3531412"/>
-            <a:ext cx="411480" cy="411480"/>
-          </a:xfrm>
-          <a:prstGeom prst="ellipse">
-            <a:avLst/>
-          </a:prstGeom>
-          <a:solidFill>
-            <a:srgbClr val="F2B705"/>
-          </a:solidFill>
-          <a:ln>
-            <a:noFill/>
-          </a:ln>
-          <a:effectLst/>
-        </p:spPr>
-        <p:style>
-          <a:lnRef idx="1">
-            <a:schemeClr val="accent1"/>
-          </a:lnRef>
-          <a:fillRef idx="3">
-            <a:schemeClr val="accent1"/>
-          </a:fillRef>
-          <a:effectRef idx="2">
-            <a:schemeClr val="accent1"/>
-          </a:effectRef>
-          <a:fontRef idx="minor">
-            <a:schemeClr val="lt1"/>
-          </a:fontRef>
-        </p:style>
-        <p:txBody>
-          <a:bodyPr rtlCol="0" anchor="ctr" lIns="0" rIns="0" tIns="0" bIns="0"/>
-          <a:lstStyle/>
-          <a:p>
-            <a:pPr algn="ctr"/>
-            <a:r>
-              <a:rPr sz="1400" b="1">
-                <a:solidFill>
-                  <a:srgbClr val="202122"/>
-                </a:solidFill>
-                <a:latin typeface="Calibri"/>
-              </a:rPr>
-              <a:t>3</a:t>
-            </a:r>
-          </a:p>
-        </p:txBody>
-      </p:sp>
-      <p:sp>
-        <p:nvSpPr>
-          <p:cNvPr id="11" name="TextBox 10"/>
+              <a:rPr sz="1300" b="1" i="0">
+                <a:solidFill>
+                  <a:srgbClr val="A9C8F0"/>
+                </a:solidFill>
+                <a:latin typeface="Calibri"/>
+              </a:rPr>
+              <a:t>EXAMPLE</a:t>
+            </a:r>
+          </a:p>
+        </p:txBody>
+      </p:sp>
+      <p:sp>
+        <p:nvSpPr>
+          <p:cNvPr id="10" name="TextBox 9"/>
           <p:cNvSpPr txBox="1"/>
           <p:nvPr/>
         </p:nvSpPr>
         <p:spPr>
           <a:xfrm>
-            <a:off x="1234440" y="3513124"/>
-            <a:ext cx="10408615" cy="791870"/>
+            <a:off x="8046720" y="2971800"/>
+            <a:ext cx="3291840" cy="2971800"/>
           </a:xfrm>
           <a:prstGeom prst="rect">
             <a:avLst/>
@@ -6603,185 +10259,13 @@
           <a:p>
             <a:pPr algn="l"/>
             <a:r>
-              <a:rPr sz="2200" b="0" i="0">
-                <a:solidFill>
-                  <a:srgbClr val="202122"/>
-                </a:solidFill>
-                <a:latin typeface="Calibri"/>
-              </a:rPr>
-              <a:t>Convert binary 1100 to decimal.</a:t>
-            </a:r>
-          </a:p>
-        </p:txBody>
-      </p:sp>
-      <p:sp>
-        <p:nvSpPr>
-          <p:cNvPr id="12" name="Oval 11"/>
-          <p:cNvSpPr/>
-          <p:nvPr/>
-        </p:nvSpPr>
-        <p:spPr>
-          <a:xfrm>
-            <a:off x="548640" y="4487875"/>
-            <a:ext cx="411480" cy="411480"/>
-          </a:xfrm>
-          <a:prstGeom prst="ellipse">
-            <a:avLst/>
-          </a:prstGeom>
-          <a:solidFill>
-            <a:srgbClr val="F2B705"/>
-          </a:solidFill>
-          <a:ln>
-            <a:noFill/>
-          </a:ln>
-          <a:effectLst/>
-        </p:spPr>
-        <p:style>
-          <a:lnRef idx="1">
-            <a:schemeClr val="accent1"/>
-          </a:lnRef>
-          <a:fillRef idx="3">
-            <a:schemeClr val="accent1"/>
-          </a:fillRef>
-          <a:effectRef idx="2">
-            <a:schemeClr val="accent1"/>
-          </a:effectRef>
-          <a:fontRef idx="minor">
-            <a:schemeClr val="lt1"/>
-          </a:fontRef>
-        </p:style>
-        <p:txBody>
-          <a:bodyPr rtlCol="0" anchor="ctr" lIns="0" rIns="0" tIns="0" bIns="0"/>
-          <a:lstStyle/>
-          <a:p>
-            <a:pPr algn="ctr"/>
-            <a:r>
-              <a:rPr sz="1400" b="1">
-                <a:solidFill>
-                  <a:srgbClr val="202122"/>
-                </a:solidFill>
-                <a:latin typeface="Calibri"/>
-              </a:rPr>
-              <a:t>4</a:t>
-            </a:r>
-          </a:p>
-        </p:txBody>
-      </p:sp>
-      <p:sp>
-        <p:nvSpPr>
-          <p:cNvPr id="13" name="TextBox 12"/>
-          <p:cNvSpPr txBox="1"/>
-          <p:nvPr/>
-        </p:nvSpPr>
-        <p:spPr>
-          <a:xfrm>
-            <a:off x="1234440" y="4469587"/>
-            <a:ext cx="10408615" cy="791870"/>
-          </a:xfrm>
-          <a:prstGeom prst="rect">
-            <a:avLst/>
-          </a:prstGeom>
-          <a:noFill/>
-        </p:spPr>
-        <p:txBody>
-          <a:bodyPr wrap="square" anchor="t" lIns="0" rIns="0" tIns="0" bIns="0"/>
-          <a:lstStyle/>
-          <a:p>
-            <a:pPr algn="l"/>
-            <a:r>
-              <a:rPr sz="2200" b="0" i="0">
-                <a:solidFill>
-                  <a:srgbClr val="202122"/>
-                </a:solidFill>
-                <a:latin typeface="Calibri"/>
-              </a:rPr>
-              <a:t>Find the mean of 12, 15, 18.</a:t>
-            </a:r>
-          </a:p>
-        </p:txBody>
-      </p:sp>
-      <p:sp>
-        <p:nvSpPr>
-          <p:cNvPr id="14" name="Oval 13"/>
-          <p:cNvSpPr/>
-          <p:nvPr/>
-        </p:nvSpPr>
-        <p:spPr>
-          <a:xfrm>
-            <a:off x="548640" y="5444337"/>
-            <a:ext cx="411480" cy="411480"/>
-          </a:xfrm>
-          <a:prstGeom prst="ellipse">
-            <a:avLst/>
-          </a:prstGeom>
-          <a:solidFill>
-            <a:srgbClr val="F2B705"/>
-          </a:solidFill>
-          <a:ln>
-            <a:noFill/>
-          </a:ln>
-          <a:effectLst/>
-        </p:spPr>
-        <p:style>
-          <a:lnRef idx="1">
-            <a:schemeClr val="accent1"/>
-          </a:lnRef>
-          <a:fillRef idx="3">
-            <a:schemeClr val="accent1"/>
-          </a:fillRef>
-          <a:effectRef idx="2">
-            <a:schemeClr val="accent1"/>
-          </a:effectRef>
-          <a:fontRef idx="minor">
-            <a:schemeClr val="lt1"/>
-          </a:fontRef>
-        </p:style>
-        <p:txBody>
-          <a:bodyPr rtlCol="0" anchor="ctr" lIns="0" rIns="0" tIns="0" bIns="0"/>
-          <a:lstStyle/>
-          <a:p>
-            <a:pPr algn="ctr"/>
-            <a:r>
-              <a:rPr sz="1400" b="1">
-                <a:solidFill>
-                  <a:srgbClr val="202122"/>
-                </a:solidFill>
-                <a:latin typeface="Calibri"/>
-              </a:rPr>
-              <a:t>5</a:t>
-            </a:r>
-          </a:p>
-        </p:txBody>
-      </p:sp>
-      <p:sp>
-        <p:nvSpPr>
-          <p:cNvPr id="15" name="TextBox 14"/>
-          <p:cNvSpPr txBox="1"/>
-          <p:nvPr/>
-        </p:nvSpPr>
-        <p:spPr>
-          <a:xfrm>
-            <a:off x="1234440" y="5426049"/>
-            <a:ext cx="10408615" cy="791870"/>
-          </a:xfrm>
-          <a:prstGeom prst="rect">
-            <a:avLst/>
-          </a:prstGeom>
-          <a:noFill/>
-        </p:spPr>
-        <p:txBody>
-          <a:bodyPr wrap="square" anchor="t" lIns="0" rIns="0" tIns="0" bIns="0"/>
-          <a:lstStyle/>
-          <a:p>
-            <a:pPr algn="l"/>
-            <a:r>
-              <a:rPr sz="2200" b="0" i="0">
-                <a:solidFill>
-                  <a:srgbClr val="202122"/>
-                </a:solidFill>
-                <a:latin typeface="Calibri"/>
-              </a:rPr>
-              <a:t>What is 180 degrees in radians?</a:t>
+              <a:rPr sz="1900" b="0" i="0">
+                <a:solidFill>
+                  <a:srgbClr val="FFFFFF"/>
+                </a:solidFill>
+                <a:latin typeface="Cambria"/>
+              </a:rPr>
+              <a:t>A 5 m ladder with its foot 3 m from a wall: height = square root of (25 - 9) = square root of 16 = 4 m.</a:t>
             </a:r>
           </a:p>
         </p:txBody>
@@ -6873,7 +10357,7 @@
                 </a:solidFill>
                 <a:latin typeface="Cambria"/>
               </a:rPr>
-              <a:t>Answers</a:t>
+              <a:t>Worked examples</a:t>
             </a:r>
           </a:p>
         </p:txBody>
@@ -6946,14 +10430,201 @@
       </p:sp>
       <p:sp>
         <p:nvSpPr>
-          <p:cNvPr id="6" name="Oval 5"/>
+          <p:cNvPr id="6" name="TextBox 5"/>
+          <p:cNvSpPr txBox="1"/>
+          <p:nvPr/>
+        </p:nvSpPr>
+        <p:spPr>
+          <a:xfrm>
+            <a:off x="548640" y="1600200"/>
+            <a:ext cx="6675120" cy="4572000"/>
+          </a:xfrm>
+          <a:prstGeom prst="rect">
+            <a:avLst/>
+          </a:prstGeom>
+          <a:noFill/>
+        </p:spPr>
+        <p:txBody>
+          <a:bodyPr wrap="square" lIns="0" rIns="0" tIns="0" bIns="0">
+            <a:spAutoFit/>
+          </a:bodyPr>
+          <a:lstStyle/>
+          <a:p>
+            <a:pPr marL="274320" indent="-274320">
+              <a:spcAft>
+                <a:spcPts val="1080"/>
+              </a:spcAft>
+              <a:buClr>
+                <a:srgbClr val="0645AD"/>
+              </a:buClr>
+              <a:buFont typeface="Arial"/>
+              <a:buChar char="•"/>
+            </a:pPr>
+            <a:r>
+              <a:rPr sz="2400" b="1">
+                <a:solidFill>
+                  <a:srgbClr val="202122"/>
+                </a:solidFill>
+                <a:latin typeface="Calibri"/>
+              </a:rPr>
+              <a:t>Standard form:</a:t>
+            </a:r>
+            <a:r>
+              <a:rPr sz="2400" b="0">
+                <a:solidFill>
+                  <a:srgbClr val="202122"/>
+                </a:solidFill>
+                <a:latin typeface="Calibri"/>
+              </a:rPr>
+              <a:t> 0.00045 m = 4.5 x 10 to the power -4 m.</a:t>
+            </a:r>
+          </a:p>
+          <a:p>
+            <a:pPr marL="274320" indent="-274320">
+              <a:spcAft>
+                <a:spcPts val="1080"/>
+              </a:spcAft>
+              <a:buClr>
+                <a:srgbClr val="0645AD"/>
+              </a:buClr>
+              <a:buFont typeface="Arial"/>
+              <a:buChar char="•"/>
+            </a:pPr>
+            <a:r>
+              <a:rPr sz="2400" b="1">
+                <a:solidFill>
+                  <a:srgbClr val="202122"/>
+                </a:solidFill>
+                <a:latin typeface="Calibri"/>
+              </a:rPr>
+              <a:t>Straight line:</a:t>
+            </a:r>
+            <a:r>
+              <a:rPr sz="2400" b="0">
+                <a:solidFill>
+                  <a:srgbClr val="202122"/>
+                </a:solidFill>
+                <a:latin typeface="Calibri"/>
+              </a:rPr>
+              <a:t> through (0, 2) with gradient 3 gives y = 3x + 2.</a:t>
+            </a:r>
+          </a:p>
+          <a:p>
+            <a:pPr marL="274320" indent="-274320">
+              <a:spcAft>
+                <a:spcPts val="1080"/>
+              </a:spcAft>
+              <a:buClr>
+                <a:srgbClr val="0645AD"/>
+              </a:buClr>
+              <a:buFont typeface="Arial"/>
+              <a:buChar char="•"/>
+            </a:pPr>
+            <a:r>
+              <a:rPr sz="2400" b="1">
+                <a:solidFill>
+                  <a:srgbClr val="202122"/>
+                </a:solidFill>
+                <a:latin typeface="Calibri"/>
+              </a:rPr>
+              <a:t>Volume of a cylinder:</a:t>
+            </a:r>
+            <a:r>
+              <a:rPr sz="2400" b="0">
+                <a:solidFill>
+                  <a:srgbClr val="202122"/>
+                </a:solidFill>
+                <a:latin typeface="Calibri"/>
+              </a:rPr>
+              <a:t> pi x r squared x h. For r = 0.1 m and h = 2 m, about 0.063 cubic metres.</a:t>
+            </a:r>
+          </a:p>
+          <a:p>
+            <a:pPr marL="274320" indent="-274320">
+              <a:spcAft>
+                <a:spcPts val="1080"/>
+              </a:spcAft>
+              <a:buClr>
+                <a:srgbClr val="0645AD"/>
+              </a:buClr>
+              <a:buFont typeface="Arial"/>
+              <a:buChar char="•"/>
+            </a:pPr>
+            <a:r>
+              <a:rPr sz="2400" b="1">
+                <a:solidFill>
+                  <a:srgbClr val="202122"/>
+                </a:solidFill>
+                <a:latin typeface="Calibri"/>
+              </a:rPr>
+              <a:t>Sine rule:</a:t>
+            </a:r>
+            <a:r>
+              <a:rPr sz="2400" b="0">
+                <a:solidFill>
+                  <a:srgbClr val="202122"/>
+                </a:solidFill>
+                <a:latin typeface="Calibri"/>
+              </a:rPr>
+              <a:t> a / sin A = b / sin B = c / sin C.</a:t>
+            </a:r>
+          </a:p>
+        </p:txBody>
+      </p:sp>
+      <p:sp>
+        <p:nvSpPr>
+          <p:cNvPr id="7" name="Rounded Rectangle 6"/>
           <p:cNvSpPr/>
           <p:nvPr/>
         </p:nvSpPr>
         <p:spPr>
           <a:xfrm>
-            <a:off x="548640" y="1618488"/>
-            <a:ext cx="411480" cy="411480"/>
+            <a:off x="7772400" y="1600200"/>
+            <a:ext cx="3867912" cy="4434840"/>
+          </a:xfrm>
+          <a:prstGeom prst="roundRect">
+            <a:avLst>
+              <a:gd name="adj" fmla="val 8000"/>
+            </a:avLst>
+          </a:prstGeom>
+          <a:solidFill>
+            <a:srgbClr val="03306E"/>
+          </a:solidFill>
+          <a:ln>
+            <a:noFill/>
+          </a:ln>
+          <a:effectLst/>
+        </p:spPr>
+        <p:style>
+          <a:lnRef idx="1">
+            <a:schemeClr val="accent1"/>
+          </a:lnRef>
+          <a:fillRef idx="3">
+            <a:schemeClr val="accent1"/>
+          </a:fillRef>
+          <a:effectRef idx="2">
+            <a:schemeClr val="accent1"/>
+          </a:effectRef>
+          <a:fontRef idx="minor">
+            <a:schemeClr val="lt1"/>
+          </a:fontRef>
+        </p:style>
+        <p:txBody>
+          <a:bodyPr rtlCol="0" anchor="ctr"/>
+          <a:lstStyle/>
+          <a:p/>
+        </p:txBody>
+      </p:sp>
+      <p:sp>
+        <p:nvSpPr>
+          <p:cNvPr id="8" name="Oval 7"/>
+          <p:cNvSpPr/>
+          <p:nvPr/>
+        </p:nvSpPr>
+        <p:spPr>
+          <a:xfrm>
+            <a:off x="8046720" y="1874519"/>
+            <a:ext cx="548640" cy="548640"/>
           </a:xfrm>
           <a:prstGeom prst="ellipse">
             <a:avLst/>
@@ -6986,110 +10657,13 @@
           <a:p>
             <a:pPr algn="ctr"/>
             <a:r>
-              <a:rPr sz="1400" b="1">
+              <a:rPr sz="2000" b="1">
                 <a:solidFill>
                   <a:srgbClr val="202122"/>
                 </a:solidFill>
                 <a:latin typeface="Calibri"/>
               </a:rPr>
-              <a:t>1</a:t>
-            </a:r>
-          </a:p>
-        </p:txBody>
-      </p:sp>
-      <p:sp>
-        <p:nvSpPr>
-          <p:cNvPr id="7" name="TextBox 6"/>
-          <p:cNvSpPr txBox="1"/>
-          <p:nvPr/>
-        </p:nvSpPr>
-        <p:spPr>
-          <a:xfrm>
-            <a:off x="1234440" y="1600200"/>
-            <a:ext cx="10408615" cy="791870"/>
-          </a:xfrm>
-          <a:prstGeom prst="rect">
-            <a:avLst/>
-          </a:prstGeom>
-          <a:noFill/>
-        </p:spPr>
-        <p:txBody>
-          <a:bodyPr wrap="square" anchor="t" lIns="0" rIns="0" tIns="0" bIns="0"/>
-          <a:lstStyle/>
-          <a:p>
-            <a:pPr algn="l"/>
-            <a:r>
-              <a:rPr sz="1800" b="0" i="0">
-                <a:solidFill>
-                  <a:srgbClr val="54595D"/>
-                </a:solidFill>
-                <a:latin typeface="Calibri"/>
-              </a:rPr>
-              <a:t>Write 0.0032 in standard form.</a:t>
-            </a:r>
-          </a:p>
-          <a:p>
-            <a:r>
-              <a:rPr sz="1800" b="1">
-                <a:solidFill>
-                  <a:srgbClr val="03306E"/>
-                </a:solidFill>
-                <a:latin typeface="Calibri"/>
-              </a:rPr>
-              <a:t>3.2 x 10 to the power -3.</a:t>
-            </a:r>
-          </a:p>
-        </p:txBody>
-      </p:sp>
-      <p:sp>
-        <p:nvSpPr>
-          <p:cNvPr id="8" name="Oval 7"/>
-          <p:cNvSpPr/>
-          <p:nvPr/>
-        </p:nvSpPr>
-        <p:spPr>
-          <a:xfrm>
-            <a:off x="548640" y="2574950"/>
-            <a:ext cx="411480" cy="411480"/>
-          </a:xfrm>
-          <a:prstGeom prst="ellipse">
-            <a:avLst/>
-          </a:prstGeom>
-          <a:solidFill>
-            <a:srgbClr val="F2B705"/>
-          </a:solidFill>
-          <a:ln>
-            <a:noFill/>
-          </a:ln>
-          <a:effectLst/>
-        </p:spPr>
-        <p:style>
-          <a:lnRef idx="1">
-            <a:schemeClr val="accent1"/>
-          </a:lnRef>
-          <a:fillRef idx="3">
-            <a:schemeClr val="accent1"/>
-          </a:fillRef>
-          <a:effectRef idx="2">
-            <a:schemeClr val="accent1"/>
-          </a:effectRef>
-          <a:fontRef idx="minor">
-            <a:schemeClr val="lt1"/>
-          </a:fontRef>
-        </p:style>
-        <p:txBody>
-          <a:bodyPr rtlCol="0" anchor="ctr" lIns="0" rIns="0" tIns="0" bIns="0"/>
-          <a:lstStyle/>
-          <a:p>
-            <a:pPr algn="ctr"/>
-            <a:r>
-              <a:rPr sz="1400" b="1">
-                <a:solidFill>
-                  <a:srgbClr val="202122"/>
-                </a:solidFill>
-                <a:latin typeface="Calibri"/>
-              </a:rPr>
-              <a:t>2</a:t>
+              <a:t>!</a:t>
             </a:r>
           </a:p>
         </p:txBody>
@@ -7102,8 +10676,8 @@
         </p:nvSpPr>
         <p:spPr>
           <a:xfrm>
-            <a:off x="1234440" y="2556662"/>
-            <a:ext cx="10408615" cy="791870"/>
+            <a:off x="8046720" y="2606040"/>
+            <a:ext cx="3291840" cy="365760"/>
           </a:xfrm>
           <a:prstGeom prst="rect">
             <a:avLst/>
@@ -7116,91 +10690,27 @@
           <a:p>
             <a:pPr algn="l"/>
             <a:r>
-              <a:rPr sz="1800" b="0" i="0">
-                <a:solidFill>
-                  <a:srgbClr val="54595D"/>
-                </a:solidFill>
-                <a:latin typeface="Calibri"/>
-              </a:rPr>
-              <a:t>What is the gradient of y = 4x - 7?</a:t>
-            </a:r>
-          </a:p>
-          <a:p>
-            <a:r>
-              <a:rPr sz="1800" b="1">
-                <a:solidFill>
-                  <a:srgbClr val="03306E"/>
-                </a:solidFill>
-                <a:latin typeface="Calibri"/>
-              </a:rPr>
-              <a:t>4.</a:t>
-            </a:r>
-          </a:p>
-        </p:txBody>
-      </p:sp>
-      <p:sp>
-        <p:nvSpPr>
-          <p:cNvPr id="10" name="Oval 9"/>
-          <p:cNvSpPr/>
-          <p:nvPr/>
-        </p:nvSpPr>
-        <p:spPr>
-          <a:xfrm>
-            <a:off x="548640" y="3531412"/>
-            <a:ext cx="411480" cy="411480"/>
-          </a:xfrm>
-          <a:prstGeom prst="ellipse">
-            <a:avLst/>
-          </a:prstGeom>
-          <a:solidFill>
-            <a:srgbClr val="F2B705"/>
-          </a:solidFill>
-          <a:ln>
-            <a:noFill/>
-          </a:ln>
-          <a:effectLst/>
-        </p:spPr>
-        <p:style>
-          <a:lnRef idx="1">
-            <a:schemeClr val="accent1"/>
-          </a:lnRef>
-          <a:fillRef idx="3">
-            <a:schemeClr val="accent1"/>
-          </a:fillRef>
-          <a:effectRef idx="2">
-            <a:schemeClr val="accent1"/>
-          </a:effectRef>
-          <a:fontRef idx="minor">
-            <a:schemeClr val="lt1"/>
-          </a:fontRef>
-        </p:style>
-        <p:txBody>
-          <a:bodyPr rtlCol="0" anchor="ctr" lIns="0" rIns="0" tIns="0" bIns="0"/>
-          <a:lstStyle/>
-          <a:p>
-            <a:pPr algn="ctr"/>
-            <a:r>
-              <a:rPr sz="1400" b="1">
-                <a:solidFill>
-                  <a:srgbClr val="202122"/>
-                </a:solidFill>
-                <a:latin typeface="Calibri"/>
-              </a:rPr>
-              <a:t>3</a:t>
-            </a:r>
-          </a:p>
-        </p:txBody>
-      </p:sp>
-      <p:sp>
-        <p:nvSpPr>
-          <p:cNvPr id="11" name="TextBox 10"/>
+              <a:rPr sz="1300" b="1" i="0">
+                <a:solidFill>
+                  <a:srgbClr val="A9C8F0"/>
+                </a:solidFill>
+                <a:latin typeface="Calibri"/>
+              </a:rPr>
+              <a:t>KEY IDEA</a:t>
+            </a:r>
+          </a:p>
+        </p:txBody>
+      </p:sp>
+      <p:sp>
+        <p:nvSpPr>
+          <p:cNvPr id="10" name="TextBox 9"/>
           <p:cNvSpPr txBox="1"/>
           <p:nvPr/>
         </p:nvSpPr>
         <p:spPr>
           <a:xfrm>
-            <a:off x="1234440" y="3513124"/>
-            <a:ext cx="10408615" cy="791870"/>
+            <a:off x="8046720" y="3017520"/>
+            <a:ext cx="3291840" cy="2926080"/>
           </a:xfrm>
           <a:prstGeom prst="rect">
             <a:avLst/>
@@ -7213,218 +10723,13 @@
           <a:p>
             <a:pPr algn="l"/>
             <a:r>
-              <a:rPr sz="1800" b="0" i="0">
-                <a:solidFill>
-                  <a:srgbClr val="54595D"/>
-                </a:solidFill>
-                <a:latin typeface="Calibri"/>
-              </a:rPr>
-              <a:t>Convert binary 1100 to decimal.</a:t>
-            </a:r>
-          </a:p>
-          <a:p>
-            <a:r>
-              <a:rPr sz="1800" b="1">
-                <a:solidFill>
-                  <a:srgbClr val="03306E"/>
-                </a:solidFill>
-                <a:latin typeface="Calibri"/>
-              </a:rPr>
-              <a:t>12.</a:t>
-            </a:r>
-          </a:p>
-        </p:txBody>
-      </p:sp>
-      <p:sp>
-        <p:nvSpPr>
-          <p:cNvPr id="12" name="Oval 11"/>
-          <p:cNvSpPr/>
-          <p:nvPr/>
-        </p:nvSpPr>
-        <p:spPr>
-          <a:xfrm>
-            <a:off x="548640" y="4487875"/>
-            <a:ext cx="411480" cy="411480"/>
-          </a:xfrm>
-          <a:prstGeom prst="ellipse">
-            <a:avLst/>
-          </a:prstGeom>
-          <a:solidFill>
-            <a:srgbClr val="F2B705"/>
-          </a:solidFill>
-          <a:ln>
-            <a:noFill/>
-          </a:ln>
-          <a:effectLst/>
-        </p:spPr>
-        <p:style>
-          <a:lnRef idx="1">
-            <a:schemeClr val="accent1"/>
-          </a:lnRef>
-          <a:fillRef idx="3">
-            <a:schemeClr val="accent1"/>
-          </a:fillRef>
-          <a:effectRef idx="2">
-            <a:schemeClr val="accent1"/>
-          </a:effectRef>
-          <a:fontRef idx="minor">
-            <a:schemeClr val="lt1"/>
-          </a:fontRef>
-        </p:style>
-        <p:txBody>
-          <a:bodyPr rtlCol="0" anchor="ctr" lIns="0" rIns="0" tIns="0" bIns="0"/>
-          <a:lstStyle/>
-          <a:p>
-            <a:pPr algn="ctr"/>
-            <a:r>
-              <a:rPr sz="1400" b="1">
-                <a:solidFill>
-                  <a:srgbClr val="202122"/>
-                </a:solidFill>
-                <a:latin typeface="Calibri"/>
-              </a:rPr>
-              <a:t>4</a:t>
-            </a:r>
-          </a:p>
-        </p:txBody>
-      </p:sp>
-      <p:sp>
-        <p:nvSpPr>
-          <p:cNvPr id="13" name="TextBox 12"/>
-          <p:cNvSpPr txBox="1"/>
-          <p:nvPr/>
-        </p:nvSpPr>
-        <p:spPr>
-          <a:xfrm>
-            <a:off x="1234440" y="4469587"/>
-            <a:ext cx="10408615" cy="791870"/>
-          </a:xfrm>
-          <a:prstGeom prst="rect">
-            <a:avLst/>
-          </a:prstGeom>
-          <a:noFill/>
-        </p:spPr>
-        <p:txBody>
-          <a:bodyPr wrap="square" anchor="t" lIns="0" rIns="0" tIns="0" bIns="0"/>
-          <a:lstStyle/>
-          <a:p>
-            <a:pPr algn="l"/>
-            <a:r>
-              <a:rPr sz="1800" b="0" i="0">
-                <a:solidFill>
-                  <a:srgbClr val="54595D"/>
-                </a:solidFill>
-                <a:latin typeface="Calibri"/>
-              </a:rPr>
-              <a:t>Find the mean of 12, 15, 18.</a:t>
-            </a:r>
-          </a:p>
-          <a:p>
-            <a:r>
-              <a:rPr sz="1800" b="1">
-                <a:solidFill>
-                  <a:srgbClr val="03306E"/>
-                </a:solidFill>
-                <a:latin typeface="Calibri"/>
-              </a:rPr>
-              <a:t>15.</a:t>
-            </a:r>
-          </a:p>
-        </p:txBody>
-      </p:sp>
-      <p:sp>
-        <p:nvSpPr>
-          <p:cNvPr id="14" name="Oval 13"/>
-          <p:cNvSpPr/>
-          <p:nvPr/>
-        </p:nvSpPr>
-        <p:spPr>
-          <a:xfrm>
-            <a:off x="548640" y="5444337"/>
-            <a:ext cx="411480" cy="411480"/>
-          </a:xfrm>
-          <a:prstGeom prst="ellipse">
-            <a:avLst/>
-          </a:prstGeom>
-          <a:solidFill>
-            <a:srgbClr val="F2B705"/>
-          </a:solidFill>
-          <a:ln>
-            <a:noFill/>
-          </a:ln>
-          <a:effectLst/>
-        </p:spPr>
-        <p:style>
-          <a:lnRef idx="1">
-            <a:schemeClr val="accent1"/>
-          </a:lnRef>
-          <a:fillRef idx="3">
-            <a:schemeClr val="accent1"/>
-          </a:fillRef>
-          <a:effectRef idx="2">
-            <a:schemeClr val="accent1"/>
-          </a:effectRef>
-          <a:fontRef idx="minor">
-            <a:schemeClr val="lt1"/>
-          </a:fontRef>
-        </p:style>
-        <p:txBody>
-          <a:bodyPr rtlCol="0" anchor="ctr" lIns="0" rIns="0" tIns="0" bIns="0"/>
-          <a:lstStyle/>
-          <a:p>
-            <a:pPr algn="ctr"/>
-            <a:r>
-              <a:rPr sz="1400" b="1">
-                <a:solidFill>
-                  <a:srgbClr val="202122"/>
-                </a:solidFill>
-                <a:latin typeface="Calibri"/>
-              </a:rPr>
-              <a:t>5</a:t>
-            </a:r>
-          </a:p>
-        </p:txBody>
-      </p:sp>
-      <p:sp>
-        <p:nvSpPr>
-          <p:cNvPr id="15" name="TextBox 14"/>
-          <p:cNvSpPr txBox="1"/>
-          <p:nvPr/>
-        </p:nvSpPr>
-        <p:spPr>
-          <a:xfrm>
-            <a:off x="1234440" y="5426049"/>
-            <a:ext cx="10408615" cy="791870"/>
-          </a:xfrm>
-          <a:prstGeom prst="rect">
-            <a:avLst/>
-          </a:prstGeom>
-          <a:noFill/>
-        </p:spPr>
-        <p:txBody>
-          <a:bodyPr wrap="square" anchor="t" lIns="0" rIns="0" tIns="0" bIns="0"/>
-          <a:lstStyle/>
-          <a:p>
-            <a:pPr algn="l"/>
-            <a:r>
-              <a:rPr sz="1800" b="0" i="0">
-                <a:solidFill>
-                  <a:srgbClr val="54595D"/>
-                </a:solidFill>
-                <a:latin typeface="Calibri"/>
-              </a:rPr>
-              <a:t>What is 180 degrees in radians?</a:t>
-            </a:r>
-          </a:p>
-          <a:p>
-            <a:r>
-              <a:rPr sz="1800" b="1">
-                <a:solidFill>
-                  <a:srgbClr val="03306E"/>
-                </a:solidFill>
-                <a:latin typeface="Calibri"/>
-              </a:rPr>
-              <a:t>Pi radians.</a:t>
+              <a:rPr sz="2200" b="0" i="0">
+                <a:solidFill>
+                  <a:srgbClr val="FFFFFF"/>
+                </a:solidFill>
+                <a:latin typeface="Cambria"/>
+              </a:rPr>
+              <a:t>Always write the formula, substitute with units, then round sensibly. Most marks are lost in the working, not the maths.</a:t>
             </a:r>
           </a:p>
         </p:txBody>
@@ -7516,7 +10821,7 @@
                 </a:solidFill>
                 <a:latin typeface="Cambria"/>
               </a:rPr>
-              <a:t>Activity: Maths in the workshop</a:t>
+              <a:t>Quick check: Worked examples</a:t>
             </a:r>
           </a:p>
         </p:txBody>
@@ -7589,19 +10894,17 @@
       </p:sp>
       <p:sp>
         <p:nvSpPr>
-          <p:cNvPr id="6" name="Rounded Rectangle 5"/>
+          <p:cNvPr id="6" name="Oval 5"/>
           <p:cNvSpPr/>
           <p:nvPr/>
         </p:nvSpPr>
         <p:spPr>
           <a:xfrm>
-            <a:off x="548640" y="1508760"/>
-            <a:ext cx="2011680" cy="457200"/>
-          </a:xfrm>
-          <a:prstGeom prst="roundRect">
-            <a:avLst>
-              <a:gd name="adj" fmla="val 50000"/>
-            </a:avLst>
+            <a:off x="548640" y="1691640"/>
+            <a:ext cx="502920" cy="502920"/>
+          </a:xfrm>
+          <a:prstGeom prst="ellipse">
+            <a:avLst/>
           </a:prstGeom>
           <a:solidFill>
             <a:srgbClr val="F2B705"/>
@@ -7626,9 +10929,20 @@
           </a:fontRef>
         </p:style>
         <p:txBody>
-          <a:bodyPr rtlCol="0" anchor="ctr"/>
-          <a:lstStyle/>
-          <a:p/>
+          <a:bodyPr rtlCol="0" anchor="ctr" lIns="0" rIns="0" tIns="0" bIns="0"/>
+          <a:lstStyle/>
+          <a:p>
+            <a:pPr algn="ctr"/>
+            <a:r>
+              <a:rPr sz="1600" b="1">
+                <a:solidFill>
+                  <a:srgbClr val="202122"/>
+                </a:solidFill>
+                <a:latin typeface="Calibri"/>
+              </a:rPr>
+              <a:t>1</a:t>
+            </a:r>
+          </a:p>
         </p:txBody>
       </p:sp>
       <p:sp>
@@ -7639,8 +10953,8 @@
         </p:nvSpPr>
         <p:spPr>
           <a:xfrm>
-            <a:off x="548640" y="1508760"/>
-            <a:ext cx="2011680" cy="457200"/>
+            <a:off x="1371600" y="1645920"/>
+            <a:ext cx="10271455" cy="1188720"/>
           </a:xfrm>
           <a:prstGeom prst="rect">
             <a:avLst/>
@@ -7648,71 +10962,38 @@
           <a:noFill/>
         </p:spPr>
         <p:txBody>
-          <a:bodyPr wrap="square" anchor="ctr" lIns="0" rIns="0" tIns="0" bIns="0"/>
-          <a:lstStyle/>
-          <a:p>
-            <a:pPr algn="ctr"/>
-            <a:r>
-              <a:rPr sz="1400" b="1" i="0">
+          <a:bodyPr wrap="square" anchor="t" lIns="0" rIns="0" tIns="0" bIns="0"/>
+          <a:lstStyle/>
+          <a:p>
+            <a:pPr algn="l"/>
+            <a:r>
+              <a:rPr sz="2400" b="0" i="0">
                 <a:solidFill>
                   <a:srgbClr val="202122"/>
                 </a:solidFill>
                 <a:latin typeface="Calibri"/>
               </a:rPr>
-              <a:t>30 minutes</a:t>
-            </a:r>
-          </a:p>
-        </p:txBody>
-      </p:sp>
-      <p:sp>
-        <p:nvSpPr>
-          <p:cNvPr id="8" name="TextBox 7"/>
-          <p:cNvSpPr txBox="1"/>
-          <p:nvPr/>
-        </p:nvSpPr>
-        <p:spPr>
-          <a:xfrm>
-            <a:off x="2743200" y="1508760"/>
-            <a:ext cx="4754880" cy="457200"/>
-          </a:xfrm>
-          <a:prstGeom prst="rect">
-            <a:avLst/>
-          </a:prstGeom>
-          <a:noFill/>
-        </p:spPr>
-        <p:txBody>
-          <a:bodyPr wrap="square" anchor="ctr" lIns="0" rIns="0" tIns="0" bIns="0"/>
-          <a:lstStyle/>
-          <a:p>
-            <a:pPr algn="l"/>
-            <a:r>
-              <a:rPr sz="1400" b="0" i="1">
-                <a:solidFill>
-                  <a:srgbClr val="54595D"/>
-                </a:solidFill>
-                <a:latin typeface="Calibri"/>
-              </a:rPr>
-              <a:t>Pairs</a:t>
-            </a:r>
-          </a:p>
-        </p:txBody>
-      </p:sp>
-      <p:sp>
-        <p:nvSpPr>
-          <p:cNvPr id="9" name="Oval 8"/>
+              <a:t>Write 0.0072 in standard form.</a:t>
+            </a:r>
+          </a:p>
+        </p:txBody>
+      </p:sp>
+      <p:sp>
+        <p:nvSpPr>
+          <p:cNvPr id="8" name="Oval 7"/>
           <p:cNvSpPr/>
           <p:nvPr/>
         </p:nvSpPr>
         <p:spPr>
           <a:xfrm>
-            <a:off x="548640" y="2482596"/>
-            <a:ext cx="384048" cy="384048"/>
+            <a:off x="548640" y="3108960"/>
+            <a:ext cx="502920" cy="502920"/>
           </a:xfrm>
           <a:prstGeom prst="ellipse">
             <a:avLst/>
           </a:prstGeom>
           <a:solidFill>
-            <a:srgbClr val="0645AD"/>
+            <a:srgbClr val="F2B705"/>
           </a:solidFill>
           <a:ln>
             <a:noFill/>
@@ -7739,27 +11020,27 @@
           <a:p>
             <a:pPr algn="ctr"/>
             <a:r>
-              <a:rPr sz="1300" b="1">
-                <a:solidFill>
-                  <a:srgbClr val="FFFFFF"/>
-                </a:solidFill>
-                <a:latin typeface="Calibri"/>
-              </a:rPr>
-              <a:t>1</a:t>
-            </a:r>
-          </a:p>
-        </p:txBody>
-      </p:sp>
-      <p:sp>
-        <p:nvSpPr>
-          <p:cNvPr id="10" name="TextBox 9"/>
+              <a:rPr sz="1600" b="1">
+                <a:solidFill>
+                  <a:srgbClr val="202122"/>
+                </a:solidFill>
+                <a:latin typeface="Calibri"/>
+              </a:rPr>
+              <a:t>2</a:t>
+            </a:r>
+          </a:p>
+        </p:txBody>
+      </p:sp>
+      <p:sp>
+        <p:nvSpPr>
+          <p:cNvPr id="9" name="TextBox 8"/>
           <p:cNvSpPr txBox="1"/>
           <p:nvPr/>
         </p:nvSpPr>
         <p:spPr>
           <a:xfrm>
-            <a:off x="1143000" y="2240280"/>
-            <a:ext cx="5943600" cy="868680"/>
+            <a:off x="1371600" y="3063240"/>
+            <a:ext cx="10271455" cy="1188720"/>
           </a:xfrm>
           <a:prstGeom prst="rect">
             <a:avLst/>
@@ -7767,38 +11048,38 @@
           <a:noFill/>
         </p:spPr>
         <p:txBody>
-          <a:bodyPr wrap="square" anchor="ctr" lIns="0" rIns="0" tIns="0" bIns="0"/>
+          <a:bodyPr wrap="square" anchor="t" lIns="0" rIns="0" tIns="0" bIns="0"/>
           <a:lstStyle/>
           <a:p>
             <a:pPr algn="l"/>
             <a:r>
-              <a:rPr sz="1700" b="0" i="0">
+              <a:rPr sz="2400" b="0" i="0">
                 <a:solidFill>
                   <a:srgbClr val="202122"/>
                 </a:solidFill>
                 <a:latin typeface="Calibri"/>
               </a:rPr>
-              <a:t>Work through the six engineering problems from your teacher (one per toolkit area).</a:t>
-            </a:r>
-          </a:p>
-        </p:txBody>
-      </p:sp>
-      <p:sp>
-        <p:nvSpPr>
-          <p:cNvPr id="11" name="Oval 10"/>
+              <a:t>What is the volume formula for a cylinder?</a:t>
+            </a:r>
+          </a:p>
+        </p:txBody>
+      </p:sp>
+      <p:sp>
+        <p:nvSpPr>
+          <p:cNvPr id="10" name="Oval 9"/>
           <p:cNvSpPr/>
           <p:nvPr/>
         </p:nvSpPr>
         <p:spPr>
           <a:xfrm>
-            <a:off x="548640" y="3461004"/>
-            <a:ext cx="384048" cy="384048"/>
+            <a:off x="548640" y="4526280"/>
+            <a:ext cx="502920" cy="502920"/>
           </a:xfrm>
           <a:prstGeom prst="ellipse">
             <a:avLst/>
           </a:prstGeom>
           <a:solidFill>
-            <a:srgbClr val="0645AD"/>
+            <a:srgbClr val="F2B705"/>
           </a:solidFill>
           <a:ln>
             <a:noFill/>
@@ -7825,13 +11106,46 @@
           <a:p>
             <a:pPr algn="ctr"/>
             <a:r>
-              <a:rPr sz="1300" b="1">
-                <a:solidFill>
-                  <a:srgbClr val="FFFFFF"/>
-                </a:solidFill>
-                <a:latin typeface="Calibri"/>
-              </a:rPr>
-              <a:t>2</a:t>
+              <a:rPr sz="1600" b="1">
+                <a:solidFill>
+                  <a:srgbClr val="202122"/>
+                </a:solidFill>
+                <a:latin typeface="Calibri"/>
+              </a:rPr>
+              <a:t>3</a:t>
+            </a:r>
+          </a:p>
+        </p:txBody>
+      </p:sp>
+      <p:sp>
+        <p:nvSpPr>
+          <p:cNvPr id="11" name="TextBox 10"/>
+          <p:cNvSpPr txBox="1"/>
+          <p:nvPr/>
+        </p:nvSpPr>
+        <p:spPr>
+          <a:xfrm>
+            <a:off x="1371600" y="4480560"/>
+            <a:ext cx="10271455" cy="1188720"/>
+          </a:xfrm>
+          <a:prstGeom prst="rect">
+            <a:avLst/>
+          </a:prstGeom>
+          <a:noFill/>
+        </p:spPr>
+        <p:txBody>
+          <a:bodyPr wrap="square" anchor="t" lIns="0" rIns="0" tIns="0" bIns="0"/>
+          <a:lstStyle/>
+          <a:p>
+            <a:pPr algn="l"/>
+            <a:r>
+              <a:rPr sz="2400" b="0" i="0">
+                <a:solidFill>
+                  <a:srgbClr val="202122"/>
+                </a:solidFill>
+                <a:latin typeface="Calibri"/>
+              </a:rPr>
+              <a:t>When can you use Pythagoras?</a:t>
             </a:r>
           </a:p>
         </p:txBody>
@@ -7844,8 +11158,8 @@
         </p:nvSpPr>
         <p:spPr>
           <a:xfrm>
-            <a:off x="1143000" y="3218688"/>
-            <a:ext cx="5943600" cy="868680"/>
+            <a:off x="548640" y="5852160"/>
+            <a:ext cx="11094415" cy="365760"/>
           </a:xfrm>
           <a:prstGeom prst="rect">
             <a:avLst/>
@@ -7853,353 +11167,18 @@
           <a:noFill/>
         </p:spPr>
         <p:txBody>
-          <a:bodyPr wrap="square" anchor="ctr" lIns="0" rIns="0" tIns="0" bIns="0"/>
+          <a:bodyPr wrap="square" anchor="t" lIns="0" rIns="0" tIns="0" bIns="0"/>
           <a:lstStyle/>
           <a:p>
             <a:pPr algn="l"/>
             <a:r>
-              <a:rPr sz="1700" b="0" i="0">
-                <a:solidFill>
-                  <a:srgbClr val="202122"/>
-                </a:solidFill>
-                <a:latin typeface="Calibri"/>
-              </a:rPr>
-              <a:t>Show the formula, substitution and units every time.</a:t>
-            </a:r>
-          </a:p>
-        </p:txBody>
-      </p:sp>
-      <p:sp>
-        <p:nvSpPr>
-          <p:cNvPr id="13" name="Oval 12"/>
-          <p:cNvSpPr/>
-          <p:nvPr/>
-        </p:nvSpPr>
-        <p:spPr>
-          <a:xfrm>
-            <a:off x="548640" y="4439412"/>
-            <a:ext cx="384048" cy="384048"/>
-          </a:xfrm>
-          <a:prstGeom prst="ellipse">
-            <a:avLst/>
-          </a:prstGeom>
-          <a:solidFill>
-            <a:srgbClr val="0645AD"/>
-          </a:solidFill>
-          <a:ln>
-            <a:noFill/>
-          </a:ln>
-          <a:effectLst/>
-        </p:spPr>
-        <p:style>
-          <a:lnRef idx="1">
-            <a:schemeClr val="accent1"/>
-          </a:lnRef>
-          <a:fillRef idx="3">
-            <a:schemeClr val="accent1"/>
-          </a:fillRef>
-          <a:effectRef idx="2">
-            <a:schemeClr val="accent1"/>
-          </a:effectRef>
-          <a:fontRef idx="minor">
-            <a:schemeClr val="lt1"/>
-          </a:fontRef>
-        </p:style>
-        <p:txBody>
-          <a:bodyPr rtlCol="0" anchor="ctr" lIns="0" rIns="0" tIns="0" bIns="0"/>
-          <a:lstStyle/>
-          <a:p>
-            <a:pPr algn="ctr"/>
-            <a:r>
-              <a:rPr sz="1300" b="1">
-                <a:solidFill>
-                  <a:srgbClr val="FFFFFF"/>
-                </a:solidFill>
-                <a:latin typeface="Calibri"/>
-              </a:rPr>
-              <a:t>3</a:t>
-            </a:r>
-          </a:p>
-        </p:txBody>
-      </p:sp>
-      <p:sp>
-        <p:nvSpPr>
-          <p:cNvPr id="14" name="TextBox 13"/>
-          <p:cNvSpPr txBox="1"/>
-          <p:nvPr/>
-        </p:nvSpPr>
-        <p:spPr>
-          <a:xfrm>
-            <a:off x="1143000" y="4197096"/>
-            <a:ext cx="5943600" cy="868680"/>
-          </a:xfrm>
-          <a:prstGeom prst="rect">
-            <a:avLst/>
-          </a:prstGeom>
-          <a:noFill/>
-        </p:spPr>
-        <p:txBody>
-          <a:bodyPr wrap="square" anchor="ctr" lIns="0" rIns="0" tIns="0" bIns="0"/>
-          <a:lstStyle/>
-          <a:p>
-            <a:pPr algn="l"/>
-            <a:r>
-              <a:rPr sz="1700" b="0" i="0">
-                <a:solidFill>
-                  <a:srgbClr val="202122"/>
-                </a:solidFill>
-                <a:latin typeface="Calibri"/>
-              </a:rPr>
-              <a:t>Check each answer with a partner.</a:t>
-            </a:r>
-          </a:p>
-        </p:txBody>
-      </p:sp>
-      <p:sp>
-        <p:nvSpPr>
-          <p:cNvPr id="15" name="Oval 14"/>
-          <p:cNvSpPr/>
-          <p:nvPr/>
-        </p:nvSpPr>
-        <p:spPr>
-          <a:xfrm>
-            <a:off x="548640" y="5417820"/>
-            <a:ext cx="384048" cy="384048"/>
-          </a:xfrm>
-          <a:prstGeom prst="ellipse">
-            <a:avLst/>
-          </a:prstGeom>
-          <a:solidFill>
-            <a:srgbClr val="0645AD"/>
-          </a:solidFill>
-          <a:ln>
-            <a:noFill/>
-          </a:ln>
-          <a:effectLst/>
-        </p:spPr>
-        <p:style>
-          <a:lnRef idx="1">
-            <a:schemeClr val="accent1"/>
-          </a:lnRef>
-          <a:fillRef idx="3">
-            <a:schemeClr val="accent1"/>
-          </a:fillRef>
-          <a:effectRef idx="2">
-            <a:schemeClr val="accent1"/>
-          </a:effectRef>
-          <a:fontRef idx="minor">
-            <a:schemeClr val="lt1"/>
-          </a:fontRef>
-        </p:style>
-        <p:txBody>
-          <a:bodyPr rtlCol="0" anchor="ctr" lIns="0" rIns="0" tIns="0" bIns="0"/>
-          <a:lstStyle/>
-          <a:p>
-            <a:pPr algn="ctr"/>
-            <a:r>
-              <a:rPr sz="1300" b="1">
-                <a:solidFill>
-                  <a:srgbClr val="FFFFFF"/>
-                </a:solidFill>
-                <a:latin typeface="Calibri"/>
-              </a:rPr>
-              <a:t>4</a:t>
-            </a:r>
-          </a:p>
-        </p:txBody>
-      </p:sp>
-      <p:sp>
-        <p:nvSpPr>
-          <p:cNvPr id="16" name="TextBox 15"/>
-          <p:cNvSpPr txBox="1"/>
-          <p:nvPr/>
-        </p:nvSpPr>
-        <p:spPr>
-          <a:xfrm>
-            <a:off x="1143000" y="5175504"/>
-            <a:ext cx="5943600" cy="868680"/>
-          </a:xfrm>
-          <a:prstGeom prst="rect">
-            <a:avLst/>
-          </a:prstGeom>
-          <a:noFill/>
-        </p:spPr>
-        <p:txBody>
-          <a:bodyPr wrap="square" anchor="ctr" lIns="0" rIns="0" tIns="0" bIns="0"/>
-          <a:lstStyle/>
-          <a:p>
-            <a:pPr algn="l"/>
-            <a:r>
-              <a:rPr sz="1700" b="0" i="0">
-                <a:solidFill>
-                  <a:srgbClr val="202122"/>
-                </a:solidFill>
-                <a:latin typeface="Calibri"/>
-              </a:rPr>
-              <a:t>Convert three sensor readings from binary to decimal and hex.</a:t>
-            </a:r>
-          </a:p>
-        </p:txBody>
-      </p:sp>
-      <p:sp>
-        <p:nvSpPr>
-          <p:cNvPr id="17" name="Rounded Rectangle 16"/>
-          <p:cNvSpPr/>
-          <p:nvPr/>
-        </p:nvSpPr>
-        <p:spPr>
-          <a:xfrm>
-            <a:off x="7772400" y="1508760"/>
-            <a:ext cx="3867912" cy="4572000"/>
-          </a:xfrm>
-          <a:prstGeom prst="roundRect">
-            <a:avLst>
-              <a:gd name="adj" fmla="val 8000"/>
-            </a:avLst>
-          </a:prstGeom>
-          <a:solidFill>
-            <a:srgbClr val="EAF3FF"/>
-          </a:solidFill>
-          <a:ln>
-            <a:noFill/>
-          </a:ln>
-          <a:effectLst/>
-        </p:spPr>
-        <p:style>
-          <a:lnRef idx="1">
-            <a:schemeClr val="accent1"/>
-          </a:lnRef>
-          <a:fillRef idx="3">
-            <a:schemeClr val="accent1"/>
-          </a:fillRef>
-          <a:effectRef idx="2">
-            <a:schemeClr val="accent1"/>
-          </a:effectRef>
-          <a:fontRef idx="minor">
-            <a:schemeClr val="lt1"/>
-          </a:fontRef>
-        </p:style>
-        <p:txBody>
-          <a:bodyPr rtlCol="0" anchor="ctr"/>
-          <a:lstStyle/>
-          <a:p/>
-        </p:txBody>
-      </p:sp>
-      <p:sp>
-        <p:nvSpPr>
-          <p:cNvPr id="18" name="TextBox 17"/>
-          <p:cNvSpPr txBox="1"/>
-          <p:nvPr/>
-        </p:nvSpPr>
-        <p:spPr>
-          <a:xfrm>
-            <a:off x="8046720" y="1737360"/>
-            <a:ext cx="3291840" cy="365760"/>
-          </a:xfrm>
-          <a:prstGeom prst="rect">
-            <a:avLst/>
-          </a:prstGeom>
-          <a:noFill/>
-        </p:spPr>
-        <p:txBody>
-          <a:bodyPr wrap="square" anchor="t" lIns="0" rIns="0" tIns="0" bIns="0"/>
-          <a:lstStyle/>
-          <a:p>
-            <a:pPr algn="l"/>
-            <a:r>
-              <a:rPr sz="1300" b="1" i="0">
-                <a:solidFill>
-                  <a:srgbClr val="0645AD"/>
-                </a:solidFill>
-                <a:latin typeface="Calibri"/>
-              </a:rPr>
-              <a:t>SUCCESS CRITERIA</a:t>
-            </a:r>
-          </a:p>
-        </p:txBody>
-      </p:sp>
-      <p:sp>
-        <p:nvSpPr>
-          <p:cNvPr id="19" name="TextBox 18"/>
-          <p:cNvSpPr txBox="1"/>
-          <p:nvPr/>
-        </p:nvSpPr>
-        <p:spPr>
-          <a:xfrm>
-            <a:off x="8046720" y="2240280"/>
-            <a:ext cx="3337560" cy="3657600"/>
-          </a:xfrm>
-          <a:prstGeom prst="rect">
-            <a:avLst/>
-          </a:prstGeom>
-          <a:noFill/>
-        </p:spPr>
-        <p:txBody>
-          <a:bodyPr wrap="square" lIns="0" rIns="0" tIns="0" bIns="0">
-            <a:spAutoFit/>
-          </a:bodyPr>
-          <a:lstStyle/>
-          <a:p>
-            <a:pPr marL="274320" indent="-274320">
-              <a:spcAft>
-                <a:spcPts val="810"/>
-              </a:spcAft>
-              <a:buClr>
-                <a:srgbClr val="0645AD"/>
-              </a:buClr>
-              <a:buFont typeface="Arial"/>
-              <a:buChar char="•"/>
-            </a:pPr>
-            <a:r>
-              <a:rPr sz="1800" b="0">
-                <a:solidFill>
-                  <a:srgbClr val="202122"/>
-                </a:solidFill>
-                <a:latin typeface="Calibri"/>
-              </a:rPr>
-              <a:t>Working shown clearly</a:t>
-            </a:r>
-          </a:p>
-          <a:p>
-            <a:pPr marL="274320" indent="-274320">
-              <a:spcAft>
-                <a:spcPts val="810"/>
-              </a:spcAft>
-              <a:buClr>
-                <a:srgbClr val="0645AD"/>
-              </a:buClr>
-              <a:buFont typeface="Arial"/>
-              <a:buChar char="•"/>
-            </a:pPr>
-            <a:r>
-              <a:rPr sz="1800" b="0">
-                <a:solidFill>
-                  <a:srgbClr val="202122"/>
-                </a:solidFill>
-                <a:latin typeface="Calibri"/>
-              </a:rPr>
-              <a:t>Correct units</a:t>
-            </a:r>
-          </a:p>
-          <a:p>
-            <a:pPr marL="274320" indent="-274320">
-              <a:spcAft>
-                <a:spcPts val="810"/>
-              </a:spcAft>
-              <a:buClr>
-                <a:srgbClr val="0645AD"/>
-              </a:buClr>
-              <a:buFont typeface="Arial"/>
-              <a:buChar char="•"/>
-            </a:pPr>
-            <a:r>
-              <a:rPr sz="1800" b="0">
-                <a:solidFill>
-                  <a:srgbClr val="202122"/>
-                </a:solidFill>
-                <a:latin typeface="Calibri"/>
-              </a:rPr>
-              <a:t>Conversions correct</a:t>
+              <a:rPr sz="1300" b="0" i="1">
+                <a:solidFill>
+                  <a:srgbClr val="54595D"/>
+                </a:solidFill>
+                <a:latin typeface="Calibri"/>
+              </a:rPr>
+              <a:t>Answer on mini whiteboards or in your book. Answers are in the speaker notes.</a:t>
             </a:r>
           </a:p>
         </p:txBody>
@@ -8218,7 +11197,7 @@
     <p:bg>
       <p:bgPr>
         <a:solidFill>
-          <a:srgbClr val="03306E"/>
+          <a:srgbClr val="FFFFFF"/>
         </a:solidFill>
         <a:effectLst/>
       </p:bgPr>
@@ -8254,7 +11233,7 @@
             <a:r>
               <a:rPr sz="1100" b="1" i="0">
                 <a:solidFill>
-                  <a:srgbClr val="A9C8F0"/>
+                  <a:srgbClr val="54595D"/>
                 </a:solidFill>
                 <a:latin typeface="Calibri"/>
               </a:rPr>
@@ -8287,25 +11266,190 @@
             <a:r>
               <a:rPr sz="3200" b="1" i="0">
                 <a:solidFill>
-                  <a:srgbClr val="FFFFFF"/>
+                  <a:srgbClr val="03306E"/>
                 </a:solidFill>
                 <a:latin typeface="Cambria"/>
               </a:rPr>
-              <a:t>Exit ticket</a:t>
-            </a:r>
-          </a:p>
-        </p:txBody>
-      </p:sp>
-      <p:sp>
-        <p:nvSpPr>
-          <p:cNvPr id="4" name="Oval 3"/>
+              <a:t>Number systems</a:t>
+            </a:r>
+          </a:p>
+        </p:txBody>
+      </p:sp>
+      <p:sp>
+        <p:nvSpPr>
+          <p:cNvPr id="4" name="TextBox 3"/>
+          <p:cNvSpPr txBox="1"/>
+          <p:nvPr/>
+        </p:nvSpPr>
+        <p:spPr>
+          <a:xfrm>
+            <a:off x="548640" y="6446520"/>
+            <a:ext cx="8229600" cy="274320"/>
+          </a:xfrm>
+          <a:prstGeom prst="rect">
+            <a:avLst/>
+          </a:prstGeom>
+          <a:noFill/>
+        </p:spPr>
+        <p:txBody>
+          <a:bodyPr wrap="square" anchor="t" lIns="0" rIns="0" tIns="0" bIns="0"/>
+          <a:lstStyle/>
+          <a:p>
+            <a:pPr algn="l"/>
+            <a:r>
+              <a:rPr sz="1000" b="0" i="0">
+                <a:solidFill>
+                  <a:srgbClr val="54595D"/>
+                </a:solidFill>
+                <a:latin typeface="Calibri"/>
+              </a:rPr>
+              <a:t>Design and Development for Engineering and Manufacturing T Level  ·  Essential Mathematics for Engineering</a:t>
+            </a:r>
+          </a:p>
+        </p:txBody>
+      </p:sp>
+      <p:sp>
+        <p:nvSpPr>
+          <p:cNvPr id="5" name="TextBox 4"/>
+          <p:cNvSpPr txBox="1"/>
+          <p:nvPr/>
+        </p:nvSpPr>
+        <p:spPr>
+          <a:xfrm>
+            <a:off x="10728655" y="6446520"/>
+            <a:ext cx="914400" cy="274320"/>
+          </a:xfrm>
+          <a:prstGeom prst="rect">
+            <a:avLst/>
+          </a:prstGeom>
+          <a:noFill/>
+        </p:spPr>
+        <p:txBody>
+          <a:bodyPr wrap="square" anchor="t" lIns="0" rIns="0" tIns="0" bIns="0"/>
+          <a:lstStyle/>
+          <a:p>
+            <a:pPr algn="r"/>
+            <a:r>
+              <a:rPr sz="1000" b="0" i="0">
+                <a:solidFill>
+                  <a:srgbClr val="54595D"/>
+                </a:solidFill>
+                <a:latin typeface="Calibri"/>
+              </a:rPr>
+              <a:t>9</a:t>
+            </a:r>
+          </a:p>
+        </p:txBody>
+      </p:sp>
+      <p:sp>
+        <p:nvSpPr>
+          <p:cNvPr id="6" name="TextBox 5"/>
+          <p:cNvSpPr txBox="1"/>
+          <p:nvPr/>
+        </p:nvSpPr>
+        <p:spPr>
+          <a:xfrm>
+            <a:off x="548640" y="1554480"/>
+            <a:ext cx="6720840" cy="4617720"/>
+          </a:xfrm>
+          <a:prstGeom prst="rect">
+            <a:avLst/>
+          </a:prstGeom>
+          <a:noFill/>
+        </p:spPr>
+        <p:txBody>
+          <a:bodyPr wrap="square" lIns="0" rIns="0" tIns="0" bIns="0">
+            <a:spAutoFit/>
+          </a:bodyPr>
+          <a:lstStyle/>
+          <a:p>
+            <a:pPr>
+              <a:spcAft>
+                <a:spcPts val="1320"/>
+              </a:spcAft>
+            </a:pPr>
+            <a:r>
+              <a:rPr sz="2200" b="0">
+                <a:solidFill>
+                  <a:srgbClr val="202122"/>
+                </a:solidFill>
+                <a:latin typeface="Calibri"/>
+              </a:rPr>
+              <a:t>Decimal (base 10) is used every day. Binary (base 2) uses only 0 and 1, matching the on and off states of digital electronics, so PLCs, sensors and control systems work in binary. Hexadecimal (base 16) uses 0 to 9 and A to F; each hex digit stands for four binary digits, so it's a compact way to write binary, used for memory addresses and machine codes.</a:t>
+            </a:r>
+          </a:p>
+          <a:p>
+            <a:pPr>
+              <a:spcAft>
+                <a:spcPts val="1320"/>
+              </a:spcAft>
+            </a:pPr>
+            <a:r>
+              <a:rPr sz="2200" b="0">
+                <a:solidFill>
+                  <a:srgbClr val="202122"/>
+                </a:solidFill>
+                <a:latin typeface="Calibri"/>
+              </a:rPr>
+              <a:t>To convert binary to decimal, add the place values of the 1s: 8, 4, 2, 1 from the left for four bits.</a:t>
+            </a:r>
+          </a:p>
+        </p:txBody>
+      </p:sp>
+      <p:sp>
+        <p:nvSpPr>
+          <p:cNvPr id="7" name="Rounded Rectangle 6"/>
           <p:cNvSpPr/>
           <p:nvPr/>
         </p:nvSpPr>
         <p:spPr>
           <a:xfrm>
-            <a:off x="548640" y="1737360"/>
-            <a:ext cx="502920" cy="502920"/>
+            <a:off x="7772400" y="1554480"/>
+            <a:ext cx="3867912" cy="4526280"/>
+          </a:xfrm>
+          <a:prstGeom prst="roundRect">
+            <a:avLst>
+              <a:gd name="adj" fmla="val 8000"/>
+            </a:avLst>
+          </a:prstGeom>
+          <a:solidFill>
+            <a:srgbClr val="03306E"/>
+          </a:solidFill>
+          <a:ln>
+            <a:noFill/>
+          </a:ln>
+          <a:effectLst/>
+        </p:spPr>
+        <p:style>
+          <a:lnRef idx="1">
+            <a:schemeClr val="accent1"/>
+          </a:lnRef>
+          <a:fillRef idx="3">
+            <a:schemeClr val="accent1"/>
+          </a:fillRef>
+          <a:effectRef idx="2">
+            <a:schemeClr val="accent1"/>
+          </a:effectRef>
+          <a:fontRef idx="minor">
+            <a:schemeClr val="lt1"/>
+          </a:fontRef>
+        </p:style>
+        <p:txBody>
+          <a:bodyPr rtlCol="0" anchor="ctr"/>
+          <a:lstStyle/>
+          <a:p/>
+        </p:txBody>
+      </p:sp>
+      <p:sp>
+        <p:nvSpPr>
+          <p:cNvPr id="8" name="Oval 7"/>
+          <p:cNvSpPr/>
+          <p:nvPr/>
+        </p:nvSpPr>
+        <p:spPr>
+          <a:xfrm>
+            <a:off x="8046720" y="1828800"/>
+            <a:ext cx="548640" cy="548640"/>
           </a:xfrm>
           <a:prstGeom prst="ellipse">
             <a:avLst/>
@@ -8338,185 +11482,13 @@
           <a:p>
             <a:pPr algn="ctr"/>
             <a:r>
-              <a:rPr sz="1700" b="1">
+              <a:rPr sz="1300" b="1">
                 <a:solidFill>
                   <a:srgbClr val="202122"/>
                 </a:solidFill>
                 <a:latin typeface="Calibri"/>
               </a:rPr>
-              <a:t>1</a:t>
-            </a:r>
-          </a:p>
-        </p:txBody>
-      </p:sp>
-      <p:sp>
-        <p:nvSpPr>
-          <p:cNvPr id="5" name="TextBox 4"/>
-          <p:cNvSpPr txBox="1"/>
-          <p:nvPr/>
-        </p:nvSpPr>
-        <p:spPr>
-          <a:xfrm>
-            <a:off x="1325880" y="1645920"/>
-            <a:ext cx="6583680" cy="822960"/>
-          </a:xfrm>
-          <a:prstGeom prst="rect">
-            <a:avLst/>
-          </a:prstGeom>
-          <a:noFill/>
-        </p:spPr>
-        <p:txBody>
-          <a:bodyPr wrap="square" anchor="ctr" lIns="0" rIns="0" tIns="0" bIns="0"/>
-          <a:lstStyle/>
-          <a:p>
-            <a:pPr algn="l"/>
-            <a:r>
-              <a:rPr sz="2000" b="0" i="0">
-                <a:solidFill>
-                  <a:srgbClr val="FFFFFF"/>
-                </a:solidFill>
-                <a:latin typeface="Calibri"/>
-              </a:rPr>
-              <a:t>Which area of maths do you find hardest?</a:t>
-            </a:r>
-          </a:p>
-        </p:txBody>
-      </p:sp>
-      <p:sp>
-        <p:nvSpPr>
-          <p:cNvPr id="6" name="Oval 5"/>
-          <p:cNvSpPr/>
-          <p:nvPr/>
-        </p:nvSpPr>
-        <p:spPr>
-          <a:xfrm>
-            <a:off x="548640" y="2697480"/>
-            <a:ext cx="502920" cy="502920"/>
-          </a:xfrm>
-          <a:prstGeom prst="ellipse">
-            <a:avLst/>
-          </a:prstGeom>
-          <a:solidFill>
-            <a:srgbClr val="F2B705"/>
-          </a:solidFill>
-          <a:ln>
-            <a:noFill/>
-          </a:ln>
-          <a:effectLst/>
-        </p:spPr>
-        <p:style>
-          <a:lnRef idx="1">
-            <a:schemeClr val="accent1"/>
-          </a:lnRef>
-          <a:fillRef idx="3">
-            <a:schemeClr val="accent1"/>
-          </a:fillRef>
-          <a:effectRef idx="2">
-            <a:schemeClr val="accent1"/>
-          </a:effectRef>
-          <a:fontRef idx="minor">
-            <a:schemeClr val="lt1"/>
-          </a:fontRef>
-        </p:style>
-        <p:txBody>
-          <a:bodyPr rtlCol="0" anchor="ctr" lIns="0" rIns="0" tIns="0" bIns="0"/>
-          <a:lstStyle/>
-          <a:p>
-            <a:pPr algn="ctr"/>
-            <a:r>
-              <a:rPr sz="1700" b="1">
-                <a:solidFill>
-                  <a:srgbClr val="202122"/>
-                </a:solidFill>
-                <a:latin typeface="Calibri"/>
-              </a:rPr>
-              <a:t>2</a:t>
-            </a:r>
-          </a:p>
-        </p:txBody>
-      </p:sp>
-      <p:sp>
-        <p:nvSpPr>
-          <p:cNvPr id="7" name="TextBox 6"/>
-          <p:cNvSpPr txBox="1"/>
-          <p:nvPr/>
-        </p:nvSpPr>
-        <p:spPr>
-          <a:xfrm>
-            <a:off x="1325880" y="2606040"/>
-            <a:ext cx="6583680" cy="822960"/>
-          </a:xfrm>
-          <a:prstGeom prst="rect">
-            <a:avLst/>
-          </a:prstGeom>
-          <a:noFill/>
-        </p:spPr>
-        <p:txBody>
-          <a:bodyPr wrap="square" anchor="ctr" lIns="0" rIns="0" tIns="0" bIns="0"/>
-          <a:lstStyle/>
-          <a:p>
-            <a:pPr algn="l"/>
-            <a:r>
-              <a:rPr sz="2000" b="0" i="0">
-                <a:solidFill>
-                  <a:srgbClr val="FFFFFF"/>
-                </a:solidFill>
-                <a:latin typeface="Calibri"/>
-              </a:rPr>
-              <a:t>Why do engineers use standard form?</a:t>
-            </a:r>
-          </a:p>
-        </p:txBody>
-      </p:sp>
-      <p:sp>
-        <p:nvSpPr>
-          <p:cNvPr id="8" name="Oval 7"/>
-          <p:cNvSpPr/>
-          <p:nvPr/>
-        </p:nvSpPr>
-        <p:spPr>
-          <a:xfrm>
-            <a:off x="548640" y="3657600"/>
-            <a:ext cx="502920" cy="502920"/>
-          </a:xfrm>
-          <a:prstGeom prst="ellipse">
-            <a:avLst/>
-          </a:prstGeom>
-          <a:solidFill>
-            <a:srgbClr val="F2B705"/>
-          </a:solidFill>
-          <a:ln>
-            <a:noFill/>
-          </a:ln>
-          <a:effectLst/>
-        </p:spPr>
-        <p:style>
-          <a:lnRef idx="1">
-            <a:schemeClr val="accent1"/>
-          </a:lnRef>
-          <a:fillRef idx="3">
-            <a:schemeClr val="accent1"/>
-          </a:fillRef>
-          <a:effectRef idx="2">
-            <a:schemeClr val="accent1"/>
-          </a:effectRef>
-          <a:fontRef idx="minor">
-            <a:schemeClr val="lt1"/>
-          </a:fontRef>
-        </p:style>
-        <p:txBody>
-          <a:bodyPr rtlCol="0" anchor="ctr" lIns="0" rIns="0" tIns="0" bIns="0"/>
-          <a:lstStyle/>
-          <a:p>
-            <a:pPr algn="ctr"/>
-            <a:r>
-              <a:rPr sz="1700" b="1">
-                <a:solidFill>
-                  <a:srgbClr val="202122"/>
-                </a:solidFill>
-                <a:latin typeface="Calibri"/>
-              </a:rPr>
-              <a:t>3</a:t>
+              <a:t>e.g.</a:t>
             </a:r>
           </a:p>
         </p:txBody>
@@ -8529,8 +11501,8 @@
         </p:nvSpPr>
         <p:spPr>
           <a:xfrm>
-            <a:off x="1325880" y="3566160"/>
-            <a:ext cx="6583680" cy="822960"/>
+            <a:off x="8046720" y="2560320"/>
+            <a:ext cx="3291840" cy="365760"/>
           </a:xfrm>
           <a:prstGeom prst="rect">
             <a:avLst/>
@@ -8538,194 +11510,51 @@
           <a:noFill/>
         </p:spPr>
         <p:txBody>
-          <a:bodyPr wrap="square" anchor="ctr" lIns="0" rIns="0" tIns="0" bIns="0"/>
+          <a:bodyPr wrap="square" anchor="t" lIns="0" rIns="0" tIns="0" bIns="0"/>
           <a:lstStyle/>
           <a:p>
             <a:pPr algn="l"/>
             <a:r>
-              <a:rPr sz="2000" b="0" i="0">
+              <a:rPr sz="1300" b="1" i="0">
+                <a:solidFill>
+                  <a:srgbClr val="A9C8F0"/>
+                </a:solidFill>
+                <a:latin typeface="Calibri"/>
+              </a:rPr>
+              <a:t>EXAMPLE</a:t>
+            </a:r>
+          </a:p>
+        </p:txBody>
+      </p:sp>
+      <p:sp>
+        <p:nvSpPr>
+          <p:cNvPr id="10" name="TextBox 9"/>
+          <p:cNvSpPr txBox="1"/>
+          <p:nvPr/>
+        </p:nvSpPr>
+        <p:spPr>
+          <a:xfrm>
+            <a:off x="8046720" y="2971800"/>
+            <a:ext cx="3291840" cy="2971800"/>
+          </a:xfrm>
+          <a:prstGeom prst="rect">
+            <a:avLst/>
+          </a:prstGeom>
+          <a:noFill/>
+        </p:spPr>
+        <p:txBody>
+          <a:bodyPr wrap="square" anchor="t" lIns="0" rIns="0" tIns="0" bIns="0"/>
+          <a:lstStyle/>
+          <a:p>
+            <a:pPr algn="l"/>
+            <a:r>
+              <a:rPr sz="1900" b="0" i="0">
                 <a:solidFill>
                   <a:srgbClr val="FFFFFF"/>
                 </a:solidFill>
-                <a:latin typeface="Calibri"/>
-              </a:rPr>
-              <a:t>Where might you meet hexadecimal in engineering?</a:t>
-            </a:r>
-          </a:p>
-        </p:txBody>
-      </p:sp>
-      <p:sp>
-        <p:nvSpPr>
-          <p:cNvPr id="10" name="Rounded Rectangle 9"/>
-          <p:cNvSpPr/>
-          <p:nvPr/>
-        </p:nvSpPr>
-        <p:spPr>
-          <a:xfrm>
-            <a:off x="8229600" y="1645920"/>
-            <a:ext cx="3410712" cy="2926080"/>
-          </a:xfrm>
-          <a:prstGeom prst="roundRect">
-            <a:avLst>
-              <a:gd name="adj" fmla="val 8000"/>
-            </a:avLst>
-          </a:prstGeom>
-          <a:solidFill>
-            <a:srgbClr val="0645AD"/>
-          </a:solidFill>
-          <a:ln>
-            <a:noFill/>
-          </a:ln>
-          <a:effectLst/>
-        </p:spPr>
-        <p:style>
-          <a:lnRef idx="1">
-            <a:schemeClr val="accent1"/>
-          </a:lnRef>
-          <a:fillRef idx="3">
-            <a:schemeClr val="accent1"/>
-          </a:fillRef>
-          <a:effectRef idx="2">
-            <a:schemeClr val="accent1"/>
-          </a:effectRef>
-          <a:fontRef idx="minor">
-            <a:schemeClr val="lt1"/>
-          </a:fontRef>
-        </p:style>
-        <p:txBody>
-          <a:bodyPr rtlCol="0" anchor="ctr"/>
-          <a:lstStyle/>
-          <a:p/>
-        </p:txBody>
-      </p:sp>
-      <p:sp>
-        <p:nvSpPr>
-          <p:cNvPr id="11" name="TextBox 10"/>
-          <p:cNvSpPr txBox="1"/>
-          <p:nvPr/>
-        </p:nvSpPr>
-        <p:spPr>
-          <a:xfrm>
-            <a:off x="8503920" y="1874519"/>
-            <a:ext cx="2926080" cy="365760"/>
-          </a:xfrm>
-          <a:prstGeom prst="rect">
-            <a:avLst/>
-          </a:prstGeom>
-          <a:noFill/>
-        </p:spPr>
-        <p:txBody>
-          <a:bodyPr wrap="square" anchor="t" lIns="0" rIns="0" tIns="0" bIns="0"/>
-          <a:lstStyle/>
-          <a:p>
-            <a:pPr algn="l"/>
-            <a:r>
-              <a:rPr sz="1300" b="1" i="0">
-                <a:solidFill>
-                  <a:srgbClr val="A9C8F0"/>
-                </a:solidFill>
-                <a:latin typeface="Calibri"/>
-              </a:rPr>
-              <a:t>REVISE THIS TOPIC</a:t>
-            </a:r>
-          </a:p>
-        </p:txBody>
-      </p:sp>
-      <p:sp>
-        <p:nvSpPr>
-          <p:cNvPr id="12" name="TextBox 11"/>
-          <p:cNvSpPr txBox="1"/>
-          <p:nvPr/>
-        </p:nvSpPr>
-        <p:spPr>
-          <a:xfrm>
-            <a:off x="8503920" y="2286000"/>
-            <a:ext cx="2926080" cy="548640"/>
-          </a:xfrm>
-          <a:prstGeom prst="rect">
-            <a:avLst/>
-          </a:prstGeom>
-          <a:noFill/>
-        </p:spPr>
-        <p:txBody>
-          <a:bodyPr wrap="square" anchor="t" lIns="0" rIns="0" tIns="0" bIns="0"/>
-          <a:lstStyle/>
-          <a:p>
-            <a:pPr algn="l"/>
-            <a:r>
-              <a:rPr sz="1400" b="0" i="0">
-                <a:solidFill>
-                  <a:srgbClr val="FFFFFF"/>
-                </a:solidFill>
-                <a:latin typeface="Calibri"/>
-              </a:rPr>
-              <a:t>Revision notes for this lesson are on the study wiki:</a:t>
-            </a:r>
-          </a:p>
-        </p:txBody>
-      </p:sp>
-      <p:sp>
-        <p:nvSpPr>
-          <p:cNvPr id="13" name="TextBox 12"/>
-          <p:cNvSpPr txBox="1"/>
-          <p:nvPr/>
-        </p:nvSpPr>
-        <p:spPr>
-          <a:xfrm>
-            <a:off x="8503920" y="2926080"/>
-            <a:ext cx="2926080" cy="1463040"/>
-          </a:xfrm>
-          <a:prstGeom prst="rect">
-            <a:avLst/>
-          </a:prstGeom>
-          <a:noFill/>
-        </p:spPr>
-        <p:txBody>
-          <a:bodyPr wrap="square" anchor="t" lIns="0" rIns="0" tIns="0" bIns="0"/>
-          <a:lstStyle/>
-          <a:p>
-            <a:pPr algn="l"/>
-            <a:r>
-              <a:rPr sz="2000" b="1" i="0">
-                <a:solidFill>
-                  <a:srgbClr val="FFFFFF"/>
-                </a:solidFill>
                 <a:latin typeface="Cambria"/>
               </a:rPr>
-              <a:t>Engineering Core, Part 1</a:t>
-            </a:r>
-          </a:p>
-        </p:txBody>
-      </p:sp>
-      <p:sp>
-        <p:nvSpPr>
-          <p:cNvPr id="14" name="TextBox 13"/>
-          <p:cNvSpPr txBox="1"/>
-          <p:nvPr/>
-        </p:nvSpPr>
-        <p:spPr>
-          <a:xfrm>
-            <a:off x="548640" y="5669280"/>
-            <a:ext cx="11094415" cy="548640"/>
-          </a:xfrm>
-          <a:prstGeom prst="rect">
-            <a:avLst/>
-          </a:prstGeom>
-          <a:noFill/>
-        </p:spPr>
-        <p:txBody>
-          <a:bodyPr wrap="square" anchor="t" lIns="0" rIns="0" tIns="0" bIns="0"/>
-          <a:lstStyle/>
-          <a:p>
-            <a:pPr algn="l"/>
-            <a:r>
-              <a:rPr sz="1200" b="0" i="0">
-                <a:solidFill>
-                  <a:srgbClr val="A9C8F0"/>
-                </a:solidFill>
-                <a:latin typeface="Calibri"/>
-              </a:rPr>
-              <a:t>https://lana6478.github.io/T-level-Design-Development-Engineering-Manufacturing/#/01-core-component/01-engineering-core-part1.md</a:t>
+              <a:t>Binary 1011 = 8 + 0 + 2 + 1 = 11 in decimal, which is B in hexadecimal.</a:t>
             </a:r>
           </a:p>
         </p:txBody>
